--- a/docs/Project_Presentation.pptx
+++ b/docs/Project_Presentation.pptx
@@ -9,9 +9,9 @@
     <p:sldId id="257" r:id="rId3"/>
     <p:sldId id="258" r:id="rId4"/>
     <p:sldId id="259" r:id="rId5"/>
-    <p:sldId id="260" r:id="rId6"/>
-    <p:sldId id="266" r:id="rId7"/>
-    <p:sldId id="261" r:id="rId8"/>
+    <p:sldId id="267" r:id="rId6"/>
+    <p:sldId id="260" r:id="rId7"/>
+    <p:sldId id="266" r:id="rId8"/>
     <p:sldId id="263" r:id="rId9"/>
     <p:sldId id="264" r:id="rId10"/>
     <p:sldId id="265" r:id="rId11"/>
@@ -113,7 +113,139 @@
       </a:defRPr>
     </a:lvl9pPr>
   </p:defaultTextStyle>
+  <p:extLst>
+    <p:ext uri="{EFAFB233-063F-42B5-8137-9DF3F51BA10A}">
+      <p15:sldGuideLst xmlns:p15="http://schemas.microsoft.com/office/powerpoint/2012/main"/>
+    </p:ext>
+  </p:extLst>
 </p:presentation>
+</file>
+
+<file path=ppt/revisionInfo.xml><?xml version="1.0" encoding="utf-8"?>
+<p1510:revInfo xmlns:a="http://schemas.openxmlformats.org/drawingml/2006/main" xmlns:r="http://schemas.openxmlformats.org/officeDocument/2006/relationships" xmlns:p1510="http://schemas.microsoft.com/office/powerpoint/2015/10/main">
+  <p1510:revLst>
+    <p1510:client id="{F260A8EC-1E5D-412E-A175-1AB172C9C8E0}" v="41" dt="2026-08-19T03:45:40.928"/>
+  </p1510:revLst>
+</p1510:revInfo>
+</file>
+
+<file path=ppt/changesInfos/changesInfo1.xml><?xml version="1.0" encoding="utf-8"?>
+<pc:chgInfo xmlns:a="http://schemas.openxmlformats.org/drawingml/2006/main" xmlns:r="http://schemas.openxmlformats.org/officeDocument/2006/relationships" xmlns:ac="http://schemas.microsoft.com/office/drawing/2013/main/command" xmlns:pc="http://schemas.microsoft.com/office/powerpoint/2013/main/command">
+  <pc:docChgLst>
+    <pc:chgData name="Dhanush P" userId="56329a40d34d80c2" providerId="LiveId" clId="{1F43D42F-BA7A-47E2-9ABC-88BEB8B02009}"/>
+    <pc:docChg chg="undo custSel addSld delSld modSld sldOrd">
+      <pc:chgData name="Dhanush P" userId="56329a40d34d80c2" providerId="LiveId" clId="{1F43D42F-BA7A-47E2-9ABC-88BEB8B02009}" dt="2026-08-19T03:51:18.503" v="385" actId="47"/>
+      <pc:docMkLst>
+        <pc:docMk/>
+      </pc:docMkLst>
+      <pc:sldChg chg="modSp mod">
+        <pc:chgData name="Dhanush P" userId="56329a40d34d80c2" providerId="LiveId" clId="{1F43D42F-BA7A-47E2-9ABC-88BEB8B02009}" dt="2026-08-19T03:48:23.762" v="381" actId="20577"/>
+        <pc:sldMkLst>
+          <pc:docMk/>
+          <pc:sldMk cId="4131051487" sldId="258"/>
+        </pc:sldMkLst>
+        <pc:spChg chg="mod">
+          <ac:chgData name="Dhanush P" userId="56329a40d34d80c2" providerId="LiveId" clId="{1F43D42F-BA7A-47E2-9ABC-88BEB8B02009}" dt="2026-08-19T03:48:23.762" v="381" actId="20577"/>
+          <ac:spMkLst>
+            <pc:docMk/>
+            <pc:sldMk cId="4131051487" sldId="258"/>
+            <ac:spMk id="7" creationId="{E80C5EDF-36E1-B20A-4EE7-25642591F363}"/>
+          </ac:spMkLst>
+        </pc:spChg>
+      </pc:sldChg>
+      <pc:sldChg chg="modSp mod">
+        <pc:chgData name="Dhanush P" userId="56329a40d34d80c2" providerId="LiveId" clId="{1F43D42F-BA7A-47E2-9ABC-88BEB8B02009}" dt="2026-08-19T03:47:39.782" v="369" actId="1076"/>
+        <pc:sldMkLst>
+          <pc:docMk/>
+          <pc:sldMk cId="2712314714" sldId="259"/>
+        </pc:sldMkLst>
+        <pc:spChg chg="mod">
+          <ac:chgData name="Dhanush P" userId="56329a40d34d80c2" providerId="LiveId" clId="{1F43D42F-BA7A-47E2-9ABC-88BEB8B02009}" dt="2026-08-19T03:47:39.782" v="369" actId="1076"/>
+          <ac:spMkLst>
+            <pc:docMk/>
+            <pc:sldMk cId="2712314714" sldId="259"/>
+            <ac:spMk id="11" creationId="{F0DA0EFA-A4E7-C14A-77D1-FB661563C410}"/>
+          </ac:spMkLst>
+        </pc:spChg>
+        <pc:graphicFrameChg chg="mod modGraphic">
+          <ac:chgData name="Dhanush P" userId="56329a40d34d80c2" providerId="LiveId" clId="{1F43D42F-BA7A-47E2-9ABC-88BEB8B02009}" dt="2026-08-19T03:40:30.117" v="294" actId="20577"/>
+          <ac:graphicFrameMkLst>
+            <pc:docMk/>
+            <pc:sldMk cId="2712314714" sldId="259"/>
+            <ac:graphicFrameMk id="9" creationId="{20978923-9769-A40D-D9B9-70198CE06204}"/>
+          </ac:graphicFrameMkLst>
+        </pc:graphicFrameChg>
+      </pc:sldChg>
+      <pc:sldChg chg="ord">
+        <pc:chgData name="Dhanush P" userId="56329a40d34d80c2" providerId="LiveId" clId="{1F43D42F-BA7A-47E2-9ABC-88BEB8B02009}" dt="2026-08-19T03:32:41.896" v="194"/>
+        <pc:sldMkLst>
+          <pc:docMk/>
+          <pc:sldMk cId="1321699848" sldId="260"/>
+        </pc:sldMkLst>
+      </pc:sldChg>
+      <pc:sldChg chg="delSp modSp del mod">
+        <pc:chgData name="Dhanush P" userId="56329a40d34d80c2" providerId="LiveId" clId="{1F43D42F-BA7A-47E2-9ABC-88BEB8B02009}" dt="2026-08-19T03:40:09.198" v="291" actId="47"/>
+        <pc:sldMkLst>
+          <pc:docMk/>
+          <pc:sldMk cId="4118803354" sldId="261"/>
+        </pc:sldMkLst>
+        <pc:spChg chg="del mod">
+          <ac:chgData name="Dhanush P" userId="56329a40d34d80c2" providerId="LiveId" clId="{1F43D42F-BA7A-47E2-9ABC-88BEB8B02009}" dt="2026-08-19T03:32:39.641" v="190"/>
+          <ac:spMkLst>
+            <pc:docMk/>
+            <pc:sldMk cId="4118803354" sldId="261"/>
+            <ac:spMk id="9" creationId="{0A96FEFA-4DF5-B0D9-3A34-5DCA0CCBFF43}"/>
+          </ac:spMkLst>
+        </pc:spChg>
+      </pc:sldChg>
+      <pc:sldChg chg="modSp mod ord">
+        <pc:chgData name="Dhanush P" userId="56329a40d34d80c2" providerId="LiveId" clId="{1F43D42F-BA7A-47E2-9ABC-88BEB8B02009}" dt="2026-08-19T03:32:40.333" v="192"/>
+        <pc:sldMkLst>
+          <pc:docMk/>
+          <pc:sldMk cId="3534381961" sldId="266"/>
+        </pc:sldMkLst>
+        <pc:spChg chg="mod">
+          <ac:chgData name="Dhanush P" userId="56329a40d34d80c2" providerId="LiveId" clId="{1F43D42F-BA7A-47E2-9ABC-88BEB8B02009}" dt="2026-08-19T03:32:32.538" v="187" actId="1076"/>
+          <ac:spMkLst>
+            <pc:docMk/>
+            <pc:sldMk cId="3534381961" sldId="266"/>
+            <ac:spMk id="3" creationId="{BF79DB67-4E62-F4A9-0F84-D7EF1DCA261F}"/>
+          </ac:spMkLst>
+        </pc:spChg>
+      </pc:sldChg>
+      <pc:sldChg chg="modSp add mod">
+        <pc:chgData name="Dhanush P" userId="56329a40d34d80c2" providerId="LiveId" clId="{1F43D42F-BA7A-47E2-9ABC-88BEB8B02009}" dt="2026-08-19T03:49:11.050" v="384" actId="14734"/>
+        <pc:sldMkLst>
+          <pc:docMk/>
+          <pc:sldMk cId="2343066160" sldId="267"/>
+        </pc:sldMkLst>
+        <pc:spChg chg="mod">
+          <ac:chgData name="Dhanush P" userId="56329a40d34d80c2" providerId="LiveId" clId="{1F43D42F-BA7A-47E2-9ABC-88BEB8B02009}" dt="2026-08-19T03:47:51.743" v="378" actId="1076"/>
+          <ac:spMkLst>
+            <pc:docMk/>
+            <pc:sldMk cId="2343066160" sldId="267"/>
+            <ac:spMk id="11" creationId="{84C196B5-2630-734D-3CF2-781DAFE22941}"/>
+          </ac:spMkLst>
+        </pc:spChg>
+        <pc:graphicFrameChg chg="mod modGraphic">
+          <ac:chgData name="Dhanush P" userId="56329a40d34d80c2" providerId="LiveId" clId="{1F43D42F-BA7A-47E2-9ABC-88BEB8B02009}" dt="2026-08-19T03:49:11.050" v="384" actId="14734"/>
+          <ac:graphicFrameMkLst>
+            <pc:docMk/>
+            <pc:sldMk cId="2343066160" sldId="267"/>
+            <ac:graphicFrameMk id="9" creationId="{914D41E0-21A2-5949-3353-8B9C6169332D}"/>
+          </ac:graphicFrameMkLst>
+        </pc:graphicFrameChg>
+      </pc:sldChg>
+      <pc:sldChg chg="add del">
+        <pc:chgData name="Dhanush P" userId="56329a40d34d80c2" providerId="LiveId" clId="{1F43D42F-BA7A-47E2-9ABC-88BEB8B02009}" dt="2026-08-19T03:51:18.503" v="385" actId="47"/>
+        <pc:sldMkLst>
+          <pc:docMk/>
+          <pc:sldMk cId="2557434121" sldId="268"/>
+        </pc:sldMkLst>
+      </pc:sldChg>
+    </pc:docChg>
+  </pc:docChgLst>
+</pc:chgInfo>
 </file>
 
 <file path=ppt/slideLayouts/slideLayout1.xml><?xml version="1.0" encoding="utf-8"?>
@@ -265,7 +397,7 @@
           <a:p>
             <a:fld id="{F9EF34BA-1B9B-44B6-A5D6-6882C9FB0354}" type="datetimeFigureOut">
               <a:rPr lang="en-IN" smtClean="0"/>
-              <a:t>08-08-2026</a:t>
+              <a:t>19-08-2026</a:t>
             </a:fld>
             <a:endParaRPr lang="en-IN"/>
           </a:p>
@@ -465,7 +597,7 @@
           <a:p>
             <a:fld id="{F9EF34BA-1B9B-44B6-A5D6-6882C9FB0354}" type="datetimeFigureOut">
               <a:rPr lang="en-IN" smtClean="0"/>
-              <a:t>08-08-2026</a:t>
+              <a:t>19-08-2026</a:t>
             </a:fld>
             <a:endParaRPr lang="en-IN"/>
           </a:p>
@@ -675,7 +807,7 @@
           <a:p>
             <a:fld id="{F9EF34BA-1B9B-44B6-A5D6-6882C9FB0354}" type="datetimeFigureOut">
               <a:rPr lang="en-IN" smtClean="0"/>
-              <a:t>08-08-2026</a:t>
+              <a:t>19-08-2026</a:t>
             </a:fld>
             <a:endParaRPr lang="en-IN"/>
           </a:p>
@@ -875,7 +1007,7 @@
           <a:p>
             <a:fld id="{F9EF34BA-1B9B-44B6-A5D6-6882C9FB0354}" type="datetimeFigureOut">
               <a:rPr lang="en-IN" smtClean="0"/>
-              <a:t>08-08-2026</a:t>
+              <a:t>19-08-2026</a:t>
             </a:fld>
             <a:endParaRPr lang="en-IN"/>
           </a:p>
@@ -1151,7 +1283,7 @@
           <a:p>
             <a:fld id="{F9EF34BA-1B9B-44B6-A5D6-6882C9FB0354}" type="datetimeFigureOut">
               <a:rPr lang="en-IN" smtClean="0"/>
-              <a:t>08-08-2026</a:t>
+              <a:t>19-08-2026</a:t>
             </a:fld>
             <a:endParaRPr lang="en-IN"/>
           </a:p>
@@ -1419,7 +1551,7 @@
           <a:p>
             <a:fld id="{F9EF34BA-1B9B-44B6-A5D6-6882C9FB0354}" type="datetimeFigureOut">
               <a:rPr lang="en-IN" smtClean="0"/>
-              <a:t>08-08-2026</a:t>
+              <a:t>19-08-2026</a:t>
             </a:fld>
             <a:endParaRPr lang="en-IN"/>
           </a:p>
@@ -1834,7 +1966,7 @@
           <a:p>
             <a:fld id="{F9EF34BA-1B9B-44B6-A5D6-6882C9FB0354}" type="datetimeFigureOut">
               <a:rPr lang="en-IN" smtClean="0"/>
-              <a:t>08-08-2026</a:t>
+              <a:t>19-08-2026</a:t>
             </a:fld>
             <a:endParaRPr lang="en-IN"/>
           </a:p>
@@ -1976,7 +2108,7 @@
           <a:p>
             <a:fld id="{F9EF34BA-1B9B-44B6-A5D6-6882C9FB0354}" type="datetimeFigureOut">
               <a:rPr lang="en-IN" smtClean="0"/>
-              <a:t>08-08-2026</a:t>
+              <a:t>19-08-2026</a:t>
             </a:fld>
             <a:endParaRPr lang="en-IN"/>
           </a:p>
@@ -2089,7 +2221,7 @@
           <a:p>
             <a:fld id="{F9EF34BA-1B9B-44B6-A5D6-6882C9FB0354}" type="datetimeFigureOut">
               <a:rPr lang="en-IN" smtClean="0"/>
-              <a:t>08-08-2026</a:t>
+              <a:t>19-08-2026</a:t>
             </a:fld>
             <a:endParaRPr lang="en-IN"/>
           </a:p>
@@ -2402,7 +2534,7 @@
           <a:p>
             <a:fld id="{F9EF34BA-1B9B-44B6-A5D6-6882C9FB0354}" type="datetimeFigureOut">
               <a:rPr lang="en-IN" smtClean="0"/>
-              <a:t>08-08-2026</a:t>
+              <a:t>19-08-2026</a:t>
             </a:fld>
             <a:endParaRPr lang="en-IN"/>
           </a:p>
@@ -2691,7 +2823,7 @@
           <a:p>
             <a:fld id="{F9EF34BA-1B9B-44B6-A5D6-6882C9FB0354}" type="datetimeFigureOut">
               <a:rPr lang="en-IN" smtClean="0"/>
-              <a:t>08-08-2026</a:t>
+              <a:t>19-08-2026</a:t>
             </a:fld>
             <a:endParaRPr lang="en-IN"/>
           </a:p>
@@ -2934,7 +3066,7 @@
           <a:p>
             <a:fld id="{F9EF34BA-1B9B-44B6-A5D6-6882C9FB0354}" type="datetimeFigureOut">
               <a:rPr lang="en-IN" smtClean="0"/>
-              <a:t>08-08-2026</a:t>
+              <a:t>19-08-2026</a:t>
             </a:fld>
             <a:endParaRPr lang="en-IN"/>
           </a:p>
@@ -4094,8 +4226,8 @@
         </p:nvSpPr>
         <p:spPr>
           <a:xfrm>
-            <a:off x="795867" y="2082800"/>
-            <a:ext cx="10261600" cy="3970318"/>
+            <a:off x="787400" y="1888067"/>
+            <a:ext cx="10261600" cy="4524315"/>
           </a:xfrm>
           <a:prstGeom prst="rect">
             <a:avLst/>
@@ -4110,7 +4242,7 @@
           <a:p>
             <a:r>
               <a:rPr lang="en-IN" b="1" dirty="0"/>
-              <a:t>What the Project Will Achieve :</a:t>
+              <a:t>To Develop The Project :</a:t>
             </a:r>
           </a:p>
           <a:p>
@@ -4168,10 +4300,18 @@
             </a:r>
           </a:p>
           <a:p>
-            <a:pPr marL="285750" lvl="0" indent="-285750">
-              <a:buFont typeface="Arial" panose="020B0604020202020204" pitchFamily="34" charset="0"/>
-              <a:buChar char="•"/>
-            </a:pPr>
+            <a:pPr lvl="0"/>
+            <a:endParaRPr lang="en-IN" b="1" dirty="0"/>
+          </a:p>
+          <a:p>
+            <a:pPr lvl="0"/>
+            <a:r>
+              <a:rPr lang="en-IN" b="1" dirty="0"/>
+              <a:t>To Enhance The Features :</a:t>
+            </a:r>
+          </a:p>
+          <a:p>
+            <a:pPr lvl="0"/>
             <a:endParaRPr lang="en-IN" b="1" dirty="0"/>
           </a:p>
           <a:p>
@@ -4303,35 +4443,49 @@
           <p:nvPr>
             <p:extLst>
               <p:ext uri="{D42A27DB-BD31-4B8C-83A1-F6EECF244321}">
-                <p14:modId xmlns:p14="http://schemas.microsoft.com/office/powerpoint/2010/main" val="341913254"/>
+                <p14:modId xmlns:p14="http://schemas.microsoft.com/office/powerpoint/2010/main" val="2801344468"/>
               </p:ext>
             </p:extLst>
           </p:nvPr>
         </p:nvGraphicFramePr>
         <p:xfrm>
-          <a:off x="880533" y="2580588"/>
-          <a:ext cx="10515600" cy="2255520"/>
+          <a:off x="143933" y="1879601"/>
+          <a:ext cx="11963400" cy="4305748"/>
         </p:xfrm>
         <a:graphic>
           <a:graphicData uri="http://schemas.openxmlformats.org/drawingml/2006/table">
             <a:tbl>
               <a:tblPr/>
               <a:tblGrid>
-                <a:gridCol w="3505200">
+                <a:gridCol w="719667">
+                  <a:extLst>
+                    <a:ext uri="{9D8B030D-6E8A-4147-A177-3AD203B41FA5}">
+                      <a16:colId xmlns:a16="http://schemas.microsoft.com/office/drawing/2014/main" val="207665555"/>
+                    </a:ext>
+                  </a:extLst>
+                </a:gridCol>
+                <a:gridCol w="1803400">
+                  <a:extLst>
+                    <a:ext uri="{9D8B030D-6E8A-4147-A177-3AD203B41FA5}">
+                      <a16:colId xmlns:a16="http://schemas.microsoft.com/office/drawing/2014/main" val="3902109784"/>
+                    </a:ext>
+                  </a:extLst>
+                </a:gridCol>
+                <a:gridCol w="812800">
                   <a:extLst>
                     <a:ext uri="{9D8B030D-6E8A-4147-A177-3AD203B41FA5}">
                       <a16:colId xmlns:a16="http://schemas.microsoft.com/office/drawing/2014/main" val="2524853104"/>
                     </a:ext>
                   </a:extLst>
                 </a:gridCol>
-                <a:gridCol w="3505200">
+                <a:gridCol w="4783667">
                   <a:extLst>
                     <a:ext uri="{9D8B030D-6E8A-4147-A177-3AD203B41FA5}">
                       <a16:colId xmlns:a16="http://schemas.microsoft.com/office/drawing/2014/main" val="1622254581"/>
                     </a:ext>
                   </a:extLst>
                 </a:gridCol>
-                <a:gridCol w="3505200">
+                <a:gridCol w="3843866">
                   <a:extLst>
                     <a:ext uri="{9D8B030D-6E8A-4147-A177-3AD203B41FA5}">
                       <a16:colId xmlns:a16="http://schemas.microsoft.com/office/drawing/2014/main" val="1970995257"/>
@@ -4339,7 +4493,7 @@
                   </a:extLst>
                 </a:gridCol>
               </a:tblGrid>
-              <a:tr h="0">
+              <a:tr h="424051">
                 <a:tc>
                   <a:txBody>
                     <a:bodyPr/>
@@ -4352,16 +4506,16 @@
                         <a:buNone/>
                       </a:pPr>
                       <a:r>
-                        <a:rPr lang="en-IN" b="1" dirty="0">
+                        <a:rPr lang="en-US" b="1" dirty="0">
                           <a:solidFill>
                             <a:srgbClr val="1F1F1F"/>
                           </a:solidFill>
                           <a:effectLst/>
                           <a:latin typeface="Google Sans Text"/>
                         </a:rPr>
-                        <a:t>Approach</a:t>
+                        <a:t>S. No</a:t>
                       </a:r>
-                      <a:endParaRPr lang="en-IN" dirty="0">
+                      <a:endParaRPr lang="en-IN" b="1" dirty="0">
                         <a:solidFill>
                           <a:srgbClr val="1F1F1F"/>
                         </a:solidFill>
@@ -4422,902 +4576,16 @@
                         <a:buNone/>
                       </a:pPr>
                       <a:r>
-                        <a:rPr lang="en-IN" b="1">
+                        <a:rPr lang="en-US" b="1" dirty="0">
                           <a:solidFill>
                             <a:srgbClr val="1F1F1F"/>
                           </a:solidFill>
                           <a:effectLst/>
                           <a:latin typeface="Google Sans Text"/>
                         </a:rPr>
-                        <a:t>Key Strength</a:t>
+                        <a:t>Research Paper</a:t>
                       </a:r>
-                      <a:endParaRPr lang="en-IN">
-                        <a:solidFill>
-                          <a:srgbClr val="1F1F1F"/>
-                        </a:solidFill>
-                        <a:effectLst/>
-                        <a:latin typeface="Google Sans Text"/>
-                      </a:endParaRPr>
-                    </a:p>
-                  </a:txBody>
-                  <a:tcPr marT="60960" marB="60960" anchor="ctr">
-                    <a:lnL w="7620" cap="flat" cmpd="sng" algn="ctr">
-                      <a:solidFill>
-                        <a:srgbClr val="C4C7C5"/>
-                      </a:solidFill>
-                      <a:prstDash val="solid"/>
-                      <a:round/>
-                      <a:headEnd type="none" w="med" len="med"/>
-                      <a:tailEnd type="none" w="med" len="med"/>
-                    </a:lnL>
-                    <a:lnR w="7620" cap="flat" cmpd="sng" algn="ctr">
-                      <a:solidFill>
-                        <a:srgbClr val="C4C7C5"/>
-                      </a:solidFill>
-                      <a:prstDash val="solid"/>
-                      <a:round/>
-                      <a:headEnd type="none" w="med" len="med"/>
-                      <a:tailEnd type="none" w="med" len="med"/>
-                    </a:lnR>
-                    <a:lnT w="7620" cap="flat" cmpd="sng" algn="ctr">
-                      <a:solidFill>
-                        <a:srgbClr val="C4C7C5"/>
-                      </a:solidFill>
-                      <a:prstDash val="solid"/>
-                      <a:round/>
-                      <a:headEnd type="none" w="med" len="med"/>
-                      <a:tailEnd type="none" w="med" len="med"/>
-                    </a:lnT>
-                    <a:lnB w="7620" cap="flat" cmpd="sng" algn="ctr">
-                      <a:solidFill>
-                        <a:srgbClr val="C4C7C5"/>
-                      </a:solidFill>
-                      <a:prstDash val="solid"/>
-                      <a:round/>
-                      <a:headEnd type="none" w="med" len="med"/>
-                      <a:tailEnd type="none" w="med" len="med"/>
-                    </a:lnB>
-                    <a:noFill/>
-                  </a:tcPr>
-                </a:tc>
-                <a:tc>
-                  <a:txBody>
-                    <a:bodyPr/>
-                    <a:lstStyle/>
-                    <a:p>
-                      <a:pPr marL="0" marR="0" rtl="0">
-                        <a:spcAft>
-                          <a:spcPts val="2400"/>
-                        </a:spcAft>
-                        <a:buNone/>
-                      </a:pPr>
-                      <a:r>
-                        <a:rPr lang="en-IN" b="1">
-                          <a:solidFill>
-                            <a:srgbClr val="1F1F1F"/>
-                          </a:solidFill>
-                          <a:effectLst/>
-                          <a:latin typeface="Google Sans Text"/>
-                        </a:rPr>
-                        <a:t>Main Limitation</a:t>
-                      </a:r>
-                      <a:endParaRPr lang="en-IN">
-                        <a:solidFill>
-                          <a:srgbClr val="1F1F1F"/>
-                        </a:solidFill>
-                        <a:effectLst/>
-                        <a:latin typeface="Google Sans Text"/>
-                      </a:endParaRPr>
-                    </a:p>
-                  </a:txBody>
-                  <a:tcPr marT="60960" marB="60960" anchor="ctr">
-                    <a:lnL w="7620" cap="flat" cmpd="sng" algn="ctr">
-                      <a:solidFill>
-                        <a:srgbClr val="C4C7C5"/>
-                      </a:solidFill>
-                      <a:prstDash val="solid"/>
-                      <a:round/>
-                      <a:headEnd type="none" w="med" len="med"/>
-                      <a:tailEnd type="none" w="med" len="med"/>
-                    </a:lnL>
-                    <a:lnR w="7620" cap="flat" cmpd="sng" algn="ctr">
-                      <a:solidFill>
-                        <a:srgbClr val="C4C7C5"/>
-                      </a:solidFill>
-                      <a:prstDash val="solid"/>
-                      <a:round/>
-                      <a:headEnd type="none" w="med" len="med"/>
-                      <a:tailEnd type="none" w="med" len="med"/>
-                    </a:lnR>
-                    <a:lnT w="7620" cap="flat" cmpd="sng" algn="ctr">
-                      <a:solidFill>
-                        <a:srgbClr val="C4C7C5"/>
-                      </a:solidFill>
-                      <a:prstDash val="solid"/>
-                      <a:round/>
-                      <a:headEnd type="none" w="med" len="med"/>
-                      <a:tailEnd type="none" w="med" len="med"/>
-                    </a:lnT>
-                    <a:lnB w="7620" cap="flat" cmpd="sng" algn="ctr">
-                      <a:solidFill>
-                        <a:srgbClr val="C4C7C5"/>
-                      </a:solidFill>
-                      <a:prstDash val="solid"/>
-                      <a:round/>
-                      <a:headEnd type="none" w="med" len="med"/>
-                      <a:tailEnd type="none" w="med" len="med"/>
-                    </a:lnB>
-                    <a:noFill/>
-                  </a:tcPr>
-                </a:tc>
-                <a:extLst>
-                  <a:ext uri="{0D108BD9-81ED-4DB2-BD59-A6C34878D82A}">
-                    <a16:rowId xmlns:a16="http://schemas.microsoft.com/office/drawing/2014/main" val="3040669093"/>
-                  </a:ext>
-                </a:extLst>
-              </a:tr>
-              <a:tr h="0">
-                <a:tc>
-                  <a:txBody>
-                    <a:bodyPr/>
-                    <a:lstStyle/>
-                    <a:p>
-                      <a:pPr marL="0" marR="0" rtl="0">
-                        <a:spcAft>
-                          <a:spcPts val="2400"/>
-                        </a:spcAft>
-                        <a:buNone/>
-                      </a:pPr>
-                      <a:r>
-                        <a:rPr lang="en-IN" b="1" dirty="0">
-                          <a:solidFill>
-                            <a:srgbClr val="1F1F1F"/>
-                          </a:solidFill>
-                          <a:effectLst/>
-                          <a:latin typeface="Google Sans Text"/>
-                        </a:rPr>
-                        <a:t>Biomedical Encoders</a:t>
-                      </a:r>
-                      <a:r>
-                        <a:rPr lang="en-IN" dirty="0">
-                          <a:solidFill>
-                            <a:srgbClr val="1F1F1F"/>
-                          </a:solidFill>
-                          <a:effectLst/>
-                          <a:latin typeface="Google Sans Text"/>
-                        </a:rPr>
-                        <a:t> </a:t>
-                      </a:r>
-                      <a:r>
-                        <a:rPr lang="en-IN" i="1" dirty="0">
-                          <a:solidFill>
-                            <a:srgbClr val="1F1F1F"/>
-                          </a:solidFill>
-                          <a:effectLst/>
-                          <a:latin typeface="Google Sans Text"/>
-                        </a:rPr>
-                        <a:t>(</a:t>
-                      </a:r>
-                      <a:r>
-                        <a:rPr lang="en-IN" i="1" dirty="0" err="1">
-                          <a:solidFill>
-                            <a:srgbClr val="1F1F1F"/>
-                          </a:solidFill>
-                          <a:effectLst/>
-                          <a:latin typeface="Google Sans Text"/>
-                        </a:rPr>
-                        <a:t>BioBERT</a:t>
-                      </a:r>
-                      <a:r>
-                        <a:rPr lang="en-IN" i="1" dirty="0">
-                          <a:solidFill>
-                            <a:srgbClr val="1F1F1F"/>
-                          </a:solidFill>
-                          <a:effectLst/>
-                          <a:latin typeface="Google Sans Text"/>
-                        </a:rPr>
-                        <a:t>)</a:t>
-                      </a:r>
-                      <a:endParaRPr lang="en-IN" dirty="0">
-                        <a:solidFill>
-                          <a:srgbClr val="1F1F1F"/>
-                        </a:solidFill>
-                        <a:effectLst/>
-                        <a:latin typeface="Google Sans Text"/>
-                      </a:endParaRPr>
-                    </a:p>
-                  </a:txBody>
-                  <a:tcPr marT="60960" marB="60960" anchor="ctr">
-                    <a:lnL w="7620" cap="flat" cmpd="sng" algn="ctr">
-                      <a:solidFill>
-                        <a:srgbClr val="C4C7C5"/>
-                      </a:solidFill>
-                      <a:prstDash val="solid"/>
-                      <a:round/>
-                      <a:headEnd type="none" w="med" len="med"/>
-                      <a:tailEnd type="none" w="med" len="med"/>
-                    </a:lnL>
-                    <a:lnR w="7620" cap="flat" cmpd="sng" algn="ctr">
-                      <a:solidFill>
-                        <a:srgbClr val="C4C7C5"/>
-                      </a:solidFill>
-                      <a:prstDash val="solid"/>
-                      <a:round/>
-                      <a:headEnd type="none" w="med" len="med"/>
-                      <a:tailEnd type="none" w="med" len="med"/>
-                    </a:lnR>
-                    <a:lnT w="7620" cap="flat" cmpd="sng" algn="ctr">
-                      <a:solidFill>
-                        <a:srgbClr val="C4C7C5"/>
-                      </a:solidFill>
-                      <a:prstDash val="solid"/>
-                      <a:round/>
-                      <a:headEnd type="none" w="med" len="med"/>
-                      <a:tailEnd type="none" w="med" len="med"/>
-                    </a:lnT>
-                    <a:lnB w="7620" cap="flat" cmpd="sng" algn="ctr">
-                      <a:solidFill>
-                        <a:srgbClr val="C4C7C5"/>
-                      </a:solidFill>
-                      <a:prstDash val="solid"/>
-                      <a:round/>
-                      <a:headEnd type="none" w="med" len="med"/>
-                      <a:tailEnd type="none" w="med" len="med"/>
-                    </a:lnB>
-                    <a:noFill/>
-                  </a:tcPr>
-                </a:tc>
-                <a:tc>
-                  <a:txBody>
-                    <a:bodyPr/>
-                    <a:lstStyle/>
-                    <a:p>
-                      <a:pPr marL="0" marR="0" rtl="0">
-                        <a:spcAft>
-                          <a:spcPts val="2400"/>
-                        </a:spcAft>
-                        <a:buNone/>
-                      </a:pPr>
-                      <a:r>
-                        <a:rPr lang="en-IN">
-                          <a:solidFill>
-                            <a:srgbClr val="1F1F1F"/>
-                          </a:solidFill>
-                          <a:effectLst/>
-                          <a:latin typeface="Google Sans Text"/>
-                        </a:rPr>
-                        <a:t>Accurate Medical Entity Extraction</a:t>
-                      </a:r>
-                    </a:p>
-                  </a:txBody>
-                  <a:tcPr marT="60960" marB="60960" anchor="ctr">
-                    <a:lnL w="7620" cap="flat" cmpd="sng" algn="ctr">
-                      <a:solidFill>
-                        <a:srgbClr val="C4C7C5"/>
-                      </a:solidFill>
-                      <a:prstDash val="solid"/>
-                      <a:round/>
-                      <a:headEnd type="none" w="med" len="med"/>
-                      <a:tailEnd type="none" w="med" len="med"/>
-                    </a:lnL>
-                    <a:lnR w="7620" cap="flat" cmpd="sng" algn="ctr">
-                      <a:solidFill>
-                        <a:srgbClr val="C4C7C5"/>
-                      </a:solidFill>
-                      <a:prstDash val="solid"/>
-                      <a:round/>
-                      <a:headEnd type="none" w="med" len="med"/>
-                      <a:tailEnd type="none" w="med" len="med"/>
-                    </a:lnR>
-                    <a:lnT w="7620" cap="flat" cmpd="sng" algn="ctr">
-                      <a:solidFill>
-                        <a:srgbClr val="C4C7C5"/>
-                      </a:solidFill>
-                      <a:prstDash val="solid"/>
-                      <a:round/>
-                      <a:headEnd type="none" w="med" len="med"/>
-                      <a:tailEnd type="none" w="med" len="med"/>
-                    </a:lnT>
-                    <a:lnB w="7620" cap="flat" cmpd="sng" algn="ctr">
-                      <a:solidFill>
-                        <a:srgbClr val="C4C7C5"/>
-                      </a:solidFill>
-                      <a:prstDash val="solid"/>
-                      <a:round/>
-                      <a:headEnd type="none" w="med" len="med"/>
-                      <a:tailEnd type="none" w="med" len="med"/>
-                    </a:lnB>
-                    <a:noFill/>
-                  </a:tcPr>
-                </a:tc>
-                <a:tc>
-                  <a:txBody>
-                    <a:bodyPr/>
-                    <a:lstStyle/>
-                    <a:p>
-                      <a:pPr marL="0" marR="0" rtl="0">
-                        <a:spcAft>
-                          <a:spcPts val="2400"/>
-                        </a:spcAft>
-                        <a:buNone/>
-                      </a:pPr>
-                      <a:r>
-                        <a:rPr lang="en-IN" dirty="0">
-                          <a:solidFill>
-                            <a:srgbClr val="1F1F1F"/>
-                          </a:solidFill>
-                          <a:effectLst/>
-                          <a:latin typeface="Google Sans Text"/>
-                        </a:rPr>
-                        <a:t>Cannot generate text or recommendations</a:t>
-                      </a:r>
-                    </a:p>
-                  </a:txBody>
-                  <a:tcPr marT="60960" marB="60960" anchor="ctr">
-                    <a:lnL w="7620" cap="flat" cmpd="sng" algn="ctr">
-                      <a:solidFill>
-                        <a:srgbClr val="C4C7C5"/>
-                      </a:solidFill>
-                      <a:prstDash val="solid"/>
-                      <a:round/>
-                      <a:headEnd type="none" w="med" len="med"/>
-                      <a:tailEnd type="none" w="med" len="med"/>
-                    </a:lnL>
-                    <a:lnR w="7620" cap="flat" cmpd="sng" algn="ctr">
-                      <a:solidFill>
-                        <a:srgbClr val="C4C7C5"/>
-                      </a:solidFill>
-                      <a:prstDash val="solid"/>
-                      <a:round/>
-                      <a:headEnd type="none" w="med" len="med"/>
-                      <a:tailEnd type="none" w="med" len="med"/>
-                    </a:lnR>
-                    <a:lnT w="7620" cap="flat" cmpd="sng" algn="ctr">
-                      <a:solidFill>
-                        <a:srgbClr val="C4C7C5"/>
-                      </a:solidFill>
-                      <a:prstDash val="solid"/>
-                      <a:round/>
-                      <a:headEnd type="none" w="med" len="med"/>
-                      <a:tailEnd type="none" w="med" len="med"/>
-                    </a:lnT>
-                    <a:lnB w="7620" cap="flat" cmpd="sng" algn="ctr">
-                      <a:solidFill>
-                        <a:srgbClr val="C4C7C5"/>
-                      </a:solidFill>
-                      <a:prstDash val="solid"/>
-                      <a:round/>
-                      <a:headEnd type="none" w="med" len="med"/>
-                      <a:tailEnd type="none" w="med" len="med"/>
-                    </a:lnB>
-                    <a:noFill/>
-                  </a:tcPr>
-                </a:tc>
-                <a:extLst>
-                  <a:ext uri="{0D108BD9-81ED-4DB2-BD59-A6C34878D82A}">
-                    <a16:rowId xmlns:a16="http://schemas.microsoft.com/office/drawing/2014/main" val="2218626283"/>
-                  </a:ext>
-                </a:extLst>
-              </a:tr>
-              <a:tr h="0">
-                <a:tc>
-                  <a:txBody>
-                    <a:bodyPr/>
-                    <a:lstStyle/>
-                    <a:p>
-                      <a:pPr marL="0" marR="0" rtl="0">
-                        <a:spcAft>
-                          <a:spcPts val="2400"/>
-                        </a:spcAft>
-                        <a:buNone/>
-                      </a:pPr>
-                      <a:r>
-                        <a:rPr lang="en-IN" b="1">
-                          <a:solidFill>
-                            <a:srgbClr val="1F1F1F"/>
-                          </a:solidFill>
-                          <a:effectLst/>
-                          <a:latin typeface="Google Sans Text"/>
-                        </a:rPr>
-                        <a:t>Standalone LLMs</a:t>
-                      </a:r>
-                      <a:r>
-                        <a:rPr lang="en-IN">
-                          <a:solidFill>
-                            <a:srgbClr val="1F1F1F"/>
-                          </a:solidFill>
-                          <a:effectLst/>
-                          <a:latin typeface="Google Sans Text"/>
-                        </a:rPr>
-                        <a:t> </a:t>
-                      </a:r>
-                      <a:r>
-                        <a:rPr lang="en-IN" i="1">
-                          <a:solidFill>
-                            <a:srgbClr val="1F1F1F"/>
-                          </a:solidFill>
-                          <a:effectLst/>
-                          <a:latin typeface="Google Sans Text"/>
-                        </a:rPr>
-                        <a:t>(Llama 3 / GPT)</a:t>
-                      </a:r>
-                      <a:endParaRPr lang="en-IN">
-                        <a:solidFill>
-                          <a:srgbClr val="1F1F1F"/>
-                        </a:solidFill>
-                        <a:effectLst/>
-                        <a:latin typeface="Google Sans Text"/>
-                      </a:endParaRPr>
-                    </a:p>
-                  </a:txBody>
-                  <a:tcPr marT="60960" marB="60960" anchor="ctr">
-                    <a:lnL w="7620" cap="flat" cmpd="sng" algn="ctr">
-                      <a:solidFill>
-                        <a:srgbClr val="C4C7C5"/>
-                      </a:solidFill>
-                      <a:prstDash val="solid"/>
-                      <a:round/>
-                      <a:headEnd type="none" w="med" len="med"/>
-                      <a:tailEnd type="none" w="med" len="med"/>
-                    </a:lnL>
-                    <a:lnR w="7620" cap="flat" cmpd="sng" algn="ctr">
-                      <a:solidFill>
-                        <a:srgbClr val="C4C7C5"/>
-                      </a:solidFill>
-                      <a:prstDash val="solid"/>
-                      <a:round/>
-                      <a:headEnd type="none" w="med" len="med"/>
-                      <a:tailEnd type="none" w="med" len="med"/>
-                    </a:lnR>
-                    <a:lnT w="7620" cap="flat" cmpd="sng" algn="ctr">
-                      <a:solidFill>
-                        <a:srgbClr val="C4C7C5"/>
-                      </a:solidFill>
-                      <a:prstDash val="solid"/>
-                      <a:round/>
-                      <a:headEnd type="none" w="med" len="med"/>
-                      <a:tailEnd type="none" w="med" len="med"/>
-                    </a:lnT>
-                    <a:lnB w="7620" cap="flat" cmpd="sng" algn="ctr">
-                      <a:solidFill>
-                        <a:srgbClr val="C4C7C5"/>
-                      </a:solidFill>
-                      <a:prstDash val="solid"/>
-                      <a:round/>
-                      <a:headEnd type="none" w="med" len="med"/>
-                      <a:tailEnd type="none" w="med" len="med"/>
-                    </a:lnB>
-                    <a:noFill/>
-                  </a:tcPr>
-                </a:tc>
-                <a:tc>
-                  <a:txBody>
-                    <a:bodyPr/>
-                    <a:lstStyle/>
-                    <a:p>
-                      <a:pPr marL="0" marR="0" rtl="0">
-                        <a:spcAft>
-                          <a:spcPts val="2400"/>
-                        </a:spcAft>
-                        <a:buNone/>
-                      </a:pPr>
-                      <a:r>
-                        <a:rPr lang="en-IN">
-                          <a:solidFill>
-                            <a:srgbClr val="1F1F1F"/>
-                          </a:solidFill>
-                          <a:effectLst/>
-                          <a:latin typeface="Google Sans Text"/>
-                        </a:rPr>
-                        <a:t>Fluent clinical reasoning</a:t>
-                      </a:r>
-                    </a:p>
-                  </a:txBody>
-                  <a:tcPr marT="60960" marB="60960" anchor="ctr">
-                    <a:lnL w="7620" cap="flat" cmpd="sng" algn="ctr">
-                      <a:solidFill>
-                        <a:srgbClr val="C4C7C5"/>
-                      </a:solidFill>
-                      <a:prstDash val="solid"/>
-                      <a:round/>
-                      <a:headEnd type="none" w="med" len="med"/>
-                      <a:tailEnd type="none" w="med" len="med"/>
-                    </a:lnL>
-                    <a:lnR w="7620" cap="flat" cmpd="sng" algn="ctr">
-                      <a:solidFill>
-                        <a:srgbClr val="C4C7C5"/>
-                      </a:solidFill>
-                      <a:prstDash val="solid"/>
-                      <a:round/>
-                      <a:headEnd type="none" w="med" len="med"/>
-                      <a:tailEnd type="none" w="med" len="med"/>
-                    </a:lnR>
-                    <a:lnT w="7620" cap="flat" cmpd="sng" algn="ctr">
-                      <a:solidFill>
-                        <a:srgbClr val="C4C7C5"/>
-                      </a:solidFill>
-                      <a:prstDash val="solid"/>
-                      <a:round/>
-                      <a:headEnd type="none" w="med" len="med"/>
-                      <a:tailEnd type="none" w="med" len="med"/>
-                    </a:lnT>
-                    <a:lnB w="7620" cap="flat" cmpd="sng" algn="ctr">
-                      <a:solidFill>
-                        <a:srgbClr val="C4C7C5"/>
-                      </a:solidFill>
-                      <a:prstDash val="solid"/>
-                      <a:round/>
-                      <a:headEnd type="none" w="med" len="med"/>
-                      <a:tailEnd type="none" w="med" len="med"/>
-                    </a:lnB>
-                    <a:noFill/>
-                  </a:tcPr>
-                </a:tc>
-                <a:tc>
-                  <a:txBody>
-                    <a:bodyPr/>
-                    <a:lstStyle/>
-                    <a:p>
-                      <a:pPr marL="0" marR="0" rtl="0">
-                        <a:spcAft>
-                          <a:spcPts val="2400"/>
-                        </a:spcAft>
-                        <a:buNone/>
-                      </a:pPr>
-                      <a:r>
-                        <a:rPr lang="en-IN">
-                          <a:solidFill>
-                            <a:srgbClr val="1F1F1F"/>
-                          </a:solidFill>
-                          <a:effectLst/>
-                          <a:latin typeface="Google Sans Text"/>
-                        </a:rPr>
-                        <a:t>High risk of medical hallucinations</a:t>
-                      </a:r>
-                    </a:p>
-                  </a:txBody>
-                  <a:tcPr marT="60960" marB="60960" anchor="ctr">
-                    <a:lnL w="7620" cap="flat" cmpd="sng" algn="ctr">
-                      <a:solidFill>
-                        <a:srgbClr val="C4C7C5"/>
-                      </a:solidFill>
-                      <a:prstDash val="solid"/>
-                      <a:round/>
-                      <a:headEnd type="none" w="med" len="med"/>
-                      <a:tailEnd type="none" w="med" len="med"/>
-                    </a:lnL>
-                    <a:lnR w="7620" cap="flat" cmpd="sng" algn="ctr">
-                      <a:solidFill>
-                        <a:srgbClr val="C4C7C5"/>
-                      </a:solidFill>
-                      <a:prstDash val="solid"/>
-                      <a:round/>
-                      <a:headEnd type="none" w="med" len="med"/>
-                      <a:tailEnd type="none" w="med" len="med"/>
-                    </a:lnR>
-                    <a:lnT w="7620" cap="flat" cmpd="sng" algn="ctr">
-                      <a:solidFill>
-                        <a:srgbClr val="C4C7C5"/>
-                      </a:solidFill>
-                      <a:prstDash val="solid"/>
-                      <a:round/>
-                      <a:headEnd type="none" w="med" len="med"/>
-                      <a:tailEnd type="none" w="med" len="med"/>
-                    </a:lnT>
-                    <a:lnB w="7620" cap="flat" cmpd="sng" algn="ctr">
-                      <a:solidFill>
-                        <a:srgbClr val="C4C7C5"/>
-                      </a:solidFill>
-                      <a:prstDash val="solid"/>
-                      <a:round/>
-                      <a:headEnd type="none" w="med" len="med"/>
-                      <a:tailEnd type="none" w="med" len="med"/>
-                    </a:lnB>
-                    <a:noFill/>
-                  </a:tcPr>
-                </a:tc>
-                <a:extLst>
-                  <a:ext uri="{0D108BD9-81ED-4DB2-BD59-A6C34878D82A}">
-                    <a16:rowId xmlns:a16="http://schemas.microsoft.com/office/drawing/2014/main" val="2942291451"/>
-                  </a:ext>
-                </a:extLst>
-              </a:tr>
-              <a:tr h="0">
-                <a:tc>
-                  <a:txBody>
-                    <a:bodyPr/>
-                    <a:lstStyle/>
-                    <a:p>
-                      <a:pPr marL="0" marR="0" rtl="0">
-                        <a:spcAft>
-                          <a:spcPts val="2400"/>
-                        </a:spcAft>
-                        <a:buNone/>
-                      </a:pPr>
-                      <a:r>
-                        <a:rPr lang="en-IN" b="1">
-                          <a:solidFill>
-                            <a:srgbClr val="1F1F1F"/>
-                          </a:solidFill>
-                          <a:effectLst/>
-                          <a:latin typeface="Google Sans Text"/>
-                        </a:rPr>
-                        <a:t>Standard RAG</a:t>
-                      </a:r>
-                      <a:endParaRPr lang="en-IN">
-                        <a:solidFill>
-                          <a:srgbClr val="1F1F1F"/>
-                        </a:solidFill>
-                        <a:effectLst/>
-                        <a:latin typeface="Google Sans Text"/>
-                      </a:endParaRPr>
-                    </a:p>
-                  </a:txBody>
-                  <a:tcPr marT="60960" marB="60960" anchor="ctr">
-                    <a:lnL w="7620" cap="flat" cmpd="sng" algn="ctr">
-                      <a:solidFill>
-                        <a:srgbClr val="C4C7C5"/>
-                      </a:solidFill>
-                      <a:prstDash val="solid"/>
-                      <a:round/>
-                      <a:headEnd type="none" w="med" len="med"/>
-                      <a:tailEnd type="none" w="med" len="med"/>
-                    </a:lnL>
-                    <a:lnR w="7620" cap="flat" cmpd="sng" algn="ctr">
-                      <a:solidFill>
-                        <a:srgbClr val="C4C7C5"/>
-                      </a:solidFill>
-                      <a:prstDash val="solid"/>
-                      <a:round/>
-                      <a:headEnd type="none" w="med" len="med"/>
-                      <a:tailEnd type="none" w="med" len="med"/>
-                    </a:lnR>
-                    <a:lnT w="7620" cap="flat" cmpd="sng" algn="ctr">
-                      <a:solidFill>
-                        <a:srgbClr val="C4C7C5"/>
-                      </a:solidFill>
-                      <a:prstDash val="solid"/>
-                      <a:round/>
-                      <a:headEnd type="none" w="med" len="med"/>
-                      <a:tailEnd type="none" w="med" len="med"/>
-                    </a:lnT>
-                    <a:lnB w="7620" cap="flat" cmpd="sng" algn="ctr">
-                      <a:solidFill>
-                        <a:srgbClr val="C4C7C5"/>
-                      </a:solidFill>
-                      <a:prstDash val="solid"/>
-                      <a:round/>
-                      <a:headEnd type="none" w="med" len="med"/>
-                      <a:tailEnd type="none" w="med" len="med"/>
-                    </a:lnB>
-                    <a:noFill/>
-                  </a:tcPr>
-                </a:tc>
-                <a:tc>
-                  <a:txBody>
-                    <a:bodyPr/>
-                    <a:lstStyle/>
-                    <a:p>
-                      <a:pPr marL="0" marR="0" rtl="0">
-                        <a:spcAft>
-                          <a:spcPts val="2400"/>
-                        </a:spcAft>
-                        <a:buNone/>
-                      </a:pPr>
-                      <a:r>
-                        <a:rPr lang="en-IN">
-                          <a:solidFill>
-                            <a:srgbClr val="1F1F1F"/>
-                          </a:solidFill>
-                          <a:effectLst/>
-                          <a:latin typeface="Google Sans Text"/>
-                        </a:rPr>
-                        <a:t>Uses external knowledge</a:t>
-                      </a:r>
-                    </a:p>
-                  </a:txBody>
-                  <a:tcPr marT="60960" marB="60960" anchor="ctr">
-                    <a:lnL w="7620" cap="flat" cmpd="sng" algn="ctr">
-                      <a:solidFill>
-                        <a:srgbClr val="C4C7C5"/>
-                      </a:solidFill>
-                      <a:prstDash val="solid"/>
-                      <a:round/>
-                      <a:headEnd type="none" w="med" len="med"/>
-                      <a:tailEnd type="none" w="med" len="med"/>
-                    </a:lnL>
-                    <a:lnR w="7620" cap="flat" cmpd="sng" algn="ctr">
-                      <a:solidFill>
-                        <a:srgbClr val="C4C7C5"/>
-                      </a:solidFill>
-                      <a:prstDash val="solid"/>
-                      <a:round/>
-                      <a:headEnd type="none" w="med" len="med"/>
-                      <a:tailEnd type="none" w="med" len="med"/>
-                    </a:lnR>
-                    <a:lnT w="7620" cap="flat" cmpd="sng" algn="ctr">
-                      <a:solidFill>
-                        <a:srgbClr val="C4C7C5"/>
-                      </a:solidFill>
-                      <a:prstDash val="solid"/>
-                      <a:round/>
-                      <a:headEnd type="none" w="med" len="med"/>
-                      <a:tailEnd type="none" w="med" len="med"/>
-                    </a:lnT>
-                    <a:lnB w="7620" cap="flat" cmpd="sng" algn="ctr">
-                      <a:solidFill>
-                        <a:srgbClr val="C4C7C5"/>
-                      </a:solidFill>
-                      <a:prstDash val="solid"/>
-                      <a:round/>
-                      <a:headEnd type="none" w="med" len="med"/>
-                      <a:tailEnd type="none" w="med" len="med"/>
-                    </a:lnB>
-                    <a:noFill/>
-                  </a:tcPr>
-                </a:tc>
-                <a:tc>
-                  <a:txBody>
-                    <a:bodyPr/>
-                    <a:lstStyle/>
-                    <a:p>
-                      <a:pPr marL="0" marR="0" rtl="0">
-                        <a:spcAft>
-                          <a:spcPts val="2400"/>
-                        </a:spcAft>
-                        <a:buNone/>
-                      </a:pPr>
-                      <a:r>
-                        <a:rPr lang="en-IN">
-                          <a:solidFill>
-                            <a:srgbClr val="1F1F1F"/>
-                          </a:solidFill>
-                          <a:effectLst/>
-                          <a:latin typeface="Google Sans Text"/>
-                        </a:rPr>
-                        <a:t>Vector search on raw notes is noisy</a:t>
-                      </a:r>
-                    </a:p>
-                  </a:txBody>
-                  <a:tcPr marT="60960" marB="60960" anchor="ctr">
-                    <a:lnL w="7620" cap="flat" cmpd="sng" algn="ctr">
-                      <a:solidFill>
-                        <a:srgbClr val="C4C7C5"/>
-                      </a:solidFill>
-                      <a:prstDash val="solid"/>
-                      <a:round/>
-                      <a:headEnd type="none" w="med" len="med"/>
-                      <a:tailEnd type="none" w="med" len="med"/>
-                    </a:lnL>
-                    <a:lnR w="7620" cap="flat" cmpd="sng" algn="ctr">
-                      <a:solidFill>
-                        <a:srgbClr val="C4C7C5"/>
-                      </a:solidFill>
-                      <a:prstDash val="solid"/>
-                      <a:round/>
-                      <a:headEnd type="none" w="med" len="med"/>
-                      <a:tailEnd type="none" w="med" len="med"/>
-                    </a:lnR>
-                    <a:lnT w="7620" cap="flat" cmpd="sng" algn="ctr">
-                      <a:solidFill>
-                        <a:srgbClr val="C4C7C5"/>
-                      </a:solidFill>
-                      <a:prstDash val="solid"/>
-                      <a:round/>
-                      <a:headEnd type="none" w="med" len="med"/>
-                      <a:tailEnd type="none" w="med" len="med"/>
-                    </a:lnT>
-                    <a:lnB w="7620" cap="flat" cmpd="sng" algn="ctr">
-                      <a:solidFill>
-                        <a:srgbClr val="C4C7C5"/>
-                      </a:solidFill>
-                      <a:prstDash val="solid"/>
-                      <a:round/>
-                      <a:headEnd type="none" w="med" len="med"/>
-                      <a:tailEnd type="none" w="med" len="med"/>
-                    </a:lnB>
-                    <a:noFill/>
-                  </a:tcPr>
-                </a:tc>
-                <a:extLst>
-                  <a:ext uri="{0D108BD9-81ED-4DB2-BD59-A6C34878D82A}">
-                    <a16:rowId xmlns:a16="http://schemas.microsoft.com/office/drawing/2014/main" val="512742220"/>
-                  </a:ext>
-                </a:extLst>
-              </a:tr>
-              <a:tr h="0">
-                <a:tc>
-                  <a:txBody>
-                    <a:bodyPr/>
-                    <a:lstStyle/>
-                    <a:p>
-                      <a:pPr marL="0" marR="0" rtl="0">
-                        <a:spcAft>
-                          <a:spcPts val="2400"/>
-                        </a:spcAft>
-                        <a:buNone/>
-                      </a:pPr>
-                      <a:r>
-                        <a:rPr lang="en-IN" b="1">
-                          <a:solidFill>
-                            <a:srgbClr val="1F1F1F"/>
-                          </a:solidFill>
-                          <a:effectLst/>
-                          <a:latin typeface="Google Sans Text"/>
-                        </a:rPr>
-                        <a:t>ClinicaRAG (Proposed)</a:t>
-                      </a:r>
-                      <a:endParaRPr lang="en-IN">
-                        <a:solidFill>
-                          <a:srgbClr val="1F1F1F"/>
-                        </a:solidFill>
-                        <a:effectLst/>
-                        <a:latin typeface="Google Sans Text"/>
-                      </a:endParaRPr>
-                    </a:p>
-                  </a:txBody>
-                  <a:tcPr marT="60960" marB="60960" anchor="ctr">
-                    <a:lnL w="7620" cap="flat" cmpd="sng" algn="ctr">
-                      <a:solidFill>
-                        <a:srgbClr val="C4C7C5"/>
-                      </a:solidFill>
-                      <a:prstDash val="solid"/>
-                      <a:round/>
-                      <a:headEnd type="none" w="med" len="med"/>
-                      <a:tailEnd type="none" w="med" len="med"/>
-                    </a:lnL>
-                    <a:lnR w="7620" cap="flat" cmpd="sng" algn="ctr">
-                      <a:solidFill>
-                        <a:srgbClr val="C4C7C5"/>
-                      </a:solidFill>
-                      <a:prstDash val="solid"/>
-                      <a:round/>
-                      <a:headEnd type="none" w="med" len="med"/>
-                      <a:tailEnd type="none" w="med" len="med"/>
-                    </a:lnR>
-                    <a:lnT w="7620" cap="flat" cmpd="sng" algn="ctr">
-                      <a:solidFill>
-                        <a:srgbClr val="C4C7C5"/>
-                      </a:solidFill>
-                      <a:prstDash val="solid"/>
-                      <a:round/>
-                      <a:headEnd type="none" w="med" len="med"/>
-                      <a:tailEnd type="none" w="med" len="med"/>
-                    </a:lnT>
-                    <a:lnB w="7620" cap="flat" cmpd="sng" algn="ctr">
-                      <a:solidFill>
-                        <a:srgbClr val="C4C7C5"/>
-                      </a:solidFill>
-                      <a:prstDash val="solid"/>
-                      <a:round/>
-                      <a:headEnd type="none" w="med" len="med"/>
-                      <a:tailEnd type="none" w="med" len="med"/>
-                    </a:lnB>
-                    <a:noFill/>
-                  </a:tcPr>
-                </a:tc>
-                <a:tc>
-                  <a:txBody>
-                    <a:bodyPr/>
-                    <a:lstStyle/>
-                    <a:p>
-                      <a:pPr marL="0" marR="0" rtl="0">
-                        <a:spcAft>
-                          <a:spcPts val="2400"/>
-                        </a:spcAft>
-                        <a:buNone/>
-                      </a:pPr>
-                      <a:r>
-                        <a:rPr lang="en-IN" b="1">
-                          <a:solidFill>
-                            <a:srgbClr val="1F1F1F"/>
-                          </a:solidFill>
-                          <a:effectLst/>
-                          <a:latin typeface="Google Sans Text"/>
-                        </a:rPr>
-                        <a:t>Entity-guided RAG with citations</a:t>
-                      </a:r>
-                      <a:endParaRPr lang="en-IN">
+                      <a:endParaRPr lang="en-IN" b="1" dirty="0">
                         <a:solidFill>
                           <a:srgbClr val="1F1F1F"/>
                         </a:solidFill>
@@ -5385,7 +4653,203 @@
                           <a:effectLst/>
                           <a:latin typeface="Google Sans Text"/>
                         </a:rPr>
-                        <a:t>Limited to vector store coverage</a:t>
+                        <a:t>Year</a:t>
+                      </a:r>
+                    </a:p>
+                  </a:txBody>
+                  <a:tcPr marT="60960" marB="60960" anchor="ctr">
+                    <a:lnL w="7620" cap="flat" cmpd="sng" algn="ctr">
+                      <a:solidFill>
+                        <a:srgbClr val="C4C7C5"/>
+                      </a:solidFill>
+                      <a:prstDash val="solid"/>
+                      <a:round/>
+                      <a:headEnd type="none" w="med" len="med"/>
+                      <a:tailEnd type="none" w="med" len="med"/>
+                    </a:lnL>
+                    <a:lnR w="7620" cap="flat" cmpd="sng" algn="ctr">
+                      <a:solidFill>
+                        <a:srgbClr val="C4C7C5"/>
+                      </a:solidFill>
+                      <a:prstDash val="solid"/>
+                      <a:round/>
+                      <a:headEnd type="none" w="med" len="med"/>
+                      <a:tailEnd type="none" w="med" len="med"/>
+                    </a:lnR>
+                    <a:lnT w="7620" cap="flat" cmpd="sng" algn="ctr">
+                      <a:solidFill>
+                        <a:srgbClr val="C4C7C5"/>
+                      </a:solidFill>
+                      <a:prstDash val="solid"/>
+                      <a:round/>
+                      <a:headEnd type="none" w="med" len="med"/>
+                      <a:tailEnd type="none" w="med" len="med"/>
+                    </a:lnT>
+                    <a:lnB w="7620" cap="flat" cmpd="sng" algn="ctr">
+                      <a:solidFill>
+                        <a:srgbClr val="C4C7C5"/>
+                      </a:solidFill>
+                      <a:prstDash val="solid"/>
+                      <a:round/>
+                      <a:headEnd type="none" w="med" len="med"/>
+                      <a:tailEnd type="none" w="med" len="med"/>
+                    </a:lnB>
+                    <a:noFill/>
+                  </a:tcPr>
+                </a:tc>
+                <a:tc>
+                  <a:txBody>
+                    <a:bodyPr/>
+                    <a:lstStyle/>
+                    <a:p>
+                      <a:pPr marL="0" marR="0" rtl="0">
+                        <a:spcAft>
+                          <a:spcPts val="2400"/>
+                        </a:spcAft>
+                        <a:buNone/>
+                      </a:pPr>
+                      <a:r>
+                        <a:rPr lang="en-IN" b="1" dirty="0">
+                          <a:solidFill>
+                            <a:srgbClr val="1F1F1F"/>
+                          </a:solidFill>
+                          <a:effectLst/>
+                          <a:latin typeface="Google Sans Text"/>
+                        </a:rPr>
+                        <a:t>Key Strength</a:t>
+                      </a:r>
+                    </a:p>
+                  </a:txBody>
+                  <a:tcPr marT="60960" marB="60960" anchor="ctr">
+                    <a:lnL w="7620" cap="flat" cmpd="sng" algn="ctr">
+                      <a:solidFill>
+                        <a:srgbClr val="C4C7C5"/>
+                      </a:solidFill>
+                      <a:prstDash val="solid"/>
+                      <a:round/>
+                      <a:headEnd type="none" w="med" len="med"/>
+                      <a:tailEnd type="none" w="med" len="med"/>
+                    </a:lnL>
+                    <a:lnR w="7620" cap="flat" cmpd="sng" algn="ctr">
+                      <a:solidFill>
+                        <a:srgbClr val="C4C7C5"/>
+                      </a:solidFill>
+                      <a:prstDash val="solid"/>
+                      <a:round/>
+                      <a:headEnd type="none" w="med" len="med"/>
+                      <a:tailEnd type="none" w="med" len="med"/>
+                    </a:lnR>
+                    <a:lnT w="7620" cap="flat" cmpd="sng" algn="ctr">
+                      <a:solidFill>
+                        <a:srgbClr val="C4C7C5"/>
+                      </a:solidFill>
+                      <a:prstDash val="solid"/>
+                      <a:round/>
+                      <a:headEnd type="none" w="med" len="med"/>
+                      <a:tailEnd type="none" w="med" len="med"/>
+                    </a:lnT>
+                    <a:lnB w="7620" cap="flat" cmpd="sng" algn="ctr">
+                      <a:solidFill>
+                        <a:srgbClr val="C4C7C5"/>
+                      </a:solidFill>
+                      <a:prstDash val="solid"/>
+                      <a:round/>
+                      <a:headEnd type="none" w="med" len="med"/>
+                      <a:tailEnd type="none" w="med" len="med"/>
+                    </a:lnB>
+                    <a:noFill/>
+                  </a:tcPr>
+                </a:tc>
+                <a:tc>
+                  <a:txBody>
+                    <a:bodyPr/>
+                    <a:lstStyle/>
+                    <a:p>
+                      <a:pPr marL="0" marR="0" rtl="0">
+                        <a:spcAft>
+                          <a:spcPts val="2400"/>
+                        </a:spcAft>
+                        <a:buNone/>
+                      </a:pPr>
+                      <a:r>
+                        <a:rPr lang="en-IN" b="1" dirty="0">
+                          <a:solidFill>
+                            <a:srgbClr val="1F1F1F"/>
+                          </a:solidFill>
+                          <a:effectLst/>
+                          <a:latin typeface="Google Sans Text"/>
+                        </a:rPr>
+                        <a:t>Main Limitation</a:t>
+                      </a:r>
+                    </a:p>
+                  </a:txBody>
+                  <a:tcPr marT="60960" marB="60960" anchor="ctr">
+                    <a:lnL w="7620" cap="flat" cmpd="sng" algn="ctr">
+                      <a:solidFill>
+                        <a:srgbClr val="C4C7C5"/>
+                      </a:solidFill>
+                      <a:prstDash val="solid"/>
+                      <a:round/>
+                      <a:headEnd type="none" w="med" len="med"/>
+                      <a:tailEnd type="none" w="med" len="med"/>
+                    </a:lnL>
+                    <a:lnR w="7620" cap="flat" cmpd="sng" algn="ctr">
+                      <a:solidFill>
+                        <a:srgbClr val="C4C7C5"/>
+                      </a:solidFill>
+                      <a:prstDash val="solid"/>
+                      <a:round/>
+                      <a:headEnd type="none" w="med" len="med"/>
+                      <a:tailEnd type="none" w="med" len="med"/>
+                    </a:lnR>
+                    <a:lnT w="7620" cap="flat" cmpd="sng" algn="ctr">
+                      <a:solidFill>
+                        <a:srgbClr val="C4C7C5"/>
+                      </a:solidFill>
+                      <a:prstDash val="solid"/>
+                      <a:round/>
+                      <a:headEnd type="none" w="med" len="med"/>
+                      <a:tailEnd type="none" w="med" len="med"/>
+                    </a:lnT>
+                    <a:lnB w="7620" cap="flat" cmpd="sng" algn="ctr">
+                      <a:solidFill>
+                        <a:srgbClr val="C4C7C5"/>
+                      </a:solidFill>
+                      <a:prstDash val="solid"/>
+                      <a:round/>
+                      <a:headEnd type="none" w="med" len="med"/>
+                      <a:tailEnd type="none" w="med" len="med"/>
+                    </a:lnB>
+                    <a:noFill/>
+                  </a:tcPr>
+                </a:tc>
+                <a:extLst>
+                  <a:ext uri="{0D108BD9-81ED-4DB2-BD59-A6C34878D82A}">
+                    <a16:rowId xmlns:a16="http://schemas.microsoft.com/office/drawing/2014/main" val="3040669093"/>
+                  </a:ext>
+                </a:extLst>
+              </a:tr>
+              <a:tr h="1011197">
+                <a:tc>
+                  <a:txBody>
+                    <a:bodyPr/>
+                    <a:lstStyle/>
+                    <a:p>
+                      <a:pPr marL="0" marR="0" rtl="0">
+                        <a:spcAft>
+                          <a:spcPts val="2400"/>
+                        </a:spcAft>
+                        <a:buNone/>
+                      </a:pPr>
+                      <a:r>
+                        <a:rPr lang="en-US" dirty="0">
+                          <a:solidFill>
+                            <a:srgbClr val="1F1F1F"/>
+                          </a:solidFill>
+                          <a:effectLst/>
+                          <a:latin typeface="Google Sans Text"/>
+                        </a:rPr>
+                        <a:t>1</a:t>
                       </a:r>
                       <a:endParaRPr lang="en-IN" dirty="0">
                         <a:solidFill>
@@ -5436,9 +4900,1609 @@
                     <a:noFill/>
                   </a:tcPr>
                 </a:tc>
+                <a:tc>
+                  <a:txBody>
+                    <a:bodyPr/>
+                    <a:lstStyle/>
+                    <a:p>
+                      <a:pPr marL="0" marR="0" rtl="0">
+                        <a:spcAft>
+                          <a:spcPts val="2400"/>
+                        </a:spcAft>
+                        <a:buNone/>
+                      </a:pPr>
+                      <a:r>
+                        <a:rPr lang="en-IN" dirty="0"/>
+                        <a:t>BERT</a:t>
+                      </a:r>
+                      <a:endParaRPr lang="en-IN" dirty="0">
+                        <a:solidFill>
+                          <a:srgbClr val="1F1F1F"/>
+                        </a:solidFill>
+                        <a:effectLst/>
+                        <a:latin typeface="Google Sans Text"/>
+                      </a:endParaRPr>
+                    </a:p>
+                  </a:txBody>
+                  <a:tcPr marT="60960" marB="60960" anchor="ctr">
+                    <a:lnL w="7620" cap="flat" cmpd="sng" algn="ctr">
+                      <a:solidFill>
+                        <a:srgbClr val="C4C7C5"/>
+                      </a:solidFill>
+                      <a:prstDash val="solid"/>
+                      <a:round/>
+                      <a:headEnd type="none" w="med" len="med"/>
+                      <a:tailEnd type="none" w="med" len="med"/>
+                    </a:lnL>
+                    <a:lnR w="7620" cap="flat" cmpd="sng" algn="ctr">
+                      <a:solidFill>
+                        <a:srgbClr val="C4C7C5"/>
+                      </a:solidFill>
+                      <a:prstDash val="solid"/>
+                      <a:round/>
+                      <a:headEnd type="none" w="med" len="med"/>
+                      <a:tailEnd type="none" w="med" len="med"/>
+                    </a:lnR>
+                    <a:lnT w="7620" cap="flat" cmpd="sng" algn="ctr">
+                      <a:solidFill>
+                        <a:srgbClr val="C4C7C5"/>
+                      </a:solidFill>
+                      <a:prstDash val="solid"/>
+                      <a:round/>
+                      <a:headEnd type="none" w="med" len="med"/>
+                      <a:tailEnd type="none" w="med" len="med"/>
+                    </a:lnT>
+                    <a:lnB w="7620" cap="flat" cmpd="sng" algn="ctr">
+                      <a:solidFill>
+                        <a:srgbClr val="C4C7C5"/>
+                      </a:solidFill>
+                      <a:prstDash val="solid"/>
+                      <a:round/>
+                      <a:headEnd type="none" w="med" len="med"/>
+                      <a:tailEnd type="none" w="med" len="med"/>
+                    </a:lnB>
+                    <a:noFill/>
+                  </a:tcPr>
+                </a:tc>
+                <a:tc>
+                  <a:txBody>
+                    <a:bodyPr/>
+                    <a:lstStyle/>
+                    <a:p>
+                      <a:pPr marL="0" marR="0" rtl="0">
+                        <a:spcAft>
+                          <a:spcPts val="2400"/>
+                        </a:spcAft>
+                        <a:buNone/>
+                      </a:pPr>
+                      <a:r>
+                        <a:rPr lang="en-IN" b="0" dirty="0">
+                          <a:solidFill>
+                            <a:srgbClr val="1F1F1F"/>
+                          </a:solidFill>
+                          <a:effectLst/>
+                          <a:latin typeface="Google Sans Text"/>
+                        </a:rPr>
+                        <a:t>2018</a:t>
+                      </a:r>
+                    </a:p>
+                  </a:txBody>
+                  <a:tcPr marT="60960" marB="60960" anchor="ctr">
+                    <a:lnL w="7620" cap="flat" cmpd="sng" algn="ctr">
+                      <a:solidFill>
+                        <a:srgbClr val="C4C7C5"/>
+                      </a:solidFill>
+                      <a:prstDash val="solid"/>
+                      <a:round/>
+                      <a:headEnd type="none" w="med" len="med"/>
+                      <a:tailEnd type="none" w="med" len="med"/>
+                    </a:lnL>
+                    <a:lnR w="7620" cap="flat" cmpd="sng" algn="ctr">
+                      <a:solidFill>
+                        <a:srgbClr val="C4C7C5"/>
+                      </a:solidFill>
+                      <a:prstDash val="solid"/>
+                      <a:round/>
+                      <a:headEnd type="none" w="med" len="med"/>
+                      <a:tailEnd type="none" w="med" len="med"/>
+                    </a:lnR>
+                    <a:lnT w="7620" cap="flat" cmpd="sng" algn="ctr">
+                      <a:solidFill>
+                        <a:srgbClr val="C4C7C5"/>
+                      </a:solidFill>
+                      <a:prstDash val="solid"/>
+                      <a:round/>
+                      <a:headEnd type="none" w="med" len="med"/>
+                      <a:tailEnd type="none" w="med" len="med"/>
+                    </a:lnT>
+                    <a:lnB w="7620" cap="flat" cmpd="sng" algn="ctr">
+                      <a:solidFill>
+                        <a:srgbClr val="C4C7C5"/>
+                      </a:solidFill>
+                      <a:prstDash val="solid"/>
+                      <a:round/>
+                      <a:headEnd type="none" w="med" len="med"/>
+                      <a:tailEnd type="none" w="med" len="med"/>
+                    </a:lnB>
+                    <a:noFill/>
+                  </a:tcPr>
+                </a:tc>
+                <a:tc>
+                  <a:txBody>
+                    <a:bodyPr/>
+                    <a:lstStyle/>
+                    <a:p>
+                      <a:pPr marL="0" marR="0" rtl="0">
+                        <a:spcAft>
+                          <a:spcPts val="2400"/>
+                        </a:spcAft>
+                        <a:buNone/>
+                      </a:pPr>
+                      <a:r>
+                        <a:rPr lang="en-IN" dirty="0"/>
+                        <a:t>Bidirectional pre-trained language model for general NLP tasks.</a:t>
+                      </a:r>
+                      <a:endParaRPr lang="en-IN" dirty="0">
+                        <a:solidFill>
+                          <a:srgbClr val="1F1F1F"/>
+                        </a:solidFill>
+                        <a:effectLst/>
+                        <a:latin typeface="Google Sans Text"/>
+                      </a:endParaRPr>
+                    </a:p>
+                  </a:txBody>
+                  <a:tcPr marT="60960" marB="60960" anchor="ctr">
+                    <a:lnL w="7620" cap="flat" cmpd="sng" algn="ctr">
+                      <a:solidFill>
+                        <a:srgbClr val="C4C7C5"/>
+                      </a:solidFill>
+                      <a:prstDash val="solid"/>
+                      <a:round/>
+                      <a:headEnd type="none" w="med" len="med"/>
+                      <a:tailEnd type="none" w="med" len="med"/>
+                    </a:lnL>
+                    <a:lnR w="7620" cap="flat" cmpd="sng" algn="ctr">
+                      <a:solidFill>
+                        <a:srgbClr val="C4C7C5"/>
+                      </a:solidFill>
+                      <a:prstDash val="solid"/>
+                      <a:round/>
+                      <a:headEnd type="none" w="med" len="med"/>
+                      <a:tailEnd type="none" w="med" len="med"/>
+                    </a:lnR>
+                    <a:lnT w="7620" cap="flat" cmpd="sng" algn="ctr">
+                      <a:solidFill>
+                        <a:srgbClr val="C4C7C5"/>
+                      </a:solidFill>
+                      <a:prstDash val="solid"/>
+                      <a:round/>
+                      <a:headEnd type="none" w="med" len="med"/>
+                      <a:tailEnd type="none" w="med" len="med"/>
+                    </a:lnT>
+                    <a:lnB w="7620" cap="flat" cmpd="sng" algn="ctr">
+                      <a:solidFill>
+                        <a:srgbClr val="C4C7C5"/>
+                      </a:solidFill>
+                      <a:prstDash val="solid"/>
+                      <a:round/>
+                      <a:headEnd type="none" w="med" len="med"/>
+                      <a:tailEnd type="none" w="med" len="med"/>
+                    </a:lnB>
+                    <a:noFill/>
+                  </a:tcPr>
+                </a:tc>
+                <a:tc>
+                  <a:txBody>
+                    <a:bodyPr/>
+                    <a:lstStyle/>
+                    <a:p>
+                      <a:pPr marL="0" marR="0" rtl="0">
+                        <a:spcAft>
+                          <a:spcPts val="2400"/>
+                        </a:spcAft>
+                        <a:buNone/>
+                      </a:pPr>
+                      <a:r>
+                        <a:rPr lang="en-IN" dirty="0"/>
+                        <a:t>Lacks domain-specific clinical vocabulary and context.</a:t>
+                      </a:r>
+                      <a:endParaRPr lang="en-IN" dirty="0">
+                        <a:solidFill>
+                          <a:srgbClr val="1F1F1F"/>
+                        </a:solidFill>
+                        <a:effectLst/>
+                        <a:latin typeface="Google Sans Text"/>
+                      </a:endParaRPr>
+                    </a:p>
+                  </a:txBody>
+                  <a:tcPr marT="60960" marB="60960" anchor="ctr">
+                    <a:lnL w="7620" cap="flat" cmpd="sng" algn="ctr">
+                      <a:solidFill>
+                        <a:srgbClr val="C4C7C5"/>
+                      </a:solidFill>
+                      <a:prstDash val="solid"/>
+                      <a:round/>
+                      <a:headEnd type="none" w="med" len="med"/>
+                      <a:tailEnd type="none" w="med" len="med"/>
+                    </a:lnL>
+                    <a:lnR w="7620" cap="flat" cmpd="sng" algn="ctr">
+                      <a:solidFill>
+                        <a:srgbClr val="C4C7C5"/>
+                      </a:solidFill>
+                      <a:prstDash val="solid"/>
+                      <a:round/>
+                      <a:headEnd type="none" w="med" len="med"/>
+                      <a:tailEnd type="none" w="med" len="med"/>
+                    </a:lnR>
+                    <a:lnT w="7620" cap="flat" cmpd="sng" algn="ctr">
+                      <a:solidFill>
+                        <a:srgbClr val="C4C7C5"/>
+                      </a:solidFill>
+                      <a:prstDash val="solid"/>
+                      <a:round/>
+                      <a:headEnd type="none" w="med" len="med"/>
+                      <a:tailEnd type="none" w="med" len="med"/>
+                    </a:lnT>
+                    <a:lnB w="7620" cap="flat" cmpd="sng" algn="ctr">
+                      <a:solidFill>
+                        <a:srgbClr val="C4C7C5"/>
+                      </a:solidFill>
+                      <a:prstDash val="solid"/>
+                      <a:round/>
+                      <a:headEnd type="none" w="med" len="med"/>
+                      <a:tailEnd type="none" w="med" len="med"/>
+                    </a:lnB>
+                    <a:noFill/>
+                  </a:tcPr>
+                </a:tc>
+                <a:extLst>
+                  <a:ext uri="{0D108BD9-81ED-4DB2-BD59-A6C34878D82A}">
+                    <a16:rowId xmlns:a16="http://schemas.microsoft.com/office/drawing/2014/main" val="2218626283"/>
+                  </a:ext>
+                </a:extLst>
+              </a:tr>
+              <a:tr h="717625">
+                <a:tc>
+                  <a:txBody>
+                    <a:bodyPr/>
+                    <a:lstStyle/>
+                    <a:p>
+                      <a:pPr marL="0" marR="0" rtl="0">
+                        <a:spcAft>
+                          <a:spcPts val="2400"/>
+                        </a:spcAft>
+                        <a:buNone/>
+                      </a:pPr>
+                      <a:r>
+                        <a:rPr lang="en-US" dirty="0">
+                          <a:solidFill>
+                            <a:srgbClr val="1F1F1F"/>
+                          </a:solidFill>
+                          <a:effectLst/>
+                          <a:latin typeface="Google Sans Text"/>
+                        </a:rPr>
+                        <a:t>2</a:t>
+                      </a:r>
+                      <a:endParaRPr lang="en-IN" dirty="0">
+                        <a:solidFill>
+                          <a:srgbClr val="1F1F1F"/>
+                        </a:solidFill>
+                        <a:effectLst/>
+                        <a:latin typeface="Google Sans Text"/>
+                      </a:endParaRPr>
+                    </a:p>
+                  </a:txBody>
+                  <a:tcPr marT="60960" marB="60960" anchor="ctr">
+                    <a:lnL w="7620" cap="flat" cmpd="sng" algn="ctr">
+                      <a:solidFill>
+                        <a:srgbClr val="C4C7C5"/>
+                      </a:solidFill>
+                      <a:prstDash val="solid"/>
+                      <a:round/>
+                      <a:headEnd type="none" w="med" len="med"/>
+                      <a:tailEnd type="none" w="med" len="med"/>
+                    </a:lnL>
+                    <a:lnR w="7620" cap="flat" cmpd="sng" algn="ctr">
+                      <a:solidFill>
+                        <a:srgbClr val="C4C7C5"/>
+                      </a:solidFill>
+                      <a:prstDash val="solid"/>
+                      <a:round/>
+                      <a:headEnd type="none" w="med" len="med"/>
+                      <a:tailEnd type="none" w="med" len="med"/>
+                    </a:lnR>
+                    <a:lnT w="7620" cap="flat" cmpd="sng" algn="ctr">
+                      <a:solidFill>
+                        <a:srgbClr val="C4C7C5"/>
+                      </a:solidFill>
+                      <a:prstDash val="solid"/>
+                      <a:round/>
+                      <a:headEnd type="none" w="med" len="med"/>
+                      <a:tailEnd type="none" w="med" len="med"/>
+                    </a:lnT>
+                    <a:lnB w="7620" cap="flat" cmpd="sng" algn="ctr">
+                      <a:solidFill>
+                        <a:srgbClr val="C4C7C5"/>
+                      </a:solidFill>
+                      <a:prstDash val="solid"/>
+                      <a:round/>
+                      <a:headEnd type="none" w="med" len="med"/>
+                      <a:tailEnd type="none" w="med" len="med"/>
+                    </a:lnB>
+                    <a:noFill/>
+                  </a:tcPr>
+                </a:tc>
+                <a:tc>
+                  <a:txBody>
+                    <a:bodyPr/>
+                    <a:lstStyle/>
+                    <a:p>
+                      <a:pPr marL="0" marR="0" rtl="0">
+                        <a:spcAft>
+                          <a:spcPts val="2400"/>
+                        </a:spcAft>
+                        <a:buNone/>
+                      </a:pPr>
+                      <a:r>
+                        <a:rPr lang="en-IN" dirty="0" err="1"/>
+                        <a:t>BioBERT</a:t>
+                      </a:r>
+                      <a:endParaRPr lang="en-IN" dirty="0">
+                        <a:solidFill>
+                          <a:srgbClr val="1F1F1F"/>
+                        </a:solidFill>
+                        <a:effectLst/>
+                        <a:latin typeface="Google Sans Text"/>
+                      </a:endParaRPr>
+                    </a:p>
+                  </a:txBody>
+                  <a:tcPr marT="60960" marB="60960" anchor="ctr">
+                    <a:lnL w="7620" cap="flat" cmpd="sng" algn="ctr">
+                      <a:solidFill>
+                        <a:srgbClr val="C4C7C5"/>
+                      </a:solidFill>
+                      <a:prstDash val="solid"/>
+                      <a:round/>
+                      <a:headEnd type="none" w="med" len="med"/>
+                      <a:tailEnd type="none" w="med" len="med"/>
+                    </a:lnL>
+                    <a:lnR w="7620" cap="flat" cmpd="sng" algn="ctr">
+                      <a:solidFill>
+                        <a:srgbClr val="C4C7C5"/>
+                      </a:solidFill>
+                      <a:prstDash val="solid"/>
+                      <a:round/>
+                      <a:headEnd type="none" w="med" len="med"/>
+                      <a:tailEnd type="none" w="med" len="med"/>
+                    </a:lnR>
+                    <a:lnT w="7620" cap="flat" cmpd="sng" algn="ctr">
+                      <a:solidFill>
+                        <a:srgbClr val="C4C7C5"/>
+                      </a:solidFill>
+                      <a:prstDash val="solid"/>
+                      <a:round/>
+                      <a:headEnd type="none" w="med" len="med"/>
+                      <a:tailEnd type="none" w="med" len="med"/>
+                    </a:lnT>
+                    <a:lnB w="7620" cap="flat" cmpd="sng" algn="ctr">
+                      <a:solidFill>
+                        <a:srgbClr val="C4C7C5"/>
+                      </a:solidFill>
+                      <a:prstDash val="solid"/>
+                      <a:round/>
+                      <a:headEnd type="none" w="med" len="med"/>
+                      <a:tailEnd type="none" w="med" len="med"/>
+                    </a:lnB>
+                    <a:noFill/>
+                  </a:tcPr>
+                </a:tc>
+                <a:tc>
+                  <a:txBody>
+                    <a:bodyPr/>
+                    <a:lstStyle/>
+                    <a:p>
+                      <a:pPr marL="0" marR="0" rtl="0">
+                        <a:spcAft>
+                          <a:spcPts val="2400"/>
+                        </a:spcAft>
+                        <a:buNone/>
+                      </a:pPr>
+                      <a:r>
+                        <a:rPr lang="en-US" b="0" dirty="0">
+                          <a:solidFill>
+                            <a:srgbClr val="1F1F1F"/>
+                          </a:solidFill>
+                          <a:effectLst/>
+                          <a:latin typeface="Google Sans Text"/>
+                        </a:rPr>
+                        <a:t>2</a:t>
+                      </a:r>
+                      <a:r>
+                        <a:rPr lang="en-IN" b="0" dirty="0">
+                          <a:solidFill>
+                            <a:srgbClr val="1F1F1F"/>
+                          </a:solidFill>
+                          <a:effectLst/>
+                          <a:latin typeface="Google Sans Text"/>
+                        </a:rPr>
+                        <a:t>019</a:t>
+                      </a:r>
+                    </a:p>
+                  </a:txBody>
+                  <a:tcPr marT="60960" marB="60960" anchor="ctr">
+                    <a:lnL w="7620" cap="flat" cmpd="sng" algn="ctr">
+                      <a:solidFill>
+                        <a:srgbClr val="C4C7C5"/>
+                      </a:solidFill>
+                      <a:prstDash val="solid"/>
+                      <a:round/>
+                      <a:headEnd type="none" w="med" len="med"/>
+                      <a:tailEnd type="none" w="med" len="med"/>
+                    </a:lnL>
+                    <a:lnR w="7620" cap="flat" cmpd="sng" algn="ctr">
+                      <a:solidFill>
+                        <a:srgbClr val="C4C7C5"/>
+                      </a:solidFill>
+                      <a:prstDash val="solid"/>
+                      <a:round/>
+                      <a:headEnd type="none" w="med" len="med"/>
+                      <a:tailEnd type="none" w="med" len="med"/>
+                    </a:lnR>
+                    <a:lnT w="7620" cap="flat" cmpd="sng" algn="ctr">
+                      <a:solidFill>
+                        <a:srgbClr val="C4C7C5"/>
+                      </a:solidFill>
+                      <a:prstDash val="solid"/>
+                      <a:round/>
+                      <a:headEnd type="none" w="med" len="med"/>
+                      <a:tailEnd type="none" w="med" len="med"/>
+                    </a:lnT>
+                    <a:lnB w="7620" cap="flat" cmpd="sng" algn="ctr">
+                      <a:solidFill>
+                        <a:srgbClr val="C4C7C5"/>
+                      </a:solidFill>
+                      <a:prstDash val="solid"/>
+                      <a:round/>
+                      <a:headEnd type="none" w="med" len="med"/>
+                      <a:tailEnd type="none" w="med" len="med"/>
+                    </a:lnB>
+                    <a:noFill/>
+                  </a:tcPr>
+                </a:tc>
+                <a:tc>
+                  <a:txBody>
+                    <a:bodyPr/>
+                    <a:lstStyle/>
+                    <a:p>
+                      <a:pPr marL="0" marR="0" rtl="0">
+                        <a:spcAft>
+                          <a:spcPts val="2400"/>
+                        </a:spcAft>
+                        <a:buNone/>
+                      </a:pPr>
+                      <a:r>
+                        <a:rPr lang="en-IN" dirty="0"/>
+                        <a:t>BERT fine-tuned on PubMed abstracts &amp; PMC articles.</a:t>
+                      </a:r>
+                      <a:endParaRPr lang="en-IN" dirty="0">
+                        <a:solidFill>
+                          <a:srgbClr val="1F1F1F"/>
+                        </a:solidFill>
+                        <a:effectLst/>
+                        <a:latin typeface="Google Sans Text"/>
+                      </a:endParaRPr>
+                    </a:p>
+                  </a:txBody>
+                  <a:tcPr marT="60960" marB="60960" anchor="ctr">
+                    <a:lnL w="7620" cap="flat" cmpd="sng" algn="ctr">
+                      <a:solidFill>
+                        <a:srgbClr val="C4C7C5"/>
+                      </a:solidFill>
+                      <a:prstDash val="solid"/>
+                      <a:round/>
+                      <a:headEnd type="none" w="med" len="med"/>
+                      <a:tailEnd type="none" w="med" len="med"/>
+                    </a:lnL>
+                    <a:lnR w="7620" cap="flat" cmpd="sng" algn="ctr">
+                      <a:solidFill>
+                        <a:srgbClr val="C4C7C5"/>
+                      </a:solidFill>
+                      <a:prstDash val="solid"/>
+                      <a:round/>
+                      <a:headEnd type="none" w="med" len="med"/>
+                      <a:tailEnd type="none" w="med" len="med"/>
+                    </a:lnR>
+                    <a:lnT w="7620" cap="flat" cmpd="sng" algn="ctr">
+                      <a:solidFill>
+                        <a:srgbClr val="C4C7C5"/>
+                      </a:solidFill>
+                      <a:prstDash val="solid"/>
+                      <a:round/>
+                      <a:headEnd type="none" w="med" len="med"/>
+                      <a:tailEnd type="none" w="med" len="med"/>
+                    </a:lnT>
+                    <a:lnB w="7620" cap="flat" cmpd="sng" algn="ctr">
+                      <a:solidFill>
+                        <a:srgbClr val="C4C7C5"/>
+                      </a:solidFill>
+                      <a:prstDash val="solid"/>
+                      <a:round/>
+                      <a:headEnd type="none" w="med" len="med"/>
+                      <a:tailEnd type="none" w="med" len="med"/>
+                    </a:lnB>
+                    <a:noFill/>
+                  </a:tcPr>
+                </a:tc>
+                <a:tc>
+                  <a:txBody>
+                    <a:bodyPr/>
+                    <a:lstStyle/>
+                    <a:p>
+                      <a:pPr marL="0" marR="0" rtl="0">
+                        <a:spcAft>
+                          <a:spcPts val="2400"/>
+                        </a:spcAft>
+                        <a:buNone/>
+                      </a:pPr>
+                      <a:r>
+                        <a:rPr lang="en-IN" dirty="0"/>
+                        <a:t>Struggles with unstructured clinical notes and patient narratives.</a:t>
+                      </a:r>
+                      <a:endParaRPr lang="en-IN" dirty="0">
+                        <a:solidFill>
+                          <a:srgbClr val="1F1F1F"/>
+                        </a:solidFill>
+                        <a:effectLst/>
+                        <a:latin typeface="Google Sans Text"/>
+                      </a:endParaRPr>
+                    </a:p>
+                  </a:txBody>
+                  <a:tcPr marT="60960" marB="60960" anchor="ctr">
+                    <a:lnL w="7620" cap="flat" cmpd="sng" algn="ctr">
+                      <a:solidFill>
+                        <a:srgbClr val="C4C7C5"/>
+                      </a:solidFill>
+                      <a:prstDash val="solid"/>
+                      <a:round/>
+                      <a:headEnd type="none" w="med" len="med"/>
+                      <a:tailEnd type="none" w="med" len="med"/>
+                    </a:lnL>
+                    <a:lnR w="7620" cap="flat" cmpd="sng" algn="ctr">
+                      <a:solidFill>
+                        <a:srgbClr val="C4C7C5"/>
+                      </a:solidFill>
+                      <a:prstDash val="solid"/>
+                      <a:round/>
+                      <a:headEnd type="none" w="med" len="med"/>
+                      <a:tailEnd type="none" w="med" len="med"/>
+                    </a:lnR>
+                    <a:lnT w="7620" cap="flat" cmpd="sng" algn="ctr">
+                      <a:solidFill>
+                        <a:srgbClr val="C4C7C5"/>
+                      </a:solidFill>
+                      <a:prstDash val="solid"/>
+                      <a:round/>
+                      <a:headEnd type="none" w="med" len="med"/>
+                      <a:tailEnd type="none" w="med" len="med"/>
+                    </a:lnT>
+                    <a:lnB w="7620" cap="flat" cmpd="sng" algn="ctr">
+                      <a:solidFill>
+                        <a:srgbClr val="C4C7C5"/>
+                      </a:solidFill>
+                      <a:prstDash val="solid"/>
+                      <a:round/>
+                      <a:headEnd type="none" w="med" len="med"/>
+                      <a:tailEnd type="none" w="med" len="med"/>
+                    </a:lnB>
+                    <a:noFill/>
+                  </a:tcPr>
+                </a:tc>
+                <a:extLst>
+                  <a:ext uri="{0D108BD9-81ED-4DB2-BD59-A6C34878D82A}">
+                    <a16:rowId xmlns:a16="http://schemas.microsoft.com/office/drawing/2014/main" val="2942291451"/>
+                  </a:ext>
+                </a:extLst>
+              </a:tr>
+              <a:tr h="717625">
+                <a:tc>
+                  <a:txBody>
+                    <a:bodyPr/>
+                    <a:lstStyle/>
+                    <a:p>
+                      <a:pPr marL="0" marR="0" rtl="0">
+                        <a:spcAft>
+                          <a:spcPts val="2400"/>
+                        </a:spcAft>
+                        <a:buNone/>
+                      </a:pPr>
+                      <a:r>
+                        <a:rPr lang="en-US" dirty="0">
+                          <a:solidFill>
+                            <a:srgbClr val="1F1F1F"/>
+                          </a:solidFill>
+                          <a:effectLst/>
+                          <a:latin typeface="Google Sans Text"/>
+                        </a:rPr>
+                        <a:t>3</a:t>
+                      </a:r>
+                      <a:endParaRPr lang="en-IN" dirty="0">
+                        <a:solidFill>
+                          <a:srgbClr val="1F1F1F"/>
+                        </a:solidFill>
+                        <a:effectLst/>
+                        <a:latin typeface="Google Sans Text"/>
+                      </a:endParaRPr>
+                    </a:p>
+                  </a:txBody>
+                  <a:tcPr marT="60960" marB="60960" anchor="ctr">
+                    <a:lnL w="7620" cap="flat" cmpd="sng" algn="ctr">
+                      <a:solidFill>
+                        <a:srgbClr val="C4C7C5"/>
+                      </a:solidFill>
+                      <a:prstDash val="solid"/>
+                      <a:round/>
+                      <a:headEnd type="none" w="med" len="med"/>
+                      <a:tailEnd type="none" w="med" len="med"/>
+                    </a:lnL>
+                    <a:lnR w="7620" cap="flat" cmpd="sng" algn="ctr">
+                      <a:solidFill>
+                        <a:srgbClr val="C4C7C5"/>
+                      </a:solidFill>
+                      <a:prstDash val="solid"/>
+                      <a:round/>
+                      <a:headEnd type="none" w="med" len="med"/>
+                      <a:tailEnd type="none" w="med" len="med"/>
+                    </a:lnR>
+                    <a:lnT w="7620" cap="flat" cmpd="sng" algn="ctr">
+                      <a:solidFill>
+                        <a:srgbClr val="C4C7C5"/>
+                      </a:solidFill>
+                      <a:prstDash val="solid"/>
+                      <a:round/>
+                      <a:headEnd type="none" w="med" len="med"/>
+                      <a:tailEnd type="none" w="med" len="med"/>
+                    </a:lnT>
+                    <a:lnB w="7620" cap="flat" cmpd="sng" algn="ctr">
+                      <a:solidFill>
+                        <a:srgbClr val="C4C7C5"/>
+                      </a:solidFill>
+                      <a:prstDash val="solid"/>
+                      <a:round/>
+                      <a:headEnd type="none" w="med" len="med"/>
+                      <a:tailEnd type="none" w="med" len="med"/>
+                    </a:lnB>
+                    <a:noFill/>
+                  </a:tcPr>
+                </a:tc>
+                <a:tc>
+                  <a:txBody>
+                    <a:bodyPr/>
+                    <a:lstStyle/>
+                    <a:p>
+                      <a:pPr marL="0" marR="0" rtl="0">
+                        <a:spcAft>
+                          <a:spcPts val="2400"/>
+                        </a:spcAft>
+                        <a:buNone/>
+                      </a:pPr>
+                      <a:r>
+                        <a:rPr lang="en-IN" dirty="0" err="1"/>
+                        <a:t>ClinicalBERT</a:t>
+                      </a:r>
+                      <a:endParaRPr lang="en-IN" dirty="0">
+                        <a:solidFill>
+                          <a:srgbClr val="1F1F1F"/>
+                        </a:solidFill>
+                        <a:effectLst/>
+                        <a:latin typeface="Google Sans Text"/>
+                      </a:endParaRPr>
+                    </a:p>
+                  </a:txBody>
+                  <a:tcPr marT="60960" marB="60960" anchor="ctr">
+                    <a:lnL w="7620" cap="flat" cmpd="sng" algn="ctr">
+                      <a:solidFill>
+                        <a:srgbClr val="C4C7C5"/>
+                      </a:solidFill>
+                      <a:prstDash val="solid"/>
+                      <a:round/>
+                      <a:headEnd type="none" w="med" len="med"/>
+                      <a:tailEnd type="none" w="med" len="med"/>
+                    </a:lnL>
+                    <a:lnR w="7620" cap="flat" cmpd="sng" algn="ctr">
+                      <a:solidFill>
+                        <a:srgbClr val="C4C7C5"/>
+                      </a:solidFill>
+                      <a:prstDash val="solid"/>
+                      <a:round/>
+                      <a:headEnd type="none" w="med" len="med"/>
+                      <a:tailEnd type="none" w="med" len="med"/>
+                    </a:lnR>
+                    <a:lnT w="7620" cap="flat" cmpd="sng" algn="ctr">
+                      <a:solidFill>
+                        <a:srgbClr val="C4C7C5"/>
+                      </a:solidFill>
+                      <a:prstDash val="solid"/>
+                      <a:round/>
+                      <a:headEnd type="none" w="med" len="med"/>
+                      <a:tailEnd type="none" w="med" len="med"/>
+                    </a:lnT>
+                    <a:lnB w="7620" cap="flat" cmpd="sng" algn="ctr">
+                      <a:solidFill>
+                        <a:srgbClr val="C4C7C5"/>
+                      </a:solidFill>
+                      <a:prstDash val="solid"/>
+                      <a:round/>
+                      <a:headEnd type="none" w="med" len="med"/>
+                      <a:tailEnd type="none" w="med" len="med"/>
+                    </a:lnB>
+                    <a:noFill/>
+                  </a:tcPr>
+                </a:tc>
+                <a:tc>
+                  <a:txBody>
+                    <a:bodyPr/>
+                    <a:lstStyle/>
+                    <a:p>
+                      <a:pPr marL="0" marR="0" rtl="0">
+                        <a:spcAft>
+                          <a:spcPts val="2400"/>
+                        </a:spcAft>
+                        <a:buNone/>
+                      </a:pPr>
+                      <a:r>
+                        <a:rPr lang="en-IN" b="0" dirty="0">
+                          <a:solidFill>
+                            <a:srgbClr val="1F1F1F"/>
+                          </a:solidFill>
+                          <a:effectLst/>
+                          <a:latin typeface="Google Sans Text"/>
+                        </a:rPr>
+                        <a:t>2019</a:t>
+                      </a:r>
+                    </a:p>
+                  </a:txBody>
+                  <a:tcPr marT="60960" marB="60960" anchor="ctr">
+                    <a:lnL w="7620" cap="flat" cmpd="sng" algn="ctr">
+                      <a:solidFill>
+                        <a:srgbClr val="C4C7C5"/>
+                      </a:solidFill>
+                      <a:prstDash val="solid"/>
+                      <a:round/>
+                      <a:headEnd type="none" w="med" len="med"/>
+                      <a:tailEnd type="none" w="med" len="med"/>
+                    </a:lnL>
+                    <a:lnR w="7620" cap="flat" cmpd="sng" algn="ctr">
+                      <a:solidFill>
+                        <a:srgbClr val="C4C7C5"/>
+                      </a:solidFill>
+                      <a:prstDash val="solid"/>
+                      <a:round/>
+                      <a:headEnd type="none" w="med" len="med"/>
+                      <a:tailEnd type="none" w="med" len="med"/>
+                    </a:lnR>
+                    <a:lnT w="7620" cap="flat" cmpd="sng" algn="ctr">
+                      <a:solidFill>
+                        <a:srgbClr val="C4C7C5"/>
+                      </a:solidFill>
+                      <a:prstDash val="solid"/>
+                      <a:round/>
+                      <a:headEnd type="none" w="med" len="med"/>
+                      <a:tailEnd type="none" w="med" len="med"/>
+                    </a:lnT>
+                    <a:lnB w="7620" cap="flat" cmpd="sng" algn="ctr">
+                      <a:solidFill>
+                        <a:srgbClr val="C4C7C5"/>
+                      </a:solidFill>
+                      <a:prstDash val="solid"/>
+                      <a:round/>
+                      <a:headEnd type="none" w="med" len="med"/>
+                      <a:tailEnd type="none" w="med" len="med"/>
+                    </a:lnB>
+                    <a:noFill/>
+                  </a:tcPr>
+                </a:tc>
+                <a:tc>
+                  <a:txBody>
+                    <a:bodyPr/>
+                    <a:lstStyle/>
+                    <a:p>
+                      <a:pPr marL="0" marR="0" rtl="0">
+                        <a:spcAft>
+                          <a:spcPts val="2400"/>
+                        </a:spcAft>
+                        <a:buNone/>
+                      </a:pPr>
+                      <a:r>
+                        <a:rPr lang="en-IN" dirty="0"/>
+                        <a:t>Transformer pre-trained on EHR clinical notes (MIMIC-III).</a:t>
+                      </a:r>
+                      <a:endParaRPr lang="en-IN" dirty="0">
+                        <a:solidFill>
+                          <a:srgbClr val="1F1F1F"/>
+                        </a:solidFill>
+                        <a:effectLst/>
+                        <a:latin typeface="Google Sans Text"/>
+                      </a:endParaRPr>
+                    </a:p>
+                  </a:txBody>
+                  <a:tcPr marT="60960" marB="60960" anchor="ctr">
+                    <a:lnL w="7620" cap="flat" cmpd="sng" algn="ctr">
+                      <a:solidFill>
+                        <a:srgbClr val="C4C7C5"/>
+                      </a:solidFill>
+                      <a:prstDash val="solid"/>
+                      <a:round/>
+                      <a:headEnd type="none" w="med" len="med"/>
+                      <a:tailEnd type="none" w="med" len="med"/>
+                    </a:lnL>
+                    <a:lnR w="7620" cap="flat" cmpd="sng" algn="ctr">
+                      <a:solidFill>
+                        <a:srgbClr val="C4C7C5"/>
+                      </a:solidFill>
+                      <a:prstDash val="solid"/>
+                      <a:round/>
+                      <a:headEnd type="none" w="med" len="med"/>
+                      <a:tailEnd type="none" w="med" len="med"/>
+                    </a:lnR>
+                    <a:lnT w="7620" cap="flat" cmpd="sng" algn="ctr">
+                      <a:solidFill>
+                        <a:srgbClr val="C4C7C5"/>
+                      </a:solidFill>
+                      <a:prstDash val="solid"/>
+                      <a:round/>
+                      <a:headEnd type="none" w="med" len="med"/>
+                      <a:tailEnd type="none" w="med" len="med"/>
+                    </a:lnT>
+                    <a:lnB w="7620" cap="flat" cmpd="sng" algn="ctr">
+                      <a:solidFill>
+                        <a:srgbClr val="C4C7C5"/>
+                      </a:solidFill>
+                      <a:prstDash val="solid"/>
+                      <a:round/>
+                      <a:headEnd type="none" w="med" len="med"/>
+                      <a:tailEnd type="none" w="med" len="med"/>
+                    </a:lnB>
+                    <a:noFill/>
+                  </a:tcPr>
+                </a:tc>
+                <a:tc>
+                  <a:txBody>
+                    <a:bodyPr/>
+                    <a:lstStyle/>
+                    <a:p>
+                      <a:pPr marL="0" marR="0" rtl="0">
+                        <a:spcAft>
+                          <a:spcPts val="2400"/>
+                        </a:spcAft>
+                        <a:buNone/>
+                      </a:pPr>
+                      <a:r>
+                        <a:rPr lang="en-IN" dirty="0"/>
+                        <a:t>Limited token context window (512 tokens).</a:t>
+                      </a:r>
+                      <a:endParaRPr lang="en-IN" dirty="0">
+                        <a:solidFill>
+                          <a:srgbClr val="1F1F1F"/>
+                        </a:solidFill>
+                        <a:effectLst/>
+                        <a:latin typeface="Google Sans Text"/>
+                      </a:endParaRPr>
+                    </a:p>
+                  </a:txBody>
+                  <a:tcPr marT="60960" marB="60960" anchor="ctr">
+                    <a:lnL w="7620" cap="flat" cmpd="sng" algn="ctr">
+                      <a:solidFill>
+                        <a:srgbClr val="C4C7C5"/>
+                      </a:solidFill>
+                      <a:prstDash val="solid"/>
+                      <a:round/>
+                      <a:headEnd type="none" w="med" len="med"/>
+                      <a:tailEnd type="none" w="med" len="med"/>
+                    </a:lnL>
+                    <a:lnR w="7620" cap="flat" cmpd="sng" algn="ctr">
+                      <a:solidFill>
+                        <a:srgbClr val="C4C7C5"/>
+                      </a:solidFill>
+                      <a:prstDash val="solid"/>
+                      <a:round/>
+                      <a:headEnd type="none" w="med" len="med"/>
+                      <a:tailEnd type="none" w="med" len="med"/>
+                    </a:lnR>
+                    <a:lnT w="7620" cap="flat" cmpd="sng" algn="ctr">
+                      <a:solidFill>
+                        <a:srgbClr val="C4C7C5"/>
+                      </a:solidFill>
+                      <a:prstDash val="solid"/>
+                      <a:round/>
+                      <a:headEnd type="none" w="med" len="med"/>
+                      <a:tailEnd type="none" w="med" len="med"/>
+                    </a:lnT>
+                    <a:lnB w="7620" cap="flat" cmpd="sng" algn="ctr">
+                      <a:solidFill>
+                        <a:srgbClr val="C4C7C5"/>
+                      </a:solidFill>
+                      <a:prstDash val="solid"/>
+                      <a:round/>
+                      <a:headEnd type="none" w="med" len="med"/>
+                      <a:tailEnd type="none" w="med" len="med"/>
+                    </a:lnB>
+                    <a:noFill/>
+                  </a:tcPr>
+                </a:tc>
+                <a:extLst>
+                  <a:ext uri="{0D108BD9-81ED-4DB2-BD59-A6C34878D82A}">
+                    <a16:rowId xmlns:a16="http://schemas.microsoft.com/office/drawing/2014/main" val="512742220"/>
+                  </a:ext>
+                </a:extLst>
+              </a:tr>
+              <a:tr h="717625">
+                <a:tc>
+                  <a:txBody>
+                    <a:bodyPr/>
+                    <a:lstStyle/>
+                    <a:p>
+                      <a:pPr marL="0" marR="0" rtl="0">
+                        <a:spcAft>
+                          <a:spcPts val="2400"/>
+                        </a:spcAft>
+                        <a:buNone/>
+                      </a:pPr>
+                      <a:r>
+                        <a:rPr lang="en-US" dirty="0">
+                          <a:solidFill>
+                            <a:srgbClr val="1F1F1F"/>
+                          </a:solidFill>
+                          <a:effectLst/>
+                          <a:latin typeface="Google Sans Text"/>
+                        </a:rPr>
+                        <a:t>4</a:t>
+                      </a:r>
+                      <a:endParaRPr lang="en-IN" dirty="0">
+                        <a:solidFill>
+                          <a:srgbClr val="1F1F1F"/>
+                        </a:solidFill>
+                        <a:effectLst/>
+                        <a:latin typeface="Google Sans Text"/>
+                      </a:endParaRPr>
+                    </a:p>
+                  </a:txBody>
+                  <a:tcPr marT="60960" marB="60960" anchor="ctr">
+                    <a:lnL w="7620" cap="flat" cmpd="sng" algn="ctr">
+                      <a:solidFill>
+                        <a:srgbClr val="C4C7C5"/>
+                      </a:solidFill>
+                      <a:prstDash val="solid"/>
+                      <a:round/>
+                      <a:headEnd type="none" w="med" len="med"/>
+                      <a:tailEnd type="none" w="med" len="med"/>
+                    </a:lnL>
+                    <a:lnR w="7620" cap="flat" cmpd="sng" algn="ctr">
+                      <a:solidFill>
+                        <a:srgbClr val="C4C7C5"/>
+                      </a:solidFill>
+                      <a:prstDash val="solid"/>
+                      <a:round/>
+                      <a:headEnd type="none" w="med" len="med"/>
+                      <a:tailEnd type="none" w="med" len="med"/>
+                    </a:lnR>
+                    <a:lnT w="7620" cap="flat" cmpd="sng" algn="ctr">
+                      <a:solidFill>
+                        <a:srgbClr val="C4C7C5"/>
+                      </a:solidFill>
+                      <a:prstDash val="solid"/>
+                      <a:round/>
+                      <a:headEnd type="none" w="med" len="med"/>
+                      <a:tailEnd type="none" w="med" len="med"/>
+                    </a:lnT>
+                    <a:lnB w="7620" cap="flat" cmpd="sng" algn="ctr">
+                      <a:solidFill>
+                        <a:srgbClr val="C4C7C5"/>
+                      </a:solidFill>
+                      <a:prstDash val="solid"/>
+                      <a:round/>
+                      <a:headEnd type="none" w="med" len="med"/>
+                      <a:tailEnd type="none" w="med" len="med"/>
+                    </a:lnB>
+                    <a:noFill/>
+                  </a:tcPr>
+                </a:tc>
+                <a:tc>
+                  <a:txBody>
+                    <a:bodyPr/>
+                    <a:lstStyle/>
+                    <a:p>
+                      <a:pPr marL="0" marR="0" rtl="0">
+                        <a:spcAft>
+                          <a:spcPts val="2400"/>
+                        </a:spcAft>
+                        <a:buNone/>
+                      </a:pPr>
+                      <a:r>
+                        <a:rPr lang="en-IN" dirty="0"/>
+                        <a:t>RAG (Lewis et al.)</a:t>
+                      </a:r>
+                      <a:endParaRPr lang="en-IN" dirty="0">
+                        <a:solidFill>
+                          <a:srgbClr val="1F1F1F"/>
+                        </a:solidFill>
+                        <a:effectLst/>
+                        <a:latin typeface="Google Sans Text"/>
+                      </a:endParaRPr>
+                    </a:p>
+                  </a:txBody>
+                  <a:tcPr marT="60960" marB="60960" anchor="ctr">
+                    <a:lnL w="7620" cap="flat" cmpd="sng" algn="ctr">
+                      <a:solidFill>
+                        <a:srgbClr val="C4C7C5"/>
+                      </a:solidFill>
+                      <a:prstDash val="solid"/>
+                      <a:round/>
+                      <a:headEnd type="none" w="med" len="med"/>
+                      <a:tailEnd type="none" w="med" len="med"/>
+                    </a:lnL>
+                    <a:lnR w="7620" cap="flat" cmpd="sng" algn="ctr">
+                      <a:solidFill>
+                        <a:srgbClr val="C4C7C5"/>
+                      </a:solidFill>
+                      <a:prstDash val="solid"/>
+                      <a:round/>
+                      <a:headEnd type="none" w="med" len="med"/>
+                      <a:tailEnd type="none" w="med" len="med"/>
+                    </a:lnR>
+                    <a:lnT w="7620" cap="flat" cmpd="sng" algn="ctr">
+                      <a:solidFill>
+                        <a:srgbClr val="C4C7C5"/>
+                      </a:solidFill>
+                      <a:prstDash val="solid"/>
+                      <a:round/>
+                      <a:headEnd type="none" w="med" len="med"/>
+                      <a:tailEnd type="none" w="med" len="med"/>
+                    </a:lnT>
+                    <a:lnB w="7620" cap="flat" cmpd="sng" algn="ctr">
+                      <a:solidFill>
+                        <a:srgbClr val="C4C7C5"/>
+                      </a:solidFill>
+                      <a:prstDash val="solid"/>
+                      <a:round/>
+                      <a:headEnd type="none" w="med" len="med"/>
+                      <a:tailEnd type="none" w="med" len="med"/>
+                    </a:lnB>
+                    <a:noFill/>
+                  </a:tcPr>
+                </a:tc>
+                <a:tc>
+                  <a:txBody>
+                    <a:bodyPr/>
+                    <a:lstStyle/>
+                    <a:p>
+                      <a:pPr marL="0" marR="0" rtl="0">
+                        <a:spcAft>
+                          <a:spcPts val="2400"/>
+                        </a:spcAft>
+                        <a:buNone/>
+                      </a:pPr>
+                      <a:r>
+                        <a:rPr lang="en-IN" b="0" dirty="0">
+                          <a:solidFill>
+                            <a:srgbClr val="1F1F1F"/>
+                          </a:solidFill>
+                          <a:effectLst/>
+                          <a:latin typeface="Google Sans Text"/>
+                        </a:rPr>
+                        <a:t>2020</a:t>
+                      </a:r>
+                    </a:p>
+                  </a:txBody>
+                  <a:tcPr marT="60960" marB="60960" anchor="ctr">
+                    <a:lnL w="7620" cap="flat" cmpd="sng" algn="ctr">
+                      <a:solidFill>
+                        <a:srgbClr val="C4C7C5"/>
+                      </a:solidFill>
+                      <a:prstDash val="solid"/>
+                      <a:round/>
+                      <a:headEnd type="none" w="med" len="med"/>
+                      <a:tailEnd type="none" w="med" len="med"/>
+                    </a:lnL>
+                    <a:lnR w="7620" cap="flat" cmpd="sng" algn="ctr">
+                      <a:solidFill>
+                        <a:srgbClr val="C4C7C5"/>
+                      </a:solidFill>
+                      <a:prstDash val="solid"/>
+                      <a:round/>
+                      <a:headEnd type="none" w="med" len="med"/>
+                      <a:tailEnd type="none" w="med" len="med"/>
+                    </a:lnR>
+                    <a:lnT w="7620" cap="flat" cmpd="sng" algn="ctr">
+                      <a:solidFill>
+                        <a:srgbClr val="C4C7C5"/>
+                      </a:solidFill>
+                      <a:prstDash val="solid"/>
+                      <a:round/>
+                      <a:headEnd type="none" w="med" len="med"/>
+                      <a:tailEnd type="none" w="med" len="med"/>
+                    </a:lnT>
+                    <a:lnB w="7620" cap="flat" cmpd="sng" algn="ctr">
+                      <a:solidFill>
+                        <a:srgbClr val="C4C7C5"/>
+                      </a:solidFill>
+                      <a:prstDash val="solid"/>
+                      <a:round/>
+                      <a:headEnd type="none" w="med" len="med"/>
+                      <a:tailEnd type="none" w="med" len="med"/>
+                    </a:lnB>
+                    <a:noFill/>
+                  </a:tcPr>
+                </a:tc>
+                <a:tc>
+                  <a:txBody>
+                    <a:bodyPr/>
+                    <a:lstStyle/>
+                    <a:p>
+                      <a:pPr marL="0" marR="0" rtl="0">
+                        <a:spcAft>
+                          <a:spcPts val="2400"/>
+                        </a:spcAft>
+                        <a:buNone/>
+                      </a:pPr>
+                      <a:r>
+                        <a:rPr lang="en-IN" dirty="0"/>
+                        <a:t>Combines parametric memory with external knowledge retrieval.</a:t>
+                      </a:r>
+                      <a:endParaRPr lang="en-IN" b="0" dirty="0">
+                        <a:solidFill>
+                          <a:srgbClr val="1F1F1F"/>
+                        </a:solidFill>
+                        <a:effectLst/>
+                        <a:latin typeface="Google Sans Text"/>
+                      </a:endParaRPr>
+                    </a:p>
+                  </a:txBody>
+                  <a:tcPr marT="60960" marB="60960" anchor="ctr">
+                    <a:lnL w="7620" cap="flat" cmpd="sng" algn="ctr">
+                      <a:solidFill>
+                        <a:srgbClr val="C4C7C5"/>
+                      </a:solidFill>
+                      <a:prstDash val="solid"/>
+                      <a:round/>
+                      <a:headEnd type="none" w="med" len="med"/>
+                      <a:tailEnd type="none" w="med" len="med"/>
+                    </a:lnL>
+                    <a:lnR w="7620" cap="flat" cmpd="sng" algn="ctr">
+                      <a:solidFill>
+                        <a:srgbClr val="C4C7C5"/>
+                      </a:solidFill>
+                      <a:prstDash val="solid"/>
+                      <a:round/>
+                      <a:headEnd type="none" w="med" len="med"/>
+                      <a:tailEnd type="none" w="med" len="med"/>
+                    </a:lnR>
+                    <a:lnT w="7620" cap="flat" cmpd="sng" algn="ctr">
+                      <a:solidFill>
+                        <a:srgbClr val="C4C7C5"/>
+                      </a:solidFill>
+                      <a:prstDash val="solid"/>
+                      <a:round/>
+                      <a:headEnd type="none" w="med" len="med"/>
+                      <a:tailEnd type="none" w="med" len="med"/>
+                    </a:lnT>
+                    <a:lnB w="7620" cap="flat" cmpd="sng" algn="ctr">
+                      <a:solidFill>
+                        <a:srgbClr val="C4C7C5"/>
+                      </a:solidFill>
+                      <a:prstDash val="solid"/>
+                      <a:round/>
+                      <a:headEnd type="none" w="med" len="med"/>
+                      <a:tailEnd type="none" w="med" len="med"/>
+                    </a:lnB>
+                    <a:noFill/>
+                  </a:tcPr>
+                </a:tc>
+                <a:tc>
+                  <a:txBody>
+                    <a:bodyPr/>
+                    <a:lstStyle/>
+                    <a:p>
+                      <a:pPr marL="0" marR="0" rtl="0">
+                        <a:spcAft>
+                          <a:spcPts val="2400"/>
+                        </a:spcAft>
+                        <a:buNone/>
+                      </a:pPr>
+                      <a:r>
+                        <a:rPr lang="en-IN" dirty="0"/>
+                        <a:t>Domain sensitivity</a:t>
+                      </a:r>
+                      <a:endParaRPr lang="en-IN" b="0" dirty="0">
+                        <a:solidFill>
+                          <a:srgbClr val="1F1F1F"/>
+                        </a:solidFill>
+                        <a:effectLst/>
+                        <a:latin typeface="Google Sans Text"/>
+                      </a:endParaRPr>
+                    </a:p>
+                  </a:txBody>
+                  <a:tcPr marT="60960" marB="60960" anchor="ctr">
+                    <a:lnL w="7620" cap="flat" cmpd="sng" algn="ctr">
+                      <a:solidFill>
+                        <a:srgbClr val="C4C7C5"/>
+                      </a:solidFill>
+                      <a:prstDash val="solid"/>
+                      <a:round/>
+                      <a:headEnd type="none" w="med" len="med"/>
+                      <a:tailEnd type="none" w="med" len="med"/>
+                    </a:lnL>
+                    <a:lnR w="7620" cap="flat" cmpd="sng" algn="ctr">
+                      <a:solidFill>
+                        <a:srgbClr val="C4C7C5"/>
+                      </a:solidFill>
+                      <a:prstDash val="solid"/>
+                      <a:round/>
+                      <a:headEnd type="none" w="med" len="med"/>
+                      <a:tailEnd type="none" w="med" len="med"/>
+                    </a:lnR>
+                    <a:lnT w="7620" cap="flat" cmpd="sng" algn="ctr">
+                      <a:solidFill>
+                        <a:srgbClr val="C4C7C5"/>
+                      </a:solidFill>
+                      <a:prstDash val="solid"/>
+                      <a:round/>
+                      <a:headEnd type="none" w="med" len="med"/>
+                      <a:tailEnd type="none" w="med" len="med"/>
+                    </a:lnT>
+                    <a:lnB w="7620" cap="flat" cmpd="sng" algn="ctr">
+                      <a:solidFill>
+                        <a:srgbClr val="C4C7C5"/>
+                      </a:solidFill>
+                      <a:prstDash val="solid"/>
+                      <a:round/>
+                      <a:headEnd type="none" w="med" len="med"/>
+                      <a:tailEnd type="none" w="med" len="med"/>
+                    </a:lnB>
+                    <a:noFill/>
+                  </a:tcPr>
+                </a:tc>
                 <a:extLst>
                   <a:ext uri="{0D108BD9-81ED-4DB2-BD59-A6C34878D82A}">
                     <a16:rowId xmlns:a16="http://schemas.microsoft.com/office/drawing/2014/main" val="2725248536"/>
+                  </a:ext>
+                </a:extLst>
+              </a:tr>
+              <a:tr h="717625">
+                <a:tc>
+                  <a:txBody>
+                    <a:bodyPr/>
+                    <a:lstStyle/>
+                    <a:p>
+                      <a:pPr marL="0" marR="0" rtl="0">
+                        <a:spcAft>
+                          <a:spcPts val="2400"/>
+                        </a:spcAft>
+                        <a:buNone/>
+                      </a:pPr>
+                      <a:r>
+                        <a:rPr lang="en-US" dirty="0">
+                          <a:solidFill>
+                            <a:srgbClr val="1F1F1F"/>
+                          </a:solidFill>
+                          <a:effectLst/>
+                          <a:latin typeface="Google Sans Text"/>
+                        </a:rPr>
+                        <a:t>5</a:t>
+                      </a:r>
+                      <a:endParaRPr lang="en-IN" dirty="0">
+                        <a:solidFill>
+                          <a:srgbClr val="1F1F1F"/>
+                        </a:solidFill>
+                        <a:effectLst/>
+                        <a:latin typeface="Google Sans Text"/>
+                      </a:endParaRPr>
+                    </a:p>
+                  </a:txBody>
+                  <a:tcPr marT="60960" marB="60960" anchor="ctr">
+                    <a:lnL w="7620" cap="flat" cmpd="sng" algn="ctr">
+                      <a:solidFill>
+                        <a:srgbClr val="C4C7C5"/>
+                      </a:solidFill>
+                      <a:prstDash val="solid"/>
+                      <a:round/>
+                      <a:headEnd type="none" w="med" len="med"/>
+                      <a:tailEnd type="none" w="med" len="med"/>
+                    </a:lnL>
+                    <a:lnR w="7620" cap="flat" cmpd="sng" algn="ctr">
+                      <a:solidFill>
+                        <a:srgbClr val="C4C7C5"/>
+                      </a:solidFill>
+                      <a:prstDash val="solid"/>
+                      <a:round/>
+                      <a:headEnd type="none" w="med" len="med"/>
+                      <a:tailEnd type="none" w="med" len="med"/>
+                    </a:lnR>
+                    <a:lnT w="7620" cap="flat" cmpd="sng" algn="ctr">
+                      <a:solidFill>
+                        <a:srgbClr val="C4C7C5"/>
+                      </a:solidFill>
+                      <a:prstDash val="solid"/>
+                      <a:round/>
+                      <a:headEnd type="none" w="med" len="med"/>
+                      <a:tailEnd type="none" w="med" len="med"/>
+                    </a:lnT>
+                    <a:lnB w="7620" cap="flat" cmpd="sng" algn="ctr">
+                      <a:solidFill>
+                        <a:srgbClr val="C4C7C5"/>
+                      </a:solidFill>
+                      <a:prstDash val="solid"/>
+                      <a:round/>
+                      <a:headEnd type="none" w="med" len="med"/>
+                      <a:tailEnd type="none" w="med" len="med"/>
+                    </a:lnB>
+                    <a:noFill/>
+                  </a:tcPr>
+                </a:tc>
+                <a:tc>
+                  <a:txBody>
+                    <a:bodyPr/>
+                    <a:lstStyle/>
+                    <a:p>
+                      <a:pPr marL="0" marR="0" rtl="0">
+                        <a:spcAft>
+                          <a:spcPts val="2400"/>
+                        </a:spcAft>
+                        <a:buNone/>
+                      </a:pPr>
+                      <a:r>
+                        <a:rPr lang="en-IN" dirty="0" err="1"/>
+                        <a:t>PubMedQA</a:t>
+                      </a:r>
+                      <a:endParaRPr lang="en-IN" dirty="0">
+                        <a:solidFill>
+                          <a:srgbClr val="1F1F1F"/>
+                        </a:solidFill>
+                        <a:effectLst/>
+                        <a:latin typeface="Google Sans Text"/>
+                      </a:endParaRPr>
+                    </a:p>
+                  </a:txBody>
+                  <a:tcPr marT="60960" marB="60960" anchor="ctr">
+                    <a:lnL w="7620" cap="flat" cmpd="sng" algn="ctr">
+                      <a:solidFill>
+                        <a:srgbClr val="C4C7C5"/>
+                      </a:solidFill>
+                      <a:prstDash val="solid"/>
+                      <a:round/>
+                      <a:headEnd type="none" w="med" len="med"/>
+                      <a:tailEnd type="none" w="med" len="med"/>
+                    </a:lnL>
+                    <a:lnR w="7620" cap="flat" cmpd="sng" algn="ctr">
+                      <a:solidFill>
+                        <a:srgbClr val="C4C7C5"/>
+                      </a:solidFill>
+                      <a:prstDash val="solid"/>
+                      <a:round/>
+                      <a:headEnd type="none" w="med" len="med"/>
+                      <a:tailEnd type="none" w="med" len="med"/>
+                    </a:lnR>
+                    <a:lnT w="7620" cap="flat" cmpd="sng" algn="ctr">
+                      <a:solidFill>
+                        <a:srgbClr val="C4C7C5"/>
+                      </a:solidFill>
+                      <a:prstDash val="solid"/>
+                      <a:round/>
+                      <a:headEnd type="none" w="med" len="med"/>
+                      <a:tailEnd type="none" w="med" len="med"/>
+                    </a:lnT>
+                    <a:lnB w="7620" cap="flat" cmpd="sng" algn="ctr">
+                      <a:solidFill>
+                        <a:srgbClr val="C4C7C5"/>
+                      </a:solidFill>
+                      <a:prstDash val="solid"/>
+                      <a:round/>
+                      <a:headEnd type="none" w="med" len="med"/>
+                      <a:tailEnd type="none" w="med" len="med"/>
+                    </a:lnB>
+                    <a:noFill/>
+                  </a:tcPr>
+                </a:tc>
+                <a:tc>
+                  <a:txBody>
+                    <a:bodyPr/>
+                    <a:lstStyle/>
+                    <a:p>
+                      <a:pPr marL="0" marR="0" rtl="0">
+                        <a:spcAft>
+                          <a:spcPts val="2400"/>
+                        </a:spcAft>
+                        <a:buNone/>
+                      </a:pPr>
+                      <a:r>
+                        <a:rPr lang="en-US" b="0" dirty="0">
+                          <a:solidFill>
+                            <a:srgbClr val="1F1F1F"/>
+                          </a:solidFill>
+                          <a:effectLst/>
+                          <a:latin typeface="Google Sans Text"/>
+                        </a:rPr>
+                        <a:t>2019</a:t>
+                      </a:r>
+                      <a:endParaRPr lang="en-IN" b="0" dirty="0">
+                        <a:solidFill>
+                          <a:srgbClr val="1F1F1F"/>
+                        </a:solidFill>
+                        <a:effectLst/>
+                        <a:latin typeface="Google Sans Text"/>
+                      </a:endParaRPr>
+                    </a:p>
+                  </a:txBody>
+                  <a:tcPr marT="60960" marB="60960" anchor="ctr">
+                    <a:lnL w="7620" cap="flat" cmpd="sng" algn="ctr">
+                      <a:solidFill>
+                        <a:srgbClr val="C4C7C5"/>
+                      </a:solidFill>
+                      <a:prstDash val="solid"/>
+                      <a:round/>
+                      <a:headEnd type="none" w="med" len="med"/>
+                      <a:tailEnd type="none" w="med" len="med"/>
+                    </a:lnL>
+                    <a:lnR w="7620" cap="flat" cmpd="sng" algn="ctr">
+                      <a:solidFill>
+                        <a:srgbClr val="C4C7C5"/>
+                      </a:solidFill>
+                      <a:prstDash val="solid"/>
+                      <a:round/>
+                      <a:headEnd type="none" w="med" len="med"/>
+                      <a:tailEnd type="none" w="med" len="med"/>
+                    </a:lnR>
+                    <a:lnT w="7620" cap="flat" cmpd="sng" algn="ctr">
+                      <a:solidFill>
+                        <a:srgbClr val="C4C7C5"/>
+                      </a:solidFill>
+                      <a:prstDash val="solid"/>
+                      <a:round/>
+                      <a:headEnd type="none" w="med" len="med"/>
+                      <a:tailEnd type="none" w="med" len="med"/>
+                    </a:lnT>
+                    <a:lnB w="7620" cap="flat" cmpd="sng" algn="ctr">
+                      <a:solidFill>
+                        <a:srgbClr val="C4C7C5"/>
+                      </a:solidFill>
+                      <a:prstDash val="solid"/>
+                      <a:round/>
+                      <a:headEnd type="none" w="med" len="med"/>
+                      <a:tailEnd type="none" w="med" len="med"/>
+                    </a:lnB>
+                    <a:noFill/>
+                  </a:tcPr>
+                </a:tc>
+                <a:tc>
+                  <a:txBody>
+                    <a:bodyPr/>
+                    <a:lstStyle/>
+                    <a:p>
+                      <a:pPr marL="0" marR="0" rtl="0">
+                        <a:spcAft>
+                          <a:spcPts val="2400"/>
+                        </a:spcAft>
+                        <a:buNone/>
+                      </a:pPr>
+                      <a:r>
+                        <a:rPr lang="en-IN" dirty="0"/>
+                        <a:t>Biomedical question answering dataset based on PubMed abstracts.</a:t>
+                      </a:r>
+                      <a:endParaRPr lang="en-IN" dirty="0">
+                        <a:solidFill>
+                          <a:srgbClr val="1F1F1F"/>
+                        </a:solidFill>
+                        <a:effectLst/>
+                        <a:latin typeface="Google Sans Text"/>
+                      </a:endParaRPr>
+                    </a:p>
+                  </a:txBody>
+                  <a:tcPr marT="60960" marB="60960" anchor="ctr">
+                    <a:lnL w="7620" cap="flat" cmpd="sng" algn="ctr">
+                      <a:solidFill>
+                        <a:srgbClr val="C4C7C5"/>
+                      </a:solidFill>
+                      <a:prstDash val="solid"/>
+                      <a:round/>
+                      <a:headEnd type="none" w="med" len="med"/>
+                      <a:tailEnd type="none" w="med" len="med"/>
+                    </a:lnL>
+                    <a:lnR w="7620" cap="flat" cmpd="sng" algn="ctr">
+                      <a:solidFill>
+                        <a:srgbClr val="C4C7C5"/>
+                      </a:solidFill>
+                      <a:prstDash val="solid"/>
+                      <a:round/>
+                      <a:headEnd type="none" w="med" len="med"/>
+                      <a:tailEnd type="none" w="med" len="med"/>
+                    </a:lnR>
+                    <a:lnT w="7620" cap="flat" cmpd="sng" algn="ctr">
+                      <a:solidFill>
+                        <a:srgbClr val="C4C7C5"/>
+                      </a:solidFill>
+                      <a:prstDash val="solid"/>
+                      <a:round/>
+                      <a:headEnd type="none" w="med" len="med"/>
+                      <a:tailEnd type="none" w="med" len="med"/>
+                    </a:lnT>
+                    <a:lnB w="7620" cap="flat" cmpd="sng" algn="ctr">
+                      <a:solidFill>
+                        <a:srgbClr val="C4C7C5"/>
+                      </a:solidFill>
+                      <a:prstDash val="solid"/>
+                      <a:round/>
+                      <a:headEnd type="none" w="med" len="med"/>
+                      <a:tailEnd type="none" w="med" len="med"/>
+                    </a:lnB>
+                    <a:noFill/>
+                  </a:tcPr>
+                </a:tc>
+                <a:tc>
+                  <a:txBody>
+                    <a:bodyPr/>
+                    <a:lstStyle/>
+                    <a:p>
+                      <a:pPr marL="0" marR="0" rtl="0">
+                        <a:spcAft>
+                          <a:spcPts val="2400"/>
+                        </a:spcAft>
+                        <a:buNone/>
+                      </a:pPr>
+                      <a:r>
+                        <a:rPr lang="en-IN" dirty="0"/>
+                        <a:t>Closed-ended (Yes/No/Maybe) format</a:t>
+                      </a:r>
+                      <a:endParaRPr lang="en-IN" dirty="0">
+                        <a:solidFill>
+                          <a:srgbClr val="1F1F1F"/>
+                        </a:solidFill>
+                        <a:effectLst/>
+                        <a:latin typeface="Google Sans Text"/>
+                      </a:endParaRPr>
+                    </a:p>
+                  </a:txBody>
+                  <a:tcPr marT="60960" marB="60960" anchor="ctr">
+                    <a:lnL w="7620" cap="flat" cmpd="sng" algn="ctr">
+                      <a:solidFill>
+                        <a:srgbClr val="C4C7C5"/>
+                      </a:solidFill>
+                      <a:prstDash val="solid"/>
+                      <a:round/>
+                      <a:headEnd type="none" w="med" len="med"/>
+                      <a:tailEnd type="none" w="med" len="med"/>
+                    </a:lnL>
+                    <a:lnR w="7620" cap="flat" cmpd="sng" algn="ctr">
+                      <a:solidFill>
+                        <a:srgbClr val="C4C7C5"/>
+                      </a:solidFill>
+                      <a:prstDash val="solid"/>
+                      <a:round/>
+                      <a:headEnd type="none" w="med" len="med"/>
+                      <a:tailEnd type="none" w="med" len="med"/>
+                    </a:lnR>
+                    <a:lnT w="7620" cap="flat" cmpd="sng" algn="ctr">
+                      <a:solidFill>
+                        <a:srgbClr val="C4C7C5"/>
+                      </a:solidFill>
+                      <a:prstDash val="solid"/>
+                      <a:round/>
+                      <a:headEnd type="none" w="med" len="med"/>
+                      <a:tailEnd type="none" w="med" len="med"/>
+                    </a:lnT>
+                    <a:lnB w="7620" cap="flat" cmpd="sng" algn="ctr">
+                      <a:solidFill>
+                        <a:srgbClr val="C4C7C5"/>
+                      </a:solidFill>
+                      <a:prstDash val="solid"/>
+                      <a:round/>
+                      <a:headEnd type="none" w="med" len="med"/>
+                      <a:tailEnd type="none" w="med" len="med"/>
+                    </a:lnB>
+                    <a:noFill/>
+                  </a:tcPr>
+                </a:tc>
+                <a:extLst>
+                  <a:ext uri="{0D108BD9-81ED-4DB2-BD59-A6C34878D82A}">
+                    <a16:rowId xmlns:a16="http://schemas.microsoft.com/office/drawing/2014/main" val="3132470707"/>
                   </a:ext>
                 </a:extLst>
               </a:tr>
@@ -5460,7 +6524,7 @@
         </p:nvSpPr>
         <p:spPr>
           <a:xfrm>
-            <a:off x="4529667" y="1322401"/>
+            <a:off x="5071533" y="1203867"/>
             <a:ext cx="6096000" cy="369332"/>
           </a:xfrm>
           <a:prstGeom prst="rect">
@@ -5485,7 +6549,7 @@
                 <a:effectLst/>
                 <a:latin typeface="Google Sans"/>
               </a:rPr>
-              <a:t>Literature Survey Summary</a:t>
+              <a:t>Literature Survey </a:t>
             </a:r>
           </a:p>
         </p:txBody>
@@ -5508,6 +6572,2192 @@
   <p:cSld>
     <p:spTree>
       <p:nvGrpSpPr>
+        <p:cNvPr id="1" name="">
+          <a:extLst>
+            <a:ext uri="{FF2B5EF4-FFF2-40B4-BE49-F238E27FC236}">
+              <a16:creationId xmlns:a16="http://schemas.microsoft.com/office/drawing/2014/main" id="{F2F6E973-3F7B-44B2-739E-D7DA7299E93C}"/>
+            </a:ext>
+          </a:extLst>
+        </p:cNvPr>
+        <p:cNvGrpSpPr/>
+        <p:nvPr/>
+      </p:nvGrpSpPr>
+      <p:grpSpPr>
+        <a:xfrm>
+          <a:off x="0" y="0"/>
+          <a:ext cx="0" cy="0"/>
+          <a:chOff x="0" y="0"/>
+          <a:chExt cx="0" cy="0"/>
+        </a:xfrm>
+      </p:grpSpPr>
+      <p:pic>
+        <p:nvPicPr>
+          <p:cNvPr id="5" name="Picture 4">
+            <a:extLst>
+              <a:ext uri="{FF2B5EF4-FFF2-40B4-BE49-F238E27FC236}">
+                <a16:creationId xmlns:a16="http://schemas.microsoft.com/office/drawing/2014/main" id="{93822B57-2B62-200C-7F6B-D10F9DD17F76}"/>
+              </a:ext>
+            </a:extLst>
+          </p:cNvPr>
+          <p:cNvPicPr>
+            <a:picLocks noChangeAspect="1"/>
+          </p:cNvPicPr>
+          <p:nvPr/>
+        </p:nvPicPr>
+        <p:blipFill>
+          <a:blip r:embed="rId2">
+            <a:extLst>
+              <a:ext uri="{28A0092B-C50C-407E-A947-70E740481C1C}">
+                <a14:useLocalDpi xmlns:a14="http://schemas.microsoft.com/office/drawing/2010/main" val="0"/>
+              </a:ext>
+            </a:extLst>
+          </a:blip>
+          <a:stretch>
+            <a:fillRect/>
+          </a:stretch>
+        </p:blipFill>
+        <p:spPr>
+          <a:xfrm>
+            <a:off x="2224929" y="139075"/>
+            <a:ext cx="7178671" cy="927725"/>
+          </a:xfrm>
+          <a:prstGeom prst="rect">
+            <a:avLst/>
+          </a:prstGeom>
+        </p:spPr>
+      </p:pic>
+      <p:graphicFrame>
+        <p:nvGraphicFramePr>
+          <p:cNvPr id="9" name="Table 8">
+            <a:extLst>
+              <a:ext uri="{FF2B5EF4-FFF2-40B4-BE49-F238E27FC236}">
+                <a16:creationId xmlns:a16="http://schemas.microsoft.com/office/drawing/2014/main" id="{914D41E0-21A2-5949-3353-8B9C6169332D}"/>
+              </a:ext>
+            </a:extLst>
+          </p:cNvPr>
+          <p:cNvGraphicFramePr>
+            <a:graphicFrameLocks noGrp="1"/>
+          </p:cNvGraphicFramePr>
+          <p:nvPr>
+            <p:extLst>
+              <p:ext uri="{D42A27DB-BD31-4B8C-83A1-F6EECF244321}">
+                <p14:modId xmlns:p14="http://schemas.microsoft.com/office/powerpoint/2010/main" val="2784747389"/>
+              </p:ext>
+            </p:extLst>
+          </p:nvPr>
+        </p:nvGraphicFramePr>
+        <p:xfrm>
+          <a:off x="143933" y="1701801"/>
+          <a:ext cx="11963400" cy="4533003"/>
+        </p:xfrm>
+        <a:graphic>
+          <a:graphicData uri="http://schemas.openxmlformats.org/drawingml/2006/table">
+            <a:tbl>
+              <a:tblPr/>
+              <a:tblGrid>
+                <a:gridCol w="889000">
+                  <a:extLst>
+                    <a:ext uri="{9D8B030D-6E8A-4147-A177-3AD203B41FA5}">
+                      <a16:colId xmlns:a16="http://schemas.microsoft.com/office/drawing/2014/main" val="207665555"/>
+                    </a:ext>
+                  </a:extLst>
+                </a:gridCol>
+                <a:gridCol w="1786467">
+                  <a:extLst>
+                    <a:ext uri="{9D8B030D-6E8A-4147-A177-3AD203B41FA5}">
+                      <a16:colId xmlns:a16="http://schemas.microsoft.com/office/drawing/2014/main" val="3902109784"/>
+                    </a:ext>
+                  </a:extLst>
+                </a:gridCol>
+                <a:gridCol w="982133">
+                  <a:extLst>
+                    <a:ext uri="{9D8B030D-6E8A-4147-A177-3AD203B41FA5}">
+                      <a16:colId xmlns:a16="http://schemas.microsoft.com/office/drawing/2014/main" val="2524853104"/>
+                    </a:ext>
+                  </a:extLst>
+                </a:gridCol>
+                <a:gridCol w="4461934">
+                  <a:extLst>
+                    <a:ext uri="{9D8B030D-6E8A-4147-A177-3AD203B41FA5}">
+                      <a16:colId xmlns:a16="http://schemas.microsoft.com/office/drawing/2014/main" val="1622254581"/>
+                    </a:ext>
+                  </a:extLst>
+                </a:gridCol>
+                <a:gridCol w="3843866">
+                  <a:extLst>
+                    <a:ext uri="{9D8B030D-6E8A-4147-A177-3AD203B41FA5}">
+                      <a16:colId xmlns:a16="http://schemas.microsoft.com/office/drawing/2014/main" val="1970995257"/>
+                    </a:ext>
+                  </a:extLst>
+                </a:gridCol>
+              </a:tblGrid>
+              <a:tr h="424051">
+                <a:tc>
+                  <a:txBody>
+                    <a:bodyPr/>
+                    <a:lstStyle/>
+                    <a:p>
+                      <a:pPr marL="0" marR="0" rtl="0">
+                        <a:spcAft>
+                          <a:spcPts val="2400"/>
+                        </a:spcAft>
+                        <a:buNone/>
+                      </a:pPr>
+                      <a:r>
+                        <a:rPr lang="en-US" b="1" dirty="0">
+                          <a:solidFill>
+                            <a:srgbClr val="1F1F1F"/>
+                          </a:solidFill>
+                          <a:effectLst/>
+                          <a:latin typeface="Google Sans Text"/>
+                        </a:rPr>
+                        <a:t>S. No</a:t>
+                      </a:r>
+                      <a:endParaRPr lang="en-IN" b="1" dirty="0">
+                        <a:solidFill>
+                          <a:srgbClr val="1F1F1F"/>
+                        </a:solidFill>
+                        <a:effectLst/>
+                        <a:latin typeface="Google Sans Text"/>
+                      </a:endParaRPr>
+                    </a:p>
+                  </a:txBody>
+                  <a:tcPr marT="60960" marB="60960" anchor="ctr">
+                    <a:lnL w="7620" cap="flat" cmpd="sng" algn="ctr">
+                      <a:solidFill>
+                        <a:srgbClr val="C4C7C5"/>
+                      </a:solidFill>
+                      <a:prstDash val="solid"/>
+                      <a:round/>
+                      <a:headEnd type="none" w="med" len="med"/>
+                      <a:tailEnd type="none" w="med" len="med"/>
+                    </a:lnL>
+                    <a:lnR w="7620" cap="flat" cmpd="sng" algn="ctr">
+                      <a:solidFill>
+                        <a:srgbClr val="C4C7C5"/>
+                      </a:solidFill>
+                      <a:prstDash val="solid"/>
+                      <a:round/>
+                      <a:headEnd type="none" w="med" len="med"/>
+                      <a:tailEnd type="none" w="med" len="med"/>
+                    </a:lnR>
+                    <a:lnT w="7620" cap="flat" cmpd="sng" algn="ctr">
+                      <a:solidFill>
+                        <a:srgbClr val="C4C7C5"/>
+                      </a:solidFill>
+                      <a:prstDash val="solid"/>
+                      <a:round/>
+                      <a:headEnd type="none" w="med" len="med"/>
+                      <a:tailEnd type="none" w="med" len="med"/>
+                    </a:lnT>
+                    <a:lnB w="7620" cap="flat" cmpd="sng" algn="ctr">
+                      <a:solidFill>
+                        <a:srgbClr val="C4C7C5"/>
+                      </a:solidFill>
+                      <a:prstDash val="solid"/>
+                      <a:round/>
+                      <a:headEnd type="none" w="med" len="med"/>
+                      <a:tailEnd type="none" w="med" len="med"/>
+                    </a:lnB>
+                    <a:noFill/>
+                  </a:tcPr>
+                </a:tc>
+                <a:tc>
+                  <a:txBody>
+                    <a:bodyPr/>
+                    <a:lstStyle/>
+                    <a:p>
+                      <a:pPr marL="0" marR="0" rtl="0">
+                        <a:spcAft>
+                          <a:spcPts val="2400"/>
+                        </a:spcAft>
+                        <a:buNone/>
+                      </a:pPr>
+                      <a:r>
+                        <a:rPr lang="en-US" b="1" dirty="0">
+                          <a:solidFill>
+                            <a:srgbClr val="1F1F1F"/>
+                          </a:solidFill>
+                          <a:effectLst/>
+                          <a:latin typeface="Google Sans Text"/>
+                        </a:rPr>
+                        <a:t>Research Paper</a:t>
+                      </a:r>
+                      <a:endParaRPr lang="en-IN" b="1" dirty="0">
+                        <a:solidFill>
+                          <a:srgbClr val="1F1F1F"/>
+                        </a:solidFill>
+                        <a:effectLst/>
+                        <a:latin typeface="Google Sans Text"/>
+                      </a:endParaRPr>
+                    </a:p>
+                  </a:txBody>
+                  <a:tcPr marT="60960" marB="60960" anchor="ctr">
+                    <a:lnL w="7620" cap="flat" cmpd="sng" algn="ctr">
+                      <a:solidFill>
+                        <a:srgbClr val="C4C7C5"/>
+                      </a:solidFill>
+                      <a:prstDash val="solid"/>
+                      <a:round/>
+                      <a:headEnd type="none" w="med" len="med"/>
+                      <a:tailEnd type="none" w="med" len="med"/>
+                    </a:lnL>
+                    <a:lnR w="7620" cap="flat" cmpd="sng" algn="ctr">
+                      <a:solidFill>
+                        <a:srgbClr val="C4C7C5"/>
+                      </a:solidFill>
+                      <a:prstDash val="solid"/>
+                      <a:round/>
+                      <a:headEnd type="none" w="med" len="med"/>
+                      <a:tailEnd type="none" w="med" len="med"/>
+                    </a:lnR>
+                    <a:lnT w="7620" cap="flat" cmpd="sng" algn="ctr">
+                      <a:solidFill>
+                        <a:srgbClr val="C4C7C5"/>
+                      </a:solidFill>
+                      <a:prstDash val="solid"/>
+                      <a:round/>
+                      <a:headEnd type="none" w="med" len="med"/>
+                      <a:tailEnd type="none" w="med" len="med"/>
+                    </a:lnT>
+                    <a:lnB w="7620" cap="flat" cmpd="sng" algn="ctr">
+                      <a:solidFill>
+                        <a:srgbClr val="C4C7C5"/>
+                      </a:solidFill>
+                      <a:prstDash val="solid"/>
+                      <a:round/>
+                      <a:headEnd type="none" w="med" len="med"/>
+                      <a:tailEnd type="none" w="med" len="med"/>
+                    </a:lnB>
+                    <a:noFill/>
+                  </a:tcPr>
+                </a:tc>
+                <a:tc>
+                  <a:txBody>
+                    <a:bodyPr/>
+                    <a:lstStyle/>
+                    <a:p>
+                      <a:pPr marL="0" marR="0" rtl="0">
+                        <a:spcAft>
+                          <a:spcPts val="2400"/>
+                        </a:spcAft>
+                        <a:buNone/>
+                      </a:pPr>
+                      <a:r>
+                        <a:rPr lang="en-IN" b="1" dirty="0">
+                          <a:solidFill>
+                            <a:srgbClr val="1F1F1F"/>
+                          </a:solidFill>
+                          <a:effectLst/>
+                          <a:latin typeface="Google Sans Text"/>
+                        </a:rPr>
+                        <a:t>Year</a:t>
+                      </a:r>
+                    </a:p>
+                  </a:txBody>
+                  <a:tcPr marT="60960" marB="60960" anchor="ctr">
+                    <a:lnL w="7620" cap="flat" cmpd="sng" algn="ctr">
+                      <a:solidFill>
+                        <a:srgbClr val="C4C7C5"/>
+                      </a:solidFill>
+                      <a:prstDash val="solid"/>
+                      <a:round/>
+                      <a:headEnd type="none" w="med" len="med"/>
+                      <a:tailEnd type="none" w="med" len="med"/>
+                    </a:lnL>
+                    <a:lnR w="7620" cap="flat" cmpd="sng" algn="ctr">
+                      <a:solidFill>
+                        <a:srgbClr val="C4C7C5"/>
+                      </a:solidFill>
+                      <a:prstDash val="solid"/>
+                      <a:round/>
+                      <a:headEnd type="none" w="med" len="med"/>
+                      <a:tailEnd type="none" w="med" len="med"/>
+                    </a:lnR>
+                    <a:lnT w="7620" cap="flat" cmpd="sng" algn="ctr">
+                      <a:solidFill>
+                        <a:srgbClr val="C4C7C5"/>
+                      </a:solidFill>
+                      <a:prstDash val="solid"/>
+                      <a:round/>
+                      <a:headEnd type="none" w="med" len="med"/>
+                      <a:tailEnd type="none" w="med" len="med"/>
+                    </a:lnT>
+                    <a:lnB w="7620" cap="flat" cmpd="sng" algn="ctr">
+                      <a:solidFill>
+                        <a:srgbClr val="C4C7C5"/>
+                      </a:solidFill>
+                      <a:prstDash val="solid"/>
+                      <a:round/>
+                      <a:headEnd type="none" w="med" len="med"/>
+                      <a:tailEnd type="none" w="med" len="med"/>
+                    </a:lnB>
+                    <a:noFill/>
+                  </a:tcPr>
+                </a:tc>
+                <a:tc>
+                  <a:txBody>
+                    <a:bodyPr/>
+                    <a:lstStyle/>
+                    <a:p>
+                      <a:pPr marL="0" marR="0" rtl="0">
+                        <a:spcAft>
+                          <a:spcPts val="2400"/>
+                        </a:spcAft>
+                        <a:buNone/>
+                      </a:pPr>
+                      <a:r>
+                        <a:rPr lang="en-IN" b="1" dirty="0">
+                          <a:solidFill>
+                            <a:srgbClr val="1F1F1F"/>
+                          </a:solidFill>
+                          <a:effectLst/>
+                          <a:latin typeface="Google Sans Text"/>
+                        </a:rPr>
+                        <a:t>Key Strength</a:t>
+                      </a:r>
+                    </a:p>
+                  </a:txBody>
+                  <a:tcPr marT="60960" marB="60960" anchor="ctr">
+                    <a:lnL w="7620" cap="flat" cmpd="sng" algn="ctr">
+                      <a:solidFill>
+                        <a:srgbClr val="C4C7C5"/>
+                      </a:solidFill>
+                      <a:prstDash val="solid"/>
+                      <a:round/>
+                      <a:headEnd type="none" w="med" len="med"/>
+                      <a:tailEnd type="none" w="med" len="med"/>
+                    </a:lnL>
+                    <a:lnR w="7620" cap="flat" cmpd="sng" algn="ctr">
+                      <a:solidFill>
+                        <a:srgbClr val="C4C7C5"/>
+                      </a:solidFill>
+                      <a:prstDash val="solid"/>
+                      <a:round/>
+                      <a:headEnd type="none" w="med" len="med"/>
+                      <a:tailEnd type="none" w="med" len="med"/>
+                    </a:lnR>
+                    <a:lnT w="7620" cap="flat" cmpd="sng" algn="ctr">
+                      <a:solidFill>
+                        <a:srgbClr val="C4C7C5"/>
+                      </a:solidFill>
+                      <a:prstDash val="solid"/>
+                      <a:round/>
+                      <a:headEnd type="none" w="med" len="med"/>
+                      <a:tailEnd type="none" w="med" len="med"/>
+                    </a:lnT>
+                    <a:lnB w="7620" cap="flat" cmpd="sng" algn="ctr">
+                      <a:solidFill>
+                        <a:srgbClr val="C4C7C5"/>
+                      </a:solidFill>
+                      <a:prstDash val="solid"/>
+                      <a:round/>
+                      <a:headEnd type="none" w="med" len="med"/>
+                      <a:tailEnd type="none" w="med" len="med"/>
+                    </a:lnB>
+                    <a:noFill/>
+                  </a:tcPr>
+                </a:tc>
+                <a:tc>
+                  <a:txBody>
+                    <a:bodyPr/>
+                    <a:lstStyle/>
+                    <a:p>
+                      <a:pPr marL="0" marR="0" rtl="0">
+                        <a:spcAft>
+                          <a:spcPts val="2400"/>
+                        </a:spcAft>
+                        <a:buNone/>
+                      </a:pPr>
+                      <a:r>
+                        <a:rPr lang="en-IN" b="1" dirty="0">
+                          <a:solidFill>
+                            <a:srgbClr val="1F1F1F"/>
+                          </a:solidFill>
+                          <a:effectLst/>
+                          <a:latin typeface="Google Sans Text"/>
+                        </a:rPr>
+                        <a:t>Main Limitation</a:t>
+                      </a:r>
+                    </a:p>
+                  </a:txBody>
+                  <a:tcPr marT="60960" marB="60960" anchor="ctr">
+                    <a:lnL w="7620" cap="flat" cmpd="sng" algn="ctr">
+                      <a:solidFill>
+                        <a:srgbClr val="C4C7C5"/>
+                      </a:solidFill>
+                      <a:prstDash val="solid"/>
+                      <a:round/>
+                      <a:headEnd type="none" w="med" len="med"/>
+                      <a:tailEnd type="none" w="med" len="med"/>
+                    </a:lnL>
+                    <a:lnR w="7620" cap="flat" cmpd="sng" algn="ctr">
+                      <a:solidFill>
+                        <a:srgbClr val="C4C7C5"/>
+                      </a:solidFill>
+                      <a:prstDash val="solid"/>
+                      <a:round/>
+                      <a:headEnd type="none" w="med" len="med"/>
+                      <a:tailEnd type="none" w="med" len="med"/>
+                    </a:lnR>
+                    <a:lnT w="7620" cap="flat" cmpd="sng" algn="ctr">
+                      <a:solidFill>
+                        <a:srgbClr val="C4C7C5"/>
+                      </a:solidFill>
+                      <a:prstDash val="solid"/>
+                      <a:round/>
+                      <a:headEnd type="none" w="med" len="med"/>
+                      <a:tailEnd type="none" w="med" len="med"/>
+                    </a:lnT>
+                    <a:lnB w="7620" cap="flat" cmpd="sng" algn="ctr">
+                      <a:solidFill>
+                        <a:srgbClr val="C4C7C5"/>
+                      </a:solidFill>
+                      <a:prstDash val="solid"/>
+                      <a:round/>
+                      <a:headEnd type="none" w="med" len="med"/>
+                      <a:tailEnd type="none" w="med" len="med"/>
+                    </a:lnB>
+                    <a:noFill/>
+                  </a:tcPr>
+                </a:tc>
+                <a:extLst>
+                  <a:ext uri="{0D108BD9-81ED-4DB2-BD59-A6C34878D82A}">
+                    <a16:rowId xmlns:a16="http://schemas.microsoft.com/office/drawing/2014/main" val="3040669093"/>
+                  </a:ext>
+                </a:extLst>
+              </a:tr>
+              <a:tr h="1011197">
+                <a:tc>
+                  <a:txBody>
+                    <a:bodyPr/>
+                    <a:lstStyle/>
+                    <a:p>
+                      <a:pPr marL="0" marR="0" rtl="0">
+                        <a:spcAft>
+                          <a:spcPts val="2400"/>
+                        </a:spcAft>
+                        <a:buNone/>
+                      </a:pPr>
+                      <a:r>
+                        <a:rPr lang="en-US" dirty="0">
+                          <a:solidFill>
+                            <a:srgbClr val="1F1F1F"/>
+                          </a:solidFill>
+                          <a:effectLst/>
+                          <a:latin typeface="Google Sans Text"/>
+                        </a:rPr>
+                        <a:t>6</a:t>
+                      </a:r>
+                      <a:endParaRPr lang="en-IN" dirty="0">
+                        <a:solidFill>
+                          <a:srgbClr val="1F1F1F"/>
+                        </a:solidFill>
+                        <a:effectLst/>
+                        <a:latin typeface="Google Sans Text"/>
+                      </a:endParaRPr>
+                    </a:p>
+                  </a:txBody>
+                  <a:tcPr marT="60960" marB="60960" anchor="ctr">
+                    <a:lnL w="7620" cap="flat" cmpd="sng" algn="ctr">
+                      <a:solidFill>
+                        <a:srgbClr val="C4C7C5"/>
+                      </a:solidFill>
+                      <a:prstDash val="solid"/>
+                      <a:round/>
+                      <a:headEnd type="none" w="med" len="med"/>
+                      <a:tailEnd type="none" w="med" len="med"/>
+                    </a:lnL>
+                    <a:lnR w="7620" cap="flat" cmpd="sng" algn="ctr">
+                      <a:solidFill>
+                        <a:srgbClr val="C4C7C5"/>
+                      </a:solidFill>
+                      <a:prstDash val="solid"/>
+                      <a:round/>
+                      <a:headEnd type="none" w="med" len="med"/>
+                      <a:tailEnd type="none" w="med" len="med"/>
+                    </a:lnR>
+                    <a:lnT w="7620" cap="flat" cmpd="sng" algn="ctr">
+                      <a:solidFill>
+                        <a:srgbClr val="C4C7C5"/>
+                      </a:solidFill>
+                      <a:prstDash val="solid"/>
+                      <a:round/>
+                      <a:headEnd type="none" w="med" len="med"/>
+                      <a:tailEnd type="none" w="med" len="med"/>
+                    </a:lnT>
+                    <a:lnB w="7620" cap="flat" cmpd="sng" algn="ctr">
+                      <a:solidFill>
+                        <a:srgbClr val="C4C7C5"/>
+                      </a:solidFill>
+                      <a:prstDash val="solid"/>
+                      <a:round/>
+                      <a:headEnd type="none" w="med" len="med"/>
+                      <a:tailEnd type="none" w="med" len="med"/>
+                    </a:lnB>
+                    <a:noFill/>
+                  </a:tcPr>
+                </a:tc>
+                <a:tc>
+                  <a:txBody>
+                    <a:bodyPr/>
+                    <a:lstStyle/>
+                    <a:p>
+                      <a:pPr marL="0" marR="0" rtl="0">
+                        <a:spcAft>
+                          <a:spcPts val="2400"/>
+                        </a:spcAft>
+                        <a:buNone/>
+                      </a:pPr>
+                      <a:r>
+                        <a:rPr lang="en-IN" dirty="0"/>
+                        <a:t>MedQuAD</a:t>
+                      </a:r>
+                      <a:endParaRPr lang="en-IN" dirty="0">
+                        <a:solidFill>
+                          <a:srgbClr val="1F1F1F"/>
+                        </a:solidFill>
+                        <a:effectLst/>
+                        <a:latin typeface="Google Sans Text"/>
+                      </a:endParaRPr>
+                    </a:p>
+                  </a:txBody>
+                  <a:tcPr marT="60960" marB="60960" anchor="ctr">
+                    <a:lnL w="7620" cap="flat" cmpd="sng" algn="ctr">
+                      <a:solidFill>
+                        <a:srgbClr val="C4C7C5"/>
+                      </a:solidFill>
+                      <a:prstDash val="solid"/>
+                      <a:round/>
+                      <a:headEnd type="none" w="med" len="med"/>
+                      <a:tailEnd type="none" w="med" len="med"/>
+                    </a:lnL>
+                    <a:lnR w="7620" cap="flat" cmpd="sng" algn="ctr">
+                      <a:solidFill>
+                        <a:srgbClr val="C4C7C5"/>
+                      </a:solidFill>
+                      <a:prstDash val="solid"/>
+                      <a:round/>
+                      <a:headEnd type="none" w="med" len="med"/>
+                      <a:tailEnd type="none" w="med" len="med"/>
+                    </a:lnR>
+                    <a:lnT w="7620" cap="flat" cmpd="sng" algn="ctr">
+                      <a:solidFill>
+                        <a:srgbClr val="C4C7C5"/>
+                      </a:solidFill>
+                      <a:prstDash val="solid"/>
+                      <a:round/>
+                      <a:headEnd type="none" w="med" len="med"/>
+                      <a:tailEnd type="none" w="med" len="med"/>
+                    </a:lnT>
+                    <a:lnB w="7620" cap="flat" cmpd="sng" algn="ctr">
+                      <a:solidFill>
+                        <a:srgbClr val="C4C7C5"/>
+                      </a:solidFill>
+                      <a:prstDash val="solid"/>
+                      <a:round/>
+                      <a:headEnd type="none" w="med" len="med"/>
+                      <a:tailEnd type="none" w="med" len="med"/>
+                    </a:lnB>
+                    <a:noFill/>
+                  </a:tcPr>
+                </a:tc>
+                <a:tc>
+                  <a:txBody>
+                    <a:bodyPr/>
+                    <a:lstStyle/>
+                    <a:p>
+                      <a:pPr marL="0" marR="0" rtl="0">
+                        <a:spcAft>
+                          <a:spcPts val="2400"/>
+                        </a:spcAft>
+                        <a:buNone/>
+                      </a:pPr>
+                      <a:r>
+                        <a:rPr lang="en-IN" b="0" dirty="0">
+                          <a:solidFill>
+                            <a:srgbClr val="1F1F1F"/>
+                          </a:solidFill>
+                          <a:effectLst/>
+                          <a:latin typeface="Google Sans Text"/>
+                        </a:rPr>
+                        <a:t>2019</a:t>
+                      </a:r>
+                    </a:p>
+                  </a:txBody>
+                  <a:tcPr marT="60960" marB="60960" anchor="ctr">
+                    <a:lnL w="7620" cap="flat" cmpd="sng" algn="ctr">
+                      <a:solidFill>
+                        <a:srgbClr val="C4C7C5"/>
+                      </a:solidFill>
+                      <a:prstDash val="solid"/>
+                      <a:round/>
+                      <a:headEnd type="none" w="med" len="med"/>
+                      <a:tailEnd type="none" w="med" len="med"/>
+                    </a:lnL>
+                    <a:lnR w="7620" cap="flat" cmpd="sng" algn="ctr">
+                      <a:solidFill>
+                        <a:srgbClr val="C4C7C5"/>
+                      </a:solidFill>
+                      <a:prstDash val="solid"/>
+                      <a:round/>
+                      <a:headEnd type="none" w="med" len="med"/>
+                      <a:tailEnd type="none" w="med" len="med"/>
+                    </a:lnR>
+                    <a:lnT w="7620" cap="flat" cmpd="sng" algn="ctr">
+                      <a:solidFill>
+                        <a:srgbClr val="C4C7C5"/>
+                      </a:solidFill>
+                      <a:prstDash val="solid"/>
+                      <a:round/>
+                      <a:headEnd type="none" w="med" len="med"/>
+                      <a:tailEnd type="none" w="med" len="med"/>
+                    </a:lnT>
+                    <a:lnB w="7620" cap="flat" cmpd="sng" algn="ctr">
+                      <a:solidFill>
+                        <a:srgbClr val="C4C7C5"/>
+                      </a:solidFill>
+                      <a:prstDash val="solid"/>
+                      <a:round/>
+                      <a:headEnd type="none" w="med" len="med"/>
+                      <a:tailEnd type="none" w="med" len="med"/>
+                    </a:lnB>
+                    <a:noFill/>
+                  </a:tcPr>
+                </a:tc>
+                <a:tc>
+                  <a:txBody>
+                    <a:bodyPr/>
+                    <a:lstStyle/>
+                    <a:p>
+                      <a:pPr marL="0" marR="0" rtl="0">
+                        <a:spcAft>
+                          <a:spcPts val="2400"/>
+                        </a:spcAft>
+                        <a:buNone/>
+                      </a:pPr>
+                      <a:r>
+                        <a:rPr lang="en-IN" dirty="0"/>
+                        <a:t>Dataset of 47k+ medical QA pairs from NIH websites.</a:t>
+                      </a:r>
+                      <a:endParaRPr lang="en-IN" dirty="0">
+                        <a:solidFill>
+                          <a:srgbClr val="1F1F1F"/>
+                        </a:solidFill>
+                        <a:effectLst/>
+                        <a:latin typeface="Google Sans Text"/>
+                      </a:endParaRPr>
+                    </a:p>
+                  </a:txBody>
+                  <a:tcPr marT="60960" marB="60960" anchor="ctr">
+                    <a:lnL w="7620" cap="flat" cmpd="sng" algn="ctr">
+                      <a:solidFill>
+                        <a:srgbClr val="C4C7C5"/>
+                      </a:solidFill>
+                      <a:prstDash val="solid"/>
+                      <a:round/>
+                      <a:headEnd type="none" w="med" len="med"/>
+                      <a:tailEnd type="none" w="med" len="med"/>
+                    </a:lnL>
+                    <a:lnR w="7620" cap="flat" cmpd="sng" algn="ctr">
+                      <a:solidFill>
+                        <a:srgbClr val="C4C7C5"/>
+                      </a:solidFill>
+                      <a:prstDash val="solid"/>
+                      <a:round/>
+                      <a:headEnd type="none" w="med" len="med"/>
+                      <a:tailEnd type="none" w="med" len="med"/>
+                    </a:lnR>
+                    <a:lnT w="7620" cap="flat" cmpd="sng" algn="ctr">
+                      <a:solidFill>
+                        <a:srgbClr val="C4C7C5"/>
+                      </a:solidFill>
+                      <a:prstDash val="solid"/>
+                      <a:round/>
+                      <a:headEnd type="none" w="med" len="med"/>
+                      <a:tailEnd type="none" w="med" len="med"/>
+                    </a:lnT>
+                    <a:lnB w="7620" cap="flat" cmpd="sng" algn="ctr">
+                      <a:solidFill>
+                        <a:srgbClr val="C4C7C5"/>
+                      </a:solidFill>
+                      <a:prstDash val="solid"/>
+                      <a:round/>
+                      <a:headEnd type="none" w="med" len="med"/>
+                      <a:tailEnd type="none" w="med" len="med"/>
+                    </a:lnB>
+                    <a:noFill/>
+                  </a:tcPr>
+                </a:tc>
+                <a:tc>
+                  <a:txBody>
+                    <a:bodyPr/>
+                    <a:lstStyle/>
+                    <a:p>
+                      <a:pPr marL="0" marR="0" rtl="0">
+                        <a:spcAft>
+                          <a:spcPts val="2400"/>
+                        </a:spcAft>
+                        <a:buNone/>
+                      </a:pPr>
+                      <a:r>
+                        <a:rPr lang="en-IN" dirty="0"/>
+                        <a:t>Lacks real-world electronic health record (EHR) clinical complexity.</a:t>
+                      </a:r>
+                      <a:endParaRPr lang="en-IN" dirty="0">
+                        <a:solidFill>
+                          <a:srgbClr val="1F1F1F"/>
+                        </a:solidFill>
+                        <a:effectLst/>
+                        <a:latin typeface="Google Sans Text"/>
+                      </a:endParaRPr>
+                    </a:p>
+                  </a:txBody>
+                  <a:tcPr marT="60960" marB="60960" anchor="ctr">
+                    <a:lnL w="7620" cap="flat" cmpd="sng" algn="ctr">
+                      <a:solidFill>
+                        <a:srgbClr val="C4C7C5"/>
+                      </a:solidFill>
+                      <a:prstDash val="solid"/>
+                      <a:round/>
+                      <a:headEnd type="none" w="med" len="med"/>
+                      <a:tailEnd type="none" w="med" len="med"/>
+                    </a:lnL>
+                    <a:lnR w="7620" cap="flat" cmpd="sng" algn="ctr">
+                      <a:solidFill>
+                        <a:srgbClr val="C4C7C5"/>
+                      </a:solidFill>
+                      <a:prstDash val="solid"/>
+                      <a:round/>
+                      <a:headEnd type="none" w="med" len="med"/>
+                      <a:tailEnd type="none" w="med" len="med"/>
+                    </a:lnR>
+                    <a:lnT w="7620" cap="flat" cmpd="sng" algn="ctr">
+                      <a:solidFill>
+                        <a:srgbClr val="C4C7C5"/>
+                      </a:solidFill>
+                      <a:prstDash val="solid"/>
+                      <a:round/>
+                      <a:headEnd type="none" w="med" len="med"/>
+                      <a:tailEnd type="none" w="med" len="med"/>
+                    </a:lnT>
+                    <a:lnB w="7620" cap="flat" cmpd="sng" algn="ctr">
+                      <a:solidFill>
+                        <a:srgbClr val="C4C7C5"/>
+                      </a:solidFill>
+                      <a:prstDash val="solid"/>
+                      <a:round/>
+                      <a:headEnd type="none" w="med" len="med"/>
+                      <a:tailEnd type="none" w="med" len="med"/>
+                    </a:lnB>
+                    <a:noFill/>
+                  </a:tcPr>
+                </a:tc>
+                <a:extLst>
+                  <a:ext uri="{0D108BD9-81ED-4DB2-BD59-A6C34878D82A}">
+                    <a16:rowId xmlns:a16="http://schemas.microsoft.com/office/drawing/2014/main" val="2218626283"/>
+                  </a:ext>
+                </a:extLst>
+              </a:tr>
+              <a:tr h="717625">
+                <a:tc>
+                  <a:txBody>
+                    <a:bodyPr/>
+                    <a:lstStyle/>
+                    <a:p>
+                      <a:pPr marL="0" marR="0" rtl="0">
+                        <a:spcAft>
+                          <a:spcPts val="2400"/>
+                        </a:spcAft>
+                        <a:buNone/>
+                      </a:pPr>
+                      <a:r>
+                        <a:rPr lang="en-US" dirty="0">
+                          <a:solidFill>
+                            <a:srgbClr val="1F1F1F"/>
+                          </a:solidFill>
+                          <a:effectLst/>
+                          <a:latin typeface="Google Sans Text"/>
+                        </a:rPr>
+                        <a:t>7</a:t>
+                      </a:r>
+                      <a:endParaRPr lang="en-IN" dirty="0">
+                        <a:solidFill>
+                          <a:srgbClr val="1F1F1F"/>
+                        </a:solidFill>
+                        <a:effectLst/>
+                        <a:latin typeface="Google Sans Text"/>
+                      </a:endParaRPr>
+                    </a:p>
+                  </a:txBody>
+                  <a:tcPr marT="60960" marB="60960" anchor="ctr">
+                    <a:lnL w="7620" cap="flat" cmpd="sng" algn="ctr">
+                      <a:solidFill>
+                        <a:srgbClr val="C4C7C5"/>
+                      </a:solidFill>
+                      <a:prstDash val="solid"/>
+                      <a:round/>
+                      <a:headEnd type="none" w="med" len="med"/>
+                      <a:tailEnd type="none" w="med" len="med"/>
+                    </a:lnL>
+                    <a:lnR w="7620" cap="flat" cmpd="sng" algn="ctr">
+                      <a:solidFill>
+                        <a:srgbClr val="C4C7C5"/>
+                      </a:solidFill>
+                      <a:prstDash val="solid"/>
+                      <a:round/>
+                      <a:headEnd type="none" w="med" len="med"/>
+                      <a:tailEnd type="none" w="med" len="med"/>
+                    </a:lnR>
+                    <a:lnT w="7620" cap="flat" cmpd="sng" algn="ctr">
+                      <a:solidFill>
+                        <a:srgbClr val="C4C7C5"/>
+                      </a:solidFill>
+                      <a:prstDash val="solid"/>
+                      <a:round/>
+                      <a:headEnd type="none" w="med" len="med"/>
+                      <a:tailEnd type="none" w="med" len="med"/>
+                    </a:lnT>
+                    <a:lnB w="7620" cap="flat" cmpd="sng" algn="ctr">
+                      <a:solidFill>
+                        <a:srgbClr val="C4C7C5"/>
+                      </a:solidFill>
+                      <a:prstDash val="solid"/>
+                      <a:round/>
+                      <a:headEnd type="none" w="med" len="med"/>
+                      <a:tailEnd type="none" w="med" len="med"/>
+                    </a:lnB>
+                    <a:noFill/>
+                  </a:tcPr>
+                </a:tc>
+                <a:tc>
+                  <a:txBody>
+                    <a:bodyPr/>
+                    <a:lstStyle/>
+                    <a:p>
+                      <a:pPr>
+                        <a:buNone/>
+                      </a:pPr>
+                      <a:r>
+                        <a:rPr lang="en-IN" b="0" dirty="0"/>
+                        <a:t>MIMIC-III Dataset</a:t>
+                      </a:r>
+                    </a:p>
+                  </a:txBody>
+                  <a:tcPr anchor="ctr">
+                    <a:lnL w="7620" cap="flat" cmpd="sng" algn="ctr">
+                      <a:solidFill>
+                        <a:srgbClr val="C4C7C5"/>
+                      </a:solidFill>
+                      <a:prstDash val="solid"/>
+                      <a:round/>
+                      <a:headEnd type="none" w="med" len="med"/>
+                      <a:tailEnd type="none" w="med" len="med"/>
+                    </a:lnL>
+                    <a:lnR w="7620" cap="flat" cmpd="sng" algn="ctr">
+                      <a:solidFill>
+                        <a:srgbClr val="C4C7C5"/>
+                      </a:solidFill>
+                      <a:prstDash val="solid"/>
+                      <a:round/>
+                      <a:headEnd type="none" w="med" len="med"/>
+                      <a:tailEnd type="none" w="med" len="med"/>
+                    </a:lnR>
+                    <a:lnT w="7620" cap="flat" cmpd="sng" algn="ctr">
+                      <a:solidFill>
+                        <a:srgbClr val="C4C7C5"/>
+                      </a:solidFill>
+                      <a:prstDash val="solid"/>
+                      <a:round/>
+                      <a:headEnd type="none" w="med" len="med"/>
+                      <a:tailEnd type="none" w="med" len="med"/>
+                    </a:lnT>
+                    <a:lnB w="7620" cap="flat" cmpd="sng" algn="ctr">
+                      <a:solidFill>
+                        <a:srgbClr val="C4C7C5"/>
+                      </a:solidFill>
+                      <a:prstDash val="solid"/>
+                      <a:round/>
+                      <a:headEnd type="none" w="med" len="med"/>
+                      <a:tailEnd type="none" w="med" len="med"/>
+                    </a:lnB>
+                    <a:noFill/>
+                  </a:tcPr>
+                </a:tc>
+                <a:tc>
+                  <a:txBody>
+                    <a:bodyPr/>
+                    <a:lstStyle/>
+                    <a:p>
+                      <a:pPr>
+                        <a:buNone/>
+                      </a:pPr>
+                      <a:r>
+                        <a:rPr lang="en-US" b="0" dirty="0"/>
+                        <a:t>2016</a:t>
+                      </a:r>
+                      <a:endParaRPr lang="en-IN" b="0" dirty="0"/>
+                    </a:p>
+                  </a:txBody>
+                  <a:tcPr anchor="ctr">
+                    <a:lnL w="7620" cap="flat" cmpd="sng" algn="ctr">
+                      <a:solidFill>
+                        <a:srgbClr val="C4C7C5"/>
+                      </a:solidFill>
+                      <a:prstDash val="solid"/>
+                      <a:round/>
+                      <a:headEnd type="none" w="med" len="med"/>
+                      <a:tailEnd type="none" w="med" len="med"/>
+                    </a:lnL>
+                    <a:lnR w="7620" cap="flat" cmpd="sng" algn="ctr">
+                      <a:solidFill>
+                        <a:srgbClr val="C4C7C5"/>
+                      </a:solidFill>
+                      <a:prstDash val="solid"/>
+                      <a:round/>
+                      <a:headEnd type="none" w="med" len="med"/>
+                      <a:tailEnd type="none" w="med" len="med"/>
+                    </a:lnR>
+                    <a:lnT w="7620" cap="flat" cmpd="sng" algn="ctr">
+                      <a:solidFill>
+                        <a:srgbClr val="C4C7C5"/>
+                      </a:solidFill>
+                      <a:prstDash val="solid"/>
+                      <a:round/>
+                      <a:headEnd type="none" w="med" len="med"/>
+                      <a:tailEnd type="none" w="med" len="med"/>
+                    </a:lnT>
+                    <a:lnB w="7620" cap="flat" cmpd="sng" algn="ctr">
+                      <a:solidFill>
+                        <a:srgbClr val="C4C7C5"/>
+                      </a:solidFill>
+                      <a:prstDash val="solid"/>
+                      <a:round/>
+                      <a:headEnd type="none" w="med" len="med"/>
+                      <a:tailEnd type="none" w="med" len="med"/>
+                    </a:lnB>
+                    <a:noFill/>
+                  </a:tcPr>
+                </a:tc>
+                <a:tc>
+                  <a:txBody>
+                    <a:bodyPr/>
+                    <a:lstStyle/>
+                    <a:p>
+                      <a:pPr marL="0" marR="0" rtl="0">
+                        <a:spcAft>
+                          <a:spcPts val="2400"/>
+                        </a:spcAft>
+                        <a:buNone/>
+                      </a:pPr>
+                      <a:r>
+                        <a:rPr lang="en-IN" dirty="0"/>
+                        <a:t>De-identified ICU clinical database widely used for benchmarks.</a:t>
+                      </a:r>
+                      <a:endParaRPr lang="en-IN" dirty="0">
+                        <a:solidFill>
+                          <a:srgbClr val="1F1F1F"/>
+                        </a:solidFill>
+                        <a:effectLst/>
+                        <a:latin typeface="Google Sans Text"/>
+                      </a:endParaRPr>
+                    </a:p>
+                  </a:txBody>
+                  <a:tcPr marT="60960" marB="60960" anchor="ctr">
+                    <a:lnL w="7620" cap="flat" cmpd="sng" algn="ctr">
+                      <a:solidFill>
+                        <a:srgbClr val="C4C7C5"/>
+                      </a:solidFill>
+                      <a:prstDash val="solid"/>
+                      <a:round/>
+                      <a:headEnd type="none" w="med" len="med"/>
+                      <a:tailEnd type="none" w="med" len="med"/>
+                    </a:lnL>
+                    <a:lnR w="7620" cap="flat" cmpd="sng" algn="ctr">
+                      <a:solidFill>
+                        <a:srgbClr val="C4C7C5"/>
+                      </a:solidFill>
+                      <a:prstDash val="solid"/>
+                      <a:round/>
+                      <a:headEnd type="none" w="med" len="med"/>
+                      <a:tailEnd type="none" w="med" len="med"/>
+                    </a:lnR>
+                    <a:lnT w="7620" cap="flat" cmpd="sng" algn="ctr">
+                      <a:solidFill>
+                        <a:srgbClr val="C4C7C5"/>
+                      </a:solidFill>
+                      <a:prstDash val="solid"/>
+                      <a:round/>
+                      <a:headEnd type="none" w="med" len="med"/>
+                      <a:tailEnd type="none" w="med" len="med"/>
+                    </a:lnT>
+                    <a:lnB w="7620" cap="flat" cmpd="sng" algn="ctr">
+                      <a:solidFill>
+                        <a:srgbClr val="C4C7C5"/>
+                      </a:solidFill>
+                      <a:prstDash val="solid"/>
+                      <a:round/>
+                      <a:headEnd type="none" w="med" len="med"/>
+                      <a:tailEnd type="none" w="med" len="med"/>
+                    </a:lnB>
+                    <a:noFill/>
+                  </a:tcPr>
+                </a:tc>
+                <a:tc>
+                  <a:txBody>
+                    <a:bodyPr/>
+                    <a:lstStyle/>
+                    <a:p>
+                      <a:pPr marL="0" marR="0" rtl="0">
+                        <a:spcAft>
+                          <a:spcPts val="2400"/>
+                        </a:spcAft>
+                        <a:buNone/>
+                      </a:pPr>
+                      <a:r>
+                        <a:rPr lang="en-IN" dirty="0"/>
+                        <a:t>Contains noisy, unstructured text and missing clinical values.</a:t>
+                      </a:r>
+                      <a:endParaRPr lang="en-IN" dirty="0">
+                        <a:solidFill>
+                          <a:srgbClr val="1F1F1F"/>
+                        </a:solidFill>
+                        <a:effectLst/>
+                        <a:latin typeface="Google Sans Text"/>
+                      </a:endParaRPr>
+                    </a:p>
+                  </a:txBody>
+                  <a:tcPr marT="60960" marB="60960" anchor="ctr">
+                    <a:lnL w="7620" cap="flat" cmpd="sng" algn="ctr">
+                      <a:solidFill>
+                        <a:srgbClr val="C4C7C5"/>
+                      </a:solidFill>
+                      <a:prstDash val="solid"/>
+                      <a:round/>
+                      <a:headEnd type="none" w="med" len="med"/>
+                      <a:tailEnd type="none" w="med" len="med"/>
+                    </a:lnL>
+                    <a:lnR w="7620" cap="flat" cmpd="sng" algn="ctr">
+                      <a:solidFill>
+                        <a:srgbClr val="C4C7C5"/>
+                      </a:solidFill>
+                      <a:prstDash val="solid"/>
+                      <a:round/>
+                      <a:headEnd type="none" w="med" len="med"/>
+                      <a:tailEnd type="none" w="med" len="med"/>
+                    </a:lnR>
+                    <a:lnT w="7620" cap="flat" cmpd="sng" algn="ctr">
+                      <a:solidFill>
+                        <a:srgbClr val="C4C7C5"/>
+                      </a:solidFill>
+                      <a:prstDash val="solid"/>
+                      <a:round/>
+                      <a:headEnd type="none" w="med" len="med"/>
+                      <a:tailEnd type="none" w="med" len="med"/>
+                    </a:lnT>
+                    <a:lnB w="7620" cap="flat" cmpd="sng" algn="ctr">
+                      <a:solidFill>
+                        <a:srgbClr val="C4C7C5"/>
+                      </a:solidFill>
+                      <a:prstDash val="solid"/>
+                      <a:round/>
+                      <a:headEnd type="none" w="med" len="med"/>
+                      <a:tailEnd type="none" w="med" len="med"/>
+                    </a:lnB>
+                    <a:noFill/>
+                  </a:tcPr>
+                </a:tc>
+                <a:extLst>
+                  <a:ext uri="{0D108BD9-81ED-4DB2-BD59-A6C34878D82A}">
+                    <a16:rowId xmlns:a16="http://schemas.microsoft.com/office/drawing/2014/main" val="2942291451"/>
+                  </a:ext>
+                </a:extLst>
+              </a:tr>
+              <a:tr h="717625">
+                <a:tc>
+                  <a:txBody>
+                    <a:bodyPr/>
+                    <a:lstStyle/>
+                    <a:p>
+                      <a:pPr marL="0" marR="0" rtl="0">
+                        <a:spcAft>
+                          <a:spcPts val="2400"/>
+                        </a:spcAft>
+                        <a:buNone/>
+                      </a:pPr>
+                      <a:r>
+                        <a:rPr lang="en-US" dirty="0">
+                          <a:solidFill>
+                            <a:srgbClr val="1F1F1F"/>
+                          </a:solidFill>
+                          <a:effectLst/>
+                          <a:latin typeface="Google Sans Text"/>
+                        </a:rPr>
+                        <a:t>8</a:t>
+                      </a:r>
+                      <a:endParaRPr lang="en-IN" dirty="0">
+                        <a:solidFill>
+                          <a:srgbClr val="1F1F1F"/>
+                        </a:solidFill>
+                        <a:effectLst/>
+                        <a:latin typeface="Google Sans Text"/>
+                      </a:endParaRPr>
+                    </a:p>
+                  </a:txBody>
+                  <a:tcPr marT="60960" marB="60960" anchor="ctr">
+                    <a:lnL w="7620" cap="flat" cmpd="sng" algn="ctr">
+                      <a:solidFill>
+                        <a:srgbClr val="C4C7C5"/>
+                      </a:solidFill>
+                      <a:prstDash val="solid"/>
+                      <a:round/>
+                      <a:headEnd type="none" w="med" len="med"/>
+                      <a:tailEnd type="none" w="med" len="med"/>
+                    </a:lnL>
+                    <a:lnR w="7620" cap="flat" cmpd="sng" algn="ctr">
+                      <a:solidFill>
+                        <a:srgbClr val="C4C7C5"/>
+                      </a:solidFill>
+                      <a:prstDash val="solid"/>
+                      <a:round/>
+                      <a:headEnd type="none" w="med" len="med"/>
+                      <a:tailEnd type="none" w="med" len="med"/>
+                    </a:lnR>
+                    <a:lnT w="7620" cap="flat" cmpd="sng" algn="ctr">
+                      <a:solidFill>
+                        <a:srgbClr val="C4C7C5"/>
+                      </a:solidFill>
+                      <a:prstDash val="solid"/>
+                      <a:round/>
+                      <a:headEnd type="none" w="med" len="med"/>
+                      <a:tailEnd type="none" w="med" len="med"/>
+                    </a:lnT>
+                    <a:lnB w="7620" cap="flat" cmpd="sng" algn="ctr">
+                      <a:solidFill>
+                        <a:srgbClr val="C4C7C5"/>
+                      </a:solidFill>
+                      <a:prstDash val="solid"/>
+                      <a:round/>
+                      <a:headEnd type="none" w="med" len="med"/>
+                      <a:tailEnd type="none" w="med" len="med"/>
+                    </a:lnB>
+                    <a:noFill/>
+                  </a:tcPr>
+                </a:tc>
+                <a:tc>
+                  <a:txBody>
+                    <a:bodyPr/>
+                    <a:lstStyle/>
+                    <a:p>
+                      <a:pPr marL="0" marR="0" rtl="0">
+                        <a:spcAft>
+                          <a:spcPts val="2400"/>
+                        </a:spcAft>
+                        <a:buNone/>
+                      </a:pPr>
+                      <a:r>
+                        <a:rPr lang="en-IN" dirty="0" err="1"/>
+                        <a:t>ChromaDB</a:t>
+                      </a:r>
+                      <a:endParaRPr lang="en-IN" dirty="0">
+                        <a:solidFill>
+                          <a:srgbClr val="1F1F1F"/>
+                        </a:solidFill>
+                        <a:effectLst/>
+                        <a:latin typeface="Google Sans Text"/>
+                      </a:endParaRPr>
+                    </a:p>
+                  </a:txBody>
+                  <a:tcPr marT="60960" marB="60960" anchor="ctr">
+                    <a:lnL w="7620" cap="flat" cmpd="sng" algn="ctr">
+                      <a:solidFill>
+                        <a:srgbClr val="C4C7C5"/>
+                      </a:solidFill>
+                      <a:prstDash val="solid"/>
+                      <a:round/>
+                      <a:headEnd type="none" w="med" len="med"/>
+                      <a:tailEnd type="none" w="med" len="med"/>
+                    </a:lnL>
+                    <a:lnR w="7620" cap="flat" cmpd="sng" algn="ctr">
+                      <a:solidFill>
+                        <a:srgbClr val="C4C7C5"/>
+                      </a:solidFill>
+                      <a:prstDash val="solid"/>
+                      <a:round/>
+                      <a:headEnd type="none" w="med" len="med"/>
+                      <a:tailEnd type="none" w="med" len="med"/>
+                    </a:lnR>
+                    <a:lnT w="7620" cap="flat" cmpd="sng" algn="ctr">
+                      <a:solidFill>
+                        <a:srgbClr val="C4C7C5"/>
+                      </a:solidFill>
+                      <a:prstDash val="solid"/>
+                      <a:round/>
+                      <a:headEnd type="none" w="med" len="med"/>
+                      <a:tailEnd type="none" w="med" len="med"/>
+                    </a:lnT>
+                    <a:lnB w="7620" cap="flat" cmpd="sng" algn="ctr">
+                      <a:solidFill>
+                        <a:srgbClr val="C4C7C5"/>
+                      </a:solidFill>
+                      <a:prstDash val="solid"/>
+                      <a:round/>
+                      <a:headEnd type="none" w="med" len="med"/>
+                      <a:tailEnd type="none" w="med" len="med"/>
+                    </a:lnB>
+                    <a:noFill/>
+                  </a:tcPr>
+                </a:tc>
+                <a:tc>
+                  <a:txBody>
+                    <a:bodyPr/>
+                    <a:lstStyle/>
+                    <a:p>
+                      <a:pPr marL="0" marR="0" rtl="0">
+                        <a:spcAft>
+                          <a:spcPts val="2400"/>
+                        </a:spcAft>
+                        <a:buNone/>
+                      </a:pPr>
+                      <a:r>
+                        <a:rPr lang="en-IN" b="0" dirty="0">
+                          <a:solidFill>
+                            <a:srgbClr val="1F1F1F"/>
+                          </a:solidFill>
+                          <a:effectLst/>
+                          <a:latin typeface="Google Sans Text"/>
+                        </a:rPr>
+                        <a:t>2023</a:t>
+                      </a:r>
+                    </a:p>
+                  </a:txBody>
+                  <a:tcPr marT="60960" marB="60960" anchor="ctr">
+                    <a:lnL w="7620" cap="flat" cmpd="sng" algn="ctr">
+                      <a:solidFill>
+                        <a:srgbClr val="C4C7C5"/>
+                      </a:solidFill>
+                      <a:prstDash val="solid"/>
+                      <a:round/>
+                      <a:headEnd type="none" w="med" len="med"/>
+                      <a:tailEnd type="none" w="med" len="med"/>
+                    </a:lnL>
+                    <a:lnR w="7620" cap="flat" cmpd="sng" algn="ctr">
+                      <a:solidFill>
+                        <a:srgbClr val="C4C7C5"/>
+                      </a:solidFill>
+                      <a:prstDash val="solid"/>
+                      <a:round/>
+                      <a:headEnd type="none" w="med" len="med"/>
+                      <a:tailEnd type="none" w="med" len="med"/>
+                    </a:lnR>
+                    <a:lnT w="7620" cap="flat" cmpd="sng" algn="ctr">
+                      <a:solidFill>
+                        <a:srgbClr val="C4C7C5"/>
+                      </a:solidFill>
+                      <a:prstDash val="solid"/>
+                      <a:round/>
+                      <a:headEnd type="none" w="med" len="med"/>
+                      <a:tailEnd type="none" w="med" len="med"/>
+                    </a:lnT>
+                    <a:lnB w="7620" cap="flat" cmpd="sng" algn="ctr">
+                      <a:solidFill>
+                        <a:srgbClr val="C4C7C5"/>
+                      </a:solidFill>
+                      <a:prstDash val="solid"/>
+                      <a:round/>
+                      <a:headEnd type="none" w="med" len="med"/>
+                      <a:tailEnd type="none" w="med" len="med"/>
+                    </a:lnB>
+                    <a:noFill/>
+                  </a:tcPr>
+                </a:tc>
+                <a:tc>
+                  <a:txBody>
+                    <a:bodyPr/>
+                    <a:lstStyle/>
+                    <a:p>
+                      <a:pPr marL="0" marR="0" rtl="0">
+                        <a:spcAft>
+                          <a:spcPts val="2400"/>
+                        </a:spcAft>
+                        <a:buNone/>
+                      </a:pPr>
+                      <a:r>
+                        <a:rPr lang="en-IN" dirty="0"/>
+                        <a:t>Lightweight, open-source vector database for similarity search.</a:t>
+                      </a:r>
+                      <a:endParaRPr lang="en-IN" dirty="0">
+                        <a:solidFill>
+                          <a:srgbClr val="1F1F1F"/>
+                        </a:solidFill>
+                        <a:effectLst/>
+                        <a:latin typeface="Google Sans Text"/>
+                      </a:endParaRPr>
+                    </a:p>
+                  </a:txBody>
+                  <a:tcPr marT="60960" marB="60960" anchor="ctr">
+                    <a:lnL w="7620" cap="flat" cmpd="sng" algn="ctr">
+                      <a:solidFill>
+                        <a:srgbClr val="C4C7C5"/>
+                      </a:solidFill>
+                      <a:prstDash val="solid"/>
+                      <a:round/>
+                      <a:headEnd type="none" w="med" len="med"/>
+                      <a:tailEnd type="none" w="med" len="med"/>
+                    </a:lnL>
+                    <a:lnR w="7620" cap="flat" cmpd="sng" algn="ctr">
+                      <a:solidFill>
+                        <a:srgbClr val="C4C7C5"/>
+                      </a:solidFill>
+                      <a:prstDash val="solid"/>
+                      <a:round/>
+                      <a:headEnd type="none" w="med" len="med"/>
+                      <a:tailEnd type="none" w="med" len="med"/>
+                    </a:lnR>
+                    <a:lnT w="7620" cap="flat" cmpd="sng" algn="ctr">
+                      <a:solidFill>
+                        <a:srgbClr val="C4C7C5"/>
+                      </a:solidFill>
+                      <a:prstDash val="solid"/>
+                      <a:round/>
+                      <a:headEnd type="none" w="med" len="med"/>
+                      <a:tailEnd type="none" w="med" len="med"/>
+                    </a:lnT>
+                    <a:lnB w="7620" cap="flat" cmpd="sng" algn="ctr">
+                      <a:solidFill>
+                        <a:srgbClr val="C4C7C5"/>
+                      </a:solidFill>
+                      <a:prstDash val="solid"/>
+                      <a:round/>
+                      <a:headEnd type="none" w="med" len="med"/>
+                      <a:tailEnd type="none" w="med" len="med"/>
+                    </a:lnB>
+                    <a:noFill/>
+                  </a:tcPr>
+                </a:tc>
+                <a:tc>
+                  <a:txBody>
+                    <a:bodyPr/>
+                    <a:lstStyle/>
+                    <a:p>
+                      <a:pPr marL="0" marR="0" rtl="0">
+                        <a:spcAft>
+                          <a:spcPts val="2400"/>
+                        </a:spcAft>
+                        <a:buNone/>
+                      </a:pPr>
+                      <a:r>
+                        <a:rPr lang="en-IN" dirty="0"/>
+                        <a:t>Can face scalability issues with massive enterprise data.</a:t>
+                      </a:r>
+                      <a:endParaRPr lang="en-IN" dirty="0">
+                        <a:solidFill>
+                          <a:srgbClr val="1F1F1F"/>
+                        </a:solidFill>
+                        <a:effectLst/>
+                        <a:latin typeface="Google Sans Text"/>
+                      </a:endParaRPr>
+                    </a:p>
+                  </a:txBody>
+                  <a:tcPr marT="60960" marB="60960" anchor="ctr">
+                    <a:lnL w="7620" cap="flat" cmpd="sng" algn="ctr">
+                      <a:solidFill>
+                        <a:srgbClr val="C4C7C5"/>
+                      </a:solidFill>
+                      <a:prstDash val="solid"/>
+                      <a:round/>
+                      <a:headEnd type="none" w="med" len="med"/>
+                      <a:tailEnd type="none" w="med" len="med"/>
+                    </a:lnL>
+                    <a:lnR w="7620" cap="flat" cmpd="sng" algn="ctr">
+                      <a:solidFill>
+                        <a:srgbClr val="C4C7C5"/>
+                      </a:solidFill>
+                      <a:prstDash val="solid"/>
+                      <a:round/>
+                      <a:headEnd type="none" w="med" len="med"/>
+                      <a:tailEnd type="none" w="med" len="med"/>
+                    </a:lnR>
+                    <a:lnT w="7620" cap="flat" cmpd="sng" algn="ctr">
+                      <a:solidFill>
+                        <a:srgbClr val="C4C7C5"/>
+                      </a:solidFill>
+                      <a:prstDash val="solid"/>
+                      <a:round/>
+                      <a:headEnd type="none" w="med" len="med"/>
+                      <a:tailEnd type="none" w="med" len="med"/>
+                    </a:lnT>
+                    <a:lnB w="7620" cap="flat" cmpd="sng" algn="ctr">
+                      <a:solidFill>
+                        <a:srgbClr val="C4C7C5"/>
+                      </a:solidFill>
+                      <a:prstDash val="solid"/>
+                      <a:round/>
+                      <a:headEnd type="none" w="med" len="med"/>
+                      <a:tailEnd type="none" w="med" len="med"/>
+                    </a:lnB>
+                    <a:noFill/>
+                  </a:tcPr>
+                </a:tc>
+                <a:extLst>
+                  <a:ext uri="{0D108BD9-81ED-4DB2-BD59-A6C34878D82A}">
+                    <a16:rowId xmlns:a16="http://schemas.microsoft.com/office/drawing/2014/main" val="512742220"/>
+                  </a:ext>
+                </a:extLst>
+              </a:tr>
+              <a:tr h="717625">
+                <a:tc>
+                  <a:txBody>
+                    <a:bodyPr/>
+                    <a:lstStyle/>
+                    <a:p>
+                      <a:pPr marL="0" marR="0" rtl="0">
+                        <a:spcAft>
+                          <a:spcPts val="2400"/>
+                        </a:spcAft>
+                        <a:buNone/>
+                      </a:pPr>
+                      <a:r>
+                        <a:rPr lang="en-US" dirty="0">
+                          <a:solidFill>
+                            <a:srgbClr val="1F1F1F"/>
+                          </a:solidFill>
+                          <a:effectLst/>
+                          <a:latin typeface="Google Sans Text"/>
+                        </a:rPr>
+                        <a:t>9</a:t>
+                      </a:r>
+                      <a:endParaRPr lang="en-IN" dirty="0">
+                        <a:solidFill>
+                          <a:srgbClr val="1F1F1F"/>
+                        </a:solidFill>
+                        <a:effectLst/>
+                        <a:latin typeface="Google Sans Text"/>
+                      </a:endParaRPr>
+                    </a:p>
+                  </a:txBody>
+                  <a:tcPr marT="60960" marB="60960" anchor="ctr">
+                    <a:lnL w="7620" cap="flat" cmpd="sng" algn="ctr">
+                      <a:solidFill>
+                        <a:srgbClr val="C4C7C5"/>
+                      </a:solidFill>
+                      <a:prstDash val="solid"/>
+                      <a:round/>
+                      <a:headEnd type="none" w="med" len="med"/>
+                      <a:tailEnd type="none" w="med" len="med"/>
+                    </a:lnL>
+                    <a:lnR w="7620" cap="flat" cmpd="sng" algn="ctr">
+                      <a:solidFill>
+                        <a:srgbClr val="C4C7C5"/>
+                      </a:solidFill>
+                      <a:prstDash val="solid"/>
+                      <a:round/>
+                      <a:headEnd type="none" w="med" len="med"/>
+                      <a:tailEnd type="none" w="med" len="med"/>
+                    </a:lnR>
+                    <a:lnT w="7620" cap="flat" cmpd="sng" algn="ctr">
+                      <a:solidFill>
+                        <a:srgbClr val="C4C7C5"/>
+                      </a:solidFill>
+                      <a:prstDash val="solid"/>
+                      <a:round/>
+                      <a:headEnd type="none" w="med" len="med"/>
+                      <a:tailEnd type="none" w="med" len="med"/>
+                    </a:lnT>
+                    <a:lnB w="7620" cap="flat" cmpd="sng" algn="ctr">
+                      <a:solidFill>
+                        <a:srgbClr val="C4C7C5"/>
+                      </a:solidFill>
+                      <a:prstDash val="solid"/>
+                      <a:round/>
+                      <a:headEnd type="none" w="med" len="med"/>
+                      <a:tailEnd type="none" w="med" len="med"/>
+                    </a:lnB>
+                    <a:noFill/>
+                  </a:tcPr>
+                </a:tc>
+                <a:tc>
+                  <a:txBody>
+                    <a:bodyPr/>
+                    <a:lstStyle/>
+                    <a:p>
+                      <a:pPr marL="0" marR="0" rtl="0">
+                        <a:spcAft>
+                          <a:spcPts val="2400"/>
+                        </a:spcAft>
+                        <a:buNone/>
+                      </a:pPr>
+                      <a:r>
+                        <a:rPr lang="en-IN" dirty="0"/>
+                        <a:t>Llama 3 (8B)</a:t>
+                      </a:r>
+                      <a:endParaRPr lang="en-IN" dirty="0">
+                        <a:solidFill>
+                          <a:srgbClr val="1F1F1F"/>
+                        </a:solidFill>
+                        <a:effectLst/>
+                        <a:latin typeface="Google Sans Text"/>
+                      </a:endParaRPr>
+                    </a:p>
+                  </a:txBody>
+                  <a:tcPr marT="60960" marB="60960" anchor="ctr">
+                    <a:lnL w="7620" cap="flat" cmpd="sng" algn="ctr">
+                      <a:solidFill>
+                        <a:srgbClr val="C4C7C5"/>
+                      </a:solidFill>
+                      <a:prstDash val="solid"/>
+                      <a:round/>
+                      <a:headEnd type="none" w="med" len="med"/>
+                      <a:tailEnd type="none" w="med" len="med"/>
+                    </a:lnL>
+                    <a:lnR w="7620" cap="flat" cmpd="sng" algn="ctr">
+                      <a:solidFill>
+                        <a:srgbClr val="C4C7C5"/>
+                      </a:solidFill>
+                      <a:prstDash val="solid"/>
+                      <a:round/>
+                      <a:headEnd type="none" w="med" len="med"/>
+                      <a:tailEnd type="none" w="med" len="med"/>
+                    </a:lnR>
+                    <a:lnT w="7620" cap="flat" cmpd="sng" algn="ctr">
+                      <a:solidFill>
+                        <a:srgbClr val="C4C7C5"/>
+                      </a:solidFill>
+                      <a:prstDash val="solid"/>
+                      <a:round/>
+                      <a:headEnd type="none" w="med" len="med"/>
+                      <a:tailEnd type="none" w="med" len="med"/>
+                    </a:lnT>
+                    <a:lnB w="7620" cap="flat" cmpd="sng" algn="ctr">
+                      <a:solidFill>
+                        <a:srgbClr val="C4C7C5"/>
+                      </a:solidFill>
+                      <a:prstDash val="solid"/>
+                      <a:round/>
+                      <a:headEnd type="none" w="med" len="med"/>
+                      <a:tailEnd type="none" w="med" len="med"/>
+                    </a:lnB>
+                    <a:noFill/>
+                  </a:tcPr>
+                </a:tc>
+                <a:tc>
+                  <a:txBody>
+                    <a:bodyPr/>
+                    <a:lstStyle/>
+                    <a:p>
+                      <a:pPr marL="0" marR="0" rtl="0">
+                        <a:spcAft>
+                          <a:spcPts val="2400"/>
+                        </a:spcAft>
+                        <a:buNone/>
+                      </a:pPr>
+                      <a:r>
+                        <a:rPr lang="en-IN" b="0" dirty="0">
+                          <a:solidFill>
+                            <a:srgbClr val="1F1F1F"/>
+                          </a:solidFill>
+                          <a:effectLst/>
+                          <a:latin typeface="Google Sans Text"/>
+                        </a:rPr>
+                        <a:t>2024</a:t>
+                      </a:r>
+                    </a:p>
+                  </a:txBody>
+                  <a:tcPr marT="60960" marB="60960" anchor="ctr">
+                    <a:lnL w="7620" cap="flat" cmpd="sng" algn="ctr">
+                      <a:solidFill>
+                        <a:srgbClr val="C4C7C5"/>
+                      </a:solidFill>
+                      <a:prstDash val="solid"/>
+                      <a:round/>
+                      <a:headEnd type="none" w="med" len="med"/>
+                      <a:tailEnd type="none" w="med" len="med"/>
+                    </a:lnL>
+                    <a:lnR w="7620" cap="flat" cmpd="sng" algn="ctr">
+                      <a:solidFill>
+                        <a:srgbClr val="C4C7C5"/>
+                      </a:solidFill>
+                      <a:prstDash val="solid"/>
+                      <a:round/>
+                      <a:headEnd type="none" w="med" len="med"/>
+                      <a:tailEnd type="none" w="med" len="med"/>
+                    </a:lnR>
+                    <a:lnT w="7620" cap="flat" cmpd="sng" algn="ctr">
+                      <a:solidFill>
+                        <a:srgbClr val="C4C7C5"/>
+                      </a:solidFill>
+                      <a:prstDash val="solid"/>
+                      <a:round/>
+                      <a:headEnd type="none" w="med" len="med"/>
+                      <a:tailEnd type="none" w="med" len="med"/>
+                    </a:lnT>
+                    <a:lnB w="7620" cap="flat" cmpd="sng" algn="ctr">
+                      <a:solidFill>
+                        <a:srgbClr val="C4C7C5"/>
+                      </a:solidFill>
+                      <a:prstDash val="solid"/>
+                      <a:round/>
+                      <a:headEnd type="none" w="med" len="med"/>
+                      <a:tailEnd type="none" w="med" len="med"/>
+                    </a:lnB>
+                    <a:noFill/>
+                  </a:tcPr>
+                </a:tc>
+                <a:tc>
+                  <a:txBody>
+                    <a:bodyPr/>
+                    <a:lstStyle/>
+                    <a:p>
+                      <a:pPr marL="0" marR="0" rtl="0">
+                        <a:spcAft>
+                          <a:spcPts val="2400"/>
+                        </a:spcAft>
+                        <a:buNone/>
+                      </a:pPr>
+                      <a:r>
+                        <a:rPr lang="en-IN" dirty="0"/>
+                        <a:t>State-of-the-art open-weight 8-billion parameter LLM.</a:t>
+                      </a:r>
+                      <a:endParaRPr lang="en-IN" b="0" dirty="0">
+                        <a:solidFill>
+                          <a:srgbClr val="1F1F1F"/>
+                        </a:solidFill>
+                        <a:effectLst/>
+                        <a:latin typeface="Google Sans Text"/>
+                      </a:endParaRPr>
+                    </a:p>
+                  </a:txBody>
+                  <a:tcPr marT="60960" marB="60960" anchor="ctr">
+                    <a:lnL w="7620" cap="flat" cmpd="sng" algn="ctr">
+                      <a:solidFill>
+                        <a:srgbClr val="C4C7C5"/>
+                      </a:solidFill>
+                      <a:prstDash val="solid"/>
+                      <a:round/>
+                      <a:headEnd type="none" w="med" len="med"/>
+                      <a:tailEnd type="none" w="med" len="med"/>
+                    </a:lnL>
+                    <a:lnR w="7620" cap="flat" cmpd="sng" algn="ctr">
+                      <a:solidFill>
+                        <a:srgbClr val="C4C7C5"/>
+                      </a:solidFill>
+                      <a:prstDash val="solid"/>
+                      <a:round/>
+                      <a:headEnd type="none" w="med" len="med"/>
+                      <a:tailEnd type="none" w="med" len="med"/>
+                    </a:lnR>
+                    <a:lnT w="7620" cap="flat" cmpd="sng" algn="ctr">
+                      <a:solidFill>
+                        <a:srgbClr val="C4C7C5"/>
+                      </a:solidFill>
+                      <a:prstDash val="solid"/>
+                      <a:round/>
+                      <a:headEnd type="none" w="med" len="med"/>
+                      <a:tailEnd type="none" w="med" len="med"/>
+                    </a:lnT>
+                    <a:lnB w="7620" cap="flat" cmpd="sng" algn="ctr">
+                      <a:solidFill>
+                        <a:srgbClr val="C4C7C5"/>
+                      </a:solidFill>
+                      <a:prstDash val="solid"/>
+                      <a:round/>
+                      <a:headEnd type="none" w="med" len="med"/>
+                      <a:tailEnd type="none" w="med" len="med"/>
+                    </a:lnB>
+                    <a:noFill/>
+                  </a:tcPr>
+                </a:tc>
+                <a:tc>
+                  <a:txBody>
+                    <a:bodyPr/>
+                    <a:lstStyle/>
+                    <a:p>
+                      <a:pPr marL="0" marR="0" rtl="0">
+                        <a:spcAft>
+                          <a:spcPts val="2400"/>
+                        </a:spcAft>
+                        <a:buNone/>
+                      </a:pPr>
+                      <a:r>
+                        <a:rPr lang="en-IN" dirty="0"/>
+                        <a:t>Risk of hallucinations without grounding in external medical databases.</a:t>
+                      </a:r>
+                      <a:endParaRPr lang="en-IN" b="0" dirty="0">
+                        <a:solidFill>
+                          <a:srgbClr val="1F1F1F"/>
+                        </a:solidFill>
+                        <a:effectLst/>
+                        <a:latin typeface="Google Sans Text"/>
+                      </a:endParaRPr>
+                    </a:p>
+                  </a:txBody>
+                  <a:tcPr marT="60960" marB="60960" anchor="ctr">
+                    <a:lnL w="7620" cap="flat" cmpd="sng" algn="ctr">
+                      <a:solidFill>
+                        <a:srgbClr val="C4C7C5"/>
+                      </a:solidFill>
+                      <a:prstDash val="solid"/>
+                      <a:round/>
+                      <a:headEnd type="none" w="med" len="med"/>
+                      <a:tailEnd type="none" w="med" len="med"/>
+                    </a:lnL>
+                    <a:lnR w="7620" cap="flat" cmpd="sng" algn="ctr">
+                      <a:solidFill>
+                        <a:srgbClr val="C4C7C5"/>
+                      </a:solidFill>
+                      <a:prstDash val="solid"/>
+                      <a:round/>
+                      <a:headEnd type="none" w="med" len="med"/>
+                      <a:tailEnd type="none" w="med" len="med"/>
+                    </a:lnR>
+                    <a:lnT w="7620" cap="flat" cmpd="sng" algn="ctr">
+                      <a:solidFill>
+                        <a:srgbClr val="C4C7C5"/>
+                      </a:solidFill>
+                      <a:prstDash val="solid"/>
+                      <a:round/>
+                      <a:headEnd type="none" w="med" len="med"/>
+                      <a:tailEnd type="none" w="med" len="med"/>
+                    </a:lnT>
+                    <a:lnB w="7620" cap="flat" cmpd="sng" algn="ctr">
+                      <a:solidFill>
+                        <a:srgbClr val="C4C7C5"/>
+                      </a:solidFill>
+                      <a:prstDash val="solid"/>
+                      <a:round/>
+                      <a:headEnd type="none" w="med" len="med"/>
+                      <a:tailEnd type="none" w="med" len="med"/>
+                    </a:lnB>
+                    <a:noFill/>
+                  </a:tcPr>
+                </a:tc>
+                <a:extLst>
+                  <a:ext uri="{0D108BD9-81ED-4DB2-BD59-A6C34878D82A}">
+                    <a16:rowId xmlns:a16="http://schemas.microsoft.com/office/drawing/2014/main" val="2725248536"/>
+                  </a:ext>
+                </a:extLst>
+              </a:tr>
+              <a:tr h="717625">
+                <a:tc>
+                  <a:txBody>
+                    <a:bodyPr/>
+                    <a:lstStyle/>
+                    <a:p>
+                      <a:pPr marL="0" marR="0" rtl="0">
+                        <a:spcAft>
+                          <a:spcPts val="2400"/>
+                        </a:spcAft>
+                        <a:buNone/>
+                      </a:pPr>
+                      <a:r>
+                        <a:rPr lang="en-US" dirty="0">
+                          <a:solidFill>
+                            <a:srgbClr val="1F1F1F"/>
+                          </a:solidFill>
+                          <a:effectLst/>
+                          <a:latin typeface="Google Sans Text"/>
+                        </a:rPr>
+                        <a:t>10</a:t>
+                      </a:r>
+                      <a:endParaRPr lang="en-IN" dirty="0">
+                        <a:solidFill>
+                          <a:srgbClr val="1F1F1F"/>
+                        </a:solidFill>
+                        <a:effectLst/>
+                        <a:latin typeface="Google Sans Text"/>
+                      </a:endParaRPr>
+                    </a:p>
+                  </a:txBody>
+                  <a:tcPr marT="60960" marB="60960" anchor="ctr">
+                    <a:lnL w="7620" cap="flat" cmpd="sng" algn="ctr">
+                      <a:solidFill>
+                        <a:srgbClr val="C4C7C5"/>
+                      </a:solidFill>
+                      <a:prstDash val="solid"/>
+                      <a:round/>
+                      <a:headEnd type="none" w="med" len="med"/>
+                      <a:tailEnd type="none" w="med" len="med"/>
+                    </a:lnL>
+                    <a:lnR w="7620" cap="flat" cmpd="sng" algn="ctr">
+                      <a:solidFill>
+                        <a:srgbClr val="C4C7C5"/>
+                      </a:solidFill>
+                      <a:prstDash val="solid"/>
+                      <a:round/>
+                      <a:headEnd type="none" w="med" len="med"/>
+                      <a:tailEnd type="none" w="med" len="med"/>
+                    </a:lnR>
+                    <a:lnT w="7620" cap="flat" cmpd="sng" algn="ctr">
+                      <a:solidFill>
+                        <a:srgbClr val="C4C7C5"/>
+                      </a:solidFill>
+                      <a:prstDash val="solid"/>
+                      <a:round/>
+                      <a:headEnd type="none" w="med" len="med"/>
+                      <a:tailEnd type="none" w="med" len="med"/>
+                    </a:lnT>
+                    <a:lnB w="7620" cap="flat" cmpd="sng" algn="ctr">
+                      <a:solidFill>
+                        <a:srgbClr val="C4C7C5"/>
+                      </a:solidFill>
+                      <a:prstDash val="solid"/>
+                      <a:round/>
+                      <a:headEnd type="none" w="med" len="med"/>
+                      <a:tailEnd type="none" w="med" len="med"/>
+                    </a:lnB>
+                    <a:noFill/>
+                  </a:tcPr>
+                </a:tc>
+                <a:tc>
+                  <a:txBody>
+                    <a:bodyPr/>
+                    <a:lstStyle/>
+                    <a:p>
+                      <a:pPr marL="0" marR="0" rtl="0">
+                        <a:spcAft>
+                          <a:spcPts val="2400"/>
+                        </a:spcAft>
+                        <a:buNone/>
+                      </a:pPr>
+                      <a:r>
+                        <a:rPr lang="en-IN" b="1" dirty="0" err="1"/>
+                        <a:t>ClinicaRAG</a:t>
+                      </a:r>
+                      <a:r>
+                        <a:rPr lang="en-IN" dirty="0"/>
+                        <a:t> </a:t>
+                      </a:r>
+                      <a:r>
+                        <a:rPr lang="en-IN" i="1" dirty="0"/>
+                        <a:t>(Ours)</a:t>
+                      </a:r>
+                      <a:endParaRPr lang="en-IN" dirty="0">
+                        <a:solidFill>
+                          <a:srgbClr val="1F1F1F"/>
+                        </a:solidFill>
+                        <a:effectLst/>
+                        <a:latin typeface="Google Sans Text"/>
+                      </a:endParaRPr>
+                    </a:p>
+                  </a:txBody>
+                  <a:tcPr marT="60960" marB="60960" anchor="ctr">
+                    <a:lnL w="7620" cap="flat" cmpd="sng" algn="ctr">
+                      <a:solidFill>
+                        <a:srgbClr val="C4C7C5"/>
+                      </a:solidFill>
+                      <a:prstDash val="solid"/>
+                      <a:round/>
+                      <a:headEnd type="none" w="med" len="med"/>
+                      <a:tailEnd type="none" w="med" len="med"/>
+                    </a:lnL>
+                    <a:lnR w="7620" cap="flat" cmpd="sng" algn="ctr">
+                      <a:solidFill>
+                        <a:srgbClr val="C4C7C5"/>
+                      </a:solidFill>
+                      <a:prstDash val="solid"/>
+                      <a:round/>
+                      <a:headEnd type="none" w="med" len="med"/>
+                      <a:tailEnd type="none" w="med" len="med"/>
+                    </a:lnR>
+                    <a:lnT w="7620" cap="flat" cmpd="sng" algn="ctr">
+                      <a:solidFill>
+                        <a:srgbClr val="C4C7C5"/>
+                      </a:solidFill>
+                      <a:prstDash val="solid"/>
+                      <a:round/>
+                      <a:headEnd type="none" w="med" len="med"/>
+                      <a:tailEnd type="none" w="med" len="med"/>
+                    </a:lnT>
+                    <a:lnB w="7620" cap="flat" cmpd="sng" algn="ctr">
+                      <a:solidFill>
+                        <a:srgbClr val="C4C7C5"/>
+                      </a:solidFill>
+                      <a:prstDash val="solid"/>
+                      <a:round/>
+                      <a:headEnd type="none" w="med" len="med"/>
+                      <a:tailEnd type="none" w="med" len="med"/>
+                    </a:lnB>
+                    <a:noFill/>
+                  </a:tcPr>
+                </a:tc>
+                <a:tc>
+                  <a:txBody>
+                    <a:bodyPr/>
+                    <a:lstStyle/>
+                    <a:p>
+                      <a:pPr marL="0" marR="0" rtl="0">
+                        <a:spcAft>
+                          <a:spcPts val="2400"/>
+                        </a:spcAft>
+                        <a:buNone/>
+                      </a:pPr>
+                      <a:r>
+                        <a:rPr lang="en-US" b="0" dirty="0">
+                          <a:solidFill>
+                            <a:srgbClr val="1F1F1F"/>
+                          </a:solidFill>
+                          <a:effectLst/>
+                          <a:latin typeface="Google Sans Text"/>
+                        </a:rPr>
+                        <a:t>2026</a:t>
+                      </a:r>
+                      <a:endParaRPr lang="en-IN" b="0" dirty="0">
+                        <a:solidFill>
+                          <a:srgbClr val="1F1F1F"/>
+                        </a:solidFill>
+                        <a:effectLst/>
+                        <a:latin typeface="Google Sans Text"/>
+                      </a:endParaRPr>
+                    </a:p>
+                  </a:txBody>
+                  <a:tcPr marT="60960" marB="60960" anchor="ctr">
+                    <a:lnL w="7620" cap="flat" cmpd="sng" algn="ctr">
+                      <a:solidFill>
+                        <a:srgbClr val="C4C7C5"/>
+                      </a:solidFill>
+                      <a:prstDash val="solid"/>
+                      <a:round/>
+                      <a:headEnd type="none" w="med" len="med"/>
+                      <a:tailEnd type="none" w="med" len="med"/>
+                    </a:lnL>
+                    <a:lnR w="7620" cap="flat" cmpd="sng" algn="ctr">
+                      <a:solidFill>
+                        <a:srgbClr val="C4C7C5"/>
+                      </a:solidFill>
+                      <a:prstDash val="solid"/>
+                      <a:round/>
+                      <a:headEnd type="none" w="med" len="med"/>
+                      <a:tailEnd type="none" w="med" len="med"/>
+                    </a:lnR>
+                    <a:lnT w="7620" cap="flat" cmpd="sng" algn="ctr">
+                      <a:solidFill>
+                        <a:srgbClr val="C4C7C5"/>
+                      </a:solidFill>
+                      <a:prstDash val="solid"/>
+                      <a:round/>
+                      <a:headEnd type="none" w="med" len="med"/>
+                      <a:tailEnd type="none" w="med" len="med"/>
+                    </a:lnT>
+                    <a:lnB w="7620" cap="flat" cmpd="sng" algn="ctr">
+                      <a:solidFill>
+                        <a:srgbClr val="C4C7C5"/>
+                      </a:solidFill>
+                      <a:prstDash val="solid"/>
+                      <a:round/>
+                      <a:headEnd type="none" w="med" len="med"/>
+                      <a:tailEnd type="none" w="med" len="med"/>
+                    </a:lnB>
+                    <a:noFill/>
+                  </a:tcPr>
+                </a:tc>
+                <a:tc>
+                  <a:txBody>
+                    <a:bodyPr/>
+                    <a:lstStyle/>
+                    <a:p>
+                      <a:pPr marL="0" marR="0" rtl="0">
+                        <a:spcAft>
+                          <a:spcPts val="2400"/>
+                        </a:spcAft>
+                        <a:buNone/>
+                      </a:pPr>
+                      <a:r>
+                        <a:rPr lang="en-IN" dirty="0"/>
+                        <a:t>CDSS combining Clinical LMs, Llama 3, </a:t>
+                      </a:r>
+                      <a:r>
+                        <a:rPr lang="en-IN" dirty="0" err="1"/>
+                        <a:t>ChromaDB</a:t>
+                      </a:r>
+                      <a:r>
+                        <a:rPr lang="en-IN" dirty="0"/>
+                        <a:t>, &amp; RAG.</a:t>
+                      </a:r>
+                      <a:endParaRPr lang="en-IN" dirty="0">
+                        <a:solidFill>
+                          <a:srgbClr val="1F1F1F"/>
+                        </a:solidFill>
+                        <a:effectLst/>
+                        <a:latin typeface="Google Sans Text"/>
+                      </a:endParaRPr>
+                    </a:p>
+                  </a:txBody>
+                  <a:tcPr marT="60960" marB="60960" anchor="ctr">
+                    <a:lnL w="7620" cap="flat" cmpd="sng" algn="ctr">
+                      <a:solidFill>
+                        <a:srgbClr val="C4C7C5"/>
+                      </a:solidFill>
+                      <a:prstDash val="solid"/>
+                      <a:round/>
+                      <a:headEnd type="none" w="med" len="med"/>
+                      <a:tailEnd type="none" w="med" len="med"/>
+                    </a:lnL>
+                    <a:lnR w="7620" cap="flat" cmpd="sng" algn="ctr">
+                      <a:solidFill>
+                        <a:srgbClr val="C4C7C5"/>
+                      </a:solidFill>
+                      <a:prstDash val="solid"/>
+                      <a:round/>
+                      <a:headEnd type="none" w="med" len="med"/>
+                      <a:tailEnd type="none" w="med" len="med"/>
+                    </a:lnR>
+                    <a:lnT w="7620" cap="flat" cmpd="sng" algn="ctr">
+                      <a:solidFill>
+                        <a:srgbClr val="C4C7C5"/>
+                      </a:solidFill>
+                      <a:prstDash val="solid"/>
+                      <a:round/>
+                      <a:headEnd type="none" w="med" len="med"/>
+                      <a:tailEnd type="none" w="med" len="med"/>
+                    </a:lnT>
+                    <a:lnB w="7620" cap="flat" cmpd="sng" algn="ctr">
+                      <a:solidFill>
+                        <a:srgbClr val="C4C7C5"/>
+                      </a:solidFill>
+                      <a:prstDash val="solid"/>
+                      <a:round/>
+                      <a:headEnd type="none" w="med" len="med"/>
+                      <a:tailEnd type="none" w="med" len="med"/>
+                    </a:lnB>
+                    <a:noFill/>
+                  </a:tcPr>
+                </a:tc>
+                <a:tc>
+                  <a:txBody>
+                    <a:bodyPr/>
+                    <a:lstStyle/>
+                    <a:p>
+                      <a:pPr marL="0" marR="0" rtl="0">
+                        <a:spcAft>
+                          <a:spcPts val="2400"/>
+                        </a:spcAft>
+                        <a:buNone/>
+                      </a:pPr>
+                      <a:r>
+                        <a:rPr lang="en-IN" dirty="0"/>
+                        <a:t>Requires strict clinical validation and evaluation</a:t>
+                      </a:r>
+                      <a:endParaRPr lang="en-IN" dirty="0">
+                        <a:solidFill>
+                          <a:srgbClr val="1F1F1F"/>
+                        </a:solidFill>
+                        <a:effectLst/>
+                        <a:latin typeface="Google Sans Text"/>
+                      </a:endParaRPr>
+                    </a:p>
+                  </a:txBody>
+                  <a:tcPr marT="60960" marB="60960" anchor="ctr">
+                    <a:lnL w="7620" cap="flat" cmpd="sng" algn="ctr">
+                      <a:solidFill>
+                        <a:srgbClr val="C4C7C5"/>
+                      </a:solidFill>
+                      <a:prstDash val="solid"/>
+                      <a:round/>
+                      <a:headEnd type="none" w="med" len="med"/>
+                      <a:tailEnd type="none" w="med" len="med"/>
+                    </a:lnL>
+                    <a:lnR w="7620" cap="flat" cmpd="sng" algn="ctr">
+                      <a:solidFill>
+                        <a:srgbClr val="C4C7C5"/>
+                      </a:solidFill>
+                      <a:prstDash val="solid"/>
+                      <a:round/>
+                      <a:headEnd type="none" w="med" len="med"/>
+                      <a:tailEnd type="none" w="med" len="med"/>
+                    </a:lnR>
+                    <a:lnT w="7620" cap="flat" cmpd="sng" algn="ctr">
+                      <a:solidFill>
+                        <a:srgbClr val="C4C7C5"/>
+                      </a:solidFill>
+                      <a:prstDash val="solid"/>
+                      <a:round/>
+                      <a:headEnd type="none" w="med" len="med"/>
+                      <a:tailEnd type="none" w="med" len="med"/>
+                    </a:lnT>
+                    <a:lnB w="7620" cap="flat" cmpd="sng" algn="ctr">
+                      <a:solidFill>
+                        <a:srgbClr val="C4C7C5"/>
+                      </a:solidFill>
+                      <a:prstDash val="solid"/>
+                      <a:round/>
+                      <a:headEnd type="none" w="med" len="med"/>
+                      <a:tailEnd type="none" w="med" len="med"/>
+                    </a:lnB>
+                    <a:noFill/>
+                  </a:tcPr>
+                </a:tc>
+                <a:extLst>
+                  <a:ext uri="{0D108BD9-81ED-4DB2-BD59-A6C34878D82A}">
+                    <a16:rowId xmlns:a16="http://schemas.microsoft.com/office/drawing/2014/main" val="3132470707"/>
+                  </a:ext>
+                </a:extLst>
+              </a:tr>
+            </a:tbl>
+          </a:graphicData>
+        </a:graphic>
+      </p:graphicFrame>
+      <p:sp>
+        <p:nvSpPr>
+          <p:cNvPr id="11" name="TextBox 10">
+            <a:extLst>
+              <a:ext uri="{FF2B5EF4-FFF2-40B4-BE49-F238E27FC236}">
+                <a16:creationId xmlns:a16="http://schemas.microsoft.com/office/drawing/2014/main" id="{84C196B5-2630-734D-3CF2-781DAFE22941}"/>
+              </a:ext>
+            </a:extLst>
+          </p:cNvPr>
+          <p:cNvSpPr txBox="1"/>
+          <p:nvPr/>
+        </p:nvSpPr>
+        <p:spPr>
+          <a:xfrm>
+            <a:off x="5113866" y="1127667"/>
+            <a:ext cx="6096000" cy="369332"/>
+          </a:xfrm>
+          <a:prstGeom prst="rect">
+            <a:avLst/>
+          </a:prstGeom>
+          <a:noFill/>
+        </p:spPr>
+        <p:txBody>
+          <a:bodyPr wrap="square">
+            <a:spAutoFit/>
+          </a:bodyPr>
+          <a:lstStyle/>
+          <a:p>
+            <a:pPr marL="0" marR="0" rtl="0">
+              <a:buNone/>
+            </a:pPr>
+            <a:r>
+              <a:rPr lang="en-IN" b="1" dirty="0">
+                <a:solidFill>
+                  <a:srgbClr val="1F1F1F"/>
+                </a:solidFill>
+                <a:effectLst/>
+                <a:latin typeface="Google Sans"/>
+              </a:rPr>
+              <a:t>Literature Survey</a:t>
+            </a:r>
+          </a:p>
+        </p:txBody>
+      </p:sp>
+    </p:spTree>
+    <p:extLst>
+      <p:ext uri="{BB962C8B-B14F-4D97-AF65-F5344CB8AC3E}">
+        <p14:creationId xmlns:p14="http://schemas.microsoft.com/office/powerpoint/2010/main" val="2343066160"/>
+      </p:ext>
+    </p:extLst>
+  </p:cSld>
+  <p:clrMapOvr>
+    <a:masterClrMapping/>
+  </p:clrMapOvr>
+</p:sld>
+</file>
+
+<file path=ppt/slides/slide6.xml><?xml version="1.0" encoding="utf-8"?>
+<p:sld xmlns:a="http://schemas.openxmlformats.org/drawingml/2006/main" xmlns:r="http://schemas.openxmlformats.org/officeDocument/2006/relationships" xmlns:p="http://schemas.openxmlformats.org/presentationml/2006/main">
+  <p:cSld>
+    <p:spTree>
+      <p:nvGrpSpPr>
         <p:cNvPr id="1" name=""/>
         <p:cNvGrpSpPr/>
         <p:nvPr/>
@@ -5689,7 +8939,7 @@
 </p:sld>
 </file>
 
-<file path=ppt/slides/slide6.xml><?xml version="1.0" encoding="utf-8"?>
+<file path=ppt/slides/slide7.xml><?xml version="1.0" encoding="utf-8"?>
 <p:sld xmlns:a="http://schemas.openxmlformats.org/drawingml/2006/main" xmlns:r="http://schemas.openxmlformats.org/officeDocument/2006/relationships" xmlns:p="http://schemas.openxmlformats.org/presentationml/2006/main">
   <p:cSld>
     <p:spTree>
@@ -5762,8 +9012,8 @@
         </p:nvSpPr>
         <p:spPr>
           <a:xfrm>
-            <a:off x="770466" y="1284955"/>
-            <a:ext cx="10278533" cy="4862870"/>
+            <a:off x="778932" y="1369621"/>
+            <a:ext cx="10278533" cy="3323987"/>
           </a:xfrm>
           <a:prstGeom prst="rect">
             <a:avLst/>
@@ -5779,23 +9029,22 @@
             <a:pPr algn="ctr"/>
             <a:r>
               <a:rPr lang="en-IN" sz="2200" b="1" dirty="0"/>
-              <a:t>Dataset : MedQuAD (Medical Question Answering Dataset) </a:t>
-            </a:r>
-          </a:p>
-          <a:p>
-            <a:endParaRPr lang="en-IN" dirty="0"/>
+              <a:t>Datasets</a:t>
+            </a:r>
+          </a:p>
+          <a:p>
+            <a:pPr algn="ctr"/>
+            <a:endParaRPr lang="en-IN" sz="2200" b="1" dirty="0"/>
+          </a:p>
+          <a:p>
+            <a:pPr algn="ctr"/>
+            <a:endParaRPr lang="en-IN" sz="2200" b="1" dirty="0"/>
           </a:p>
           <a:p>
             <a:pPr marL="285750" indent="-285750">
               <a:buFont typeface="Arial" panose="020B0604020202020204" pitchFamily="34" charset="0"/>
               <a:buChar char="•"/>
             </a:pPr>
-            <a:r>
-              <a:rPr lang="en-IN" dirty="0"/>
-              <a:t>It is a medical QA dataset containing 16,407 question–answer records collected from trusted medical sources. After cleaning, 16,359 valid records were used in our pipeline.</a:t>
-            </a:r>
-          </a:p>
-          <a:p>
             <a:endParaRPr lang="en-IN" dirty="0"/>
           </a:p>
           <a:p>
@@ -5805,93 +9054,28 @@
             </a:pPr>
             <a:r>
               <a:rPr lang="en-IN" dirty="0"/>
-              <a:t>Features Extracted</a:t>
+              <a:t>MedQuAD : medical QA dataset - 16,359 valid records</a:t>
             </a:r>
           </a:p>
           <a:p>
             <a:r>
               <a:rPr lang="en-IN" dirty="0"/>
-              <a:t>Question – Patient/medical information query</a:t>
-            </a:r>
-          </a:p>
-          <a:p>
-            <a:r>
-              <a:rPr lang="en-IN" dirty="0"/>
-              <a:t>Answer – Corresponding medical explanation</a:t>
-            </a:r>
-          </a:p>
-          <a:p>
-            <a:r>
-              <a:rPr lang="en-IN" dirty="0"/>
-              <a:t>Question Type (</a:t>
-            </a:r>
-            <a:r>
-              <a:rPr lang="en-IN" dirty="0" err="1"/>
-              <a:t>qtype</a:t>
-            </a:r>
-            <a:r>
-              <a:rPr lang="en-IN" dirty="0"/>
-              <a:t>) – Categorizes the type of medical question</a:t>
-            </a:r>
-          </a:p>
-          <a:p>
-            <a:r>
-              <a:rPr lang="en-IN" dirty="0"/>
-              <a:t>Text Chunks – Long answers are divided into overlapping chunks for efficient retrieval</a:t>
-            </a:r>
-          </a:p>
-          <a:p>
-            <a:endParaRPr lang="en-IN" dirty="0"/>
-          </a:p>
-          <a:p>
-            <a:r>
-              <a:rPr lang="en-IN" dirty="0"/>
-              <a:t>MedQuAD → Data Cleaning → Chunking → </a:t>
-            </a:r>
-            <a:r>
-              <a:rPr lang="en-IN" dirty="0" err="1"/>
-              <a:t>SentenceTransformer</a:t>
-            </a:r>
-            <a:r>
-              <a:rPr lang="en-IN" dirty="0"/>
-              <a:t> Embeddings → </a:t>
-            </a:r>
-            <a:r>
-              <a:rPr lang="en-IN" dirty="0" err="1"/>
-              <a:t>ChromaDB</a:t>
-            </a:r>
-            <a:endParaRPr lang="en-IN" dirty="0"/>
-          </a:p>
-          <a:p>
-            <a:endParaRPr lang="en-IN" dirty="0"/>
+              <a:t>Sourced from GitHub</a:t>
+            </a:r>
           </a:p>
           <a:p>
             <a:pPr marL="285750" indent="-285750">
               <a:buFont typeface="Arial" panose="020B0604020202020204" pitchFamily="34" charset="0"/>
               <a:buChar char="•"/>
             </a:pPr>
-            <a:r>
-              <a:rPr lang="en-IN" dirty="0"/>
-              <a:t>Generated 384-dimensional embeddings using all-MiniLM-L6-v2</a:t>
-            </a:r>
+            <a:endParaRPr lang="en-IN" dirty="0"/>
           </a:p>
           <a:p>
             <a:pPr marL="285750" indent="-285750">
               <a:buFont typeface="Arial" panose="020B0604020202020204" pitchFamily="34" charset="0"/>
               <a:buChar char="•"/>
             </a:pPr>
-            <a:r>
-              <a:rPr lang="en-IN" dirty="0"/>
-              <a:t>Indexed 5,000 chunks in </a:t>
-            </a:r>
-            <a:r>
-              <a:rPr lang="en-IN" dirty="0" err="1"/>
-              <a:t>ChromaDB</a:t>
-            </a:r>
-            <a:r>
-              <a:rPr lang="en-IN" dirty="0"/>
-              <a:t> during development</a:t>
-            </a:r>
+            <a:endParaRPr lang="en-IN" dirty="0"/>
           </a:p>
           <a:p>
             <a:pPr marL="285750" indent="-285750">
@@ -5899,17 +9083,26 @@
               <a:buChar char="•"/>
             </a:pPr>
             <a:r>
+              <a:rPr lang="en-IN" dirty="0" err="1"/>
+              <a:t>PubMedQA</a:t>
+            </a:r>
+            <a:r>
               <a:rPr lang="en-IN" dirty="0"/>
-              <a:t>Used for semantic search and retrieval of relevant medical knowledge to support the </a:t>
-            </a:r>
-            <a:r>
-              <a:rPr lang="en-IN" dirty="0" err="1"/>
-              <a:t>ClinicaRAG</a:t>
-            </a:r>
+              <a:t> : Medical Transcriptions Raw - Extracted 4 core medical entities </a:t>
+            </a:r>
+          </a:p>
+          <a:p>
             <a:r>
               <a:rPr lang="en-IN" dirty="0"/>
-              <a:t> RAG pipeline.</a:t>
-            </a:r>
+              <a:t>Sourced from Kaggle</a:t>
+            </a:r>
+          </a:p>
+          <a:p>
+            <a:pPr marL="285750" indent="-285750">
+              <a:buFont typeface="Arial" panose="020B0604020202020204" pitchFamily="34" charset="0"/>
+              <a:buChar char="•"/>
+            </a:pPr>
+            <a:endParaRPr lang="en-IN" dirty="0"/>
           </a:p>
         </p:txBody>
       </p:sp>
@@ -5917,236 +9110,6 @@
     <p:extLst>
       <p:ext uri="{BB962C8B-B14F-4D97-AF65-F5344CB8AC3E}">
         <p14:creationId xmlns:p14="http://schemas.microsoft.com/office/powerpoint/2010/main" val="3534381961"/>
-      </p:ext>
-    </p:extLst>
-  </p:cSld>
-  <p:clrMapOvr>
-    <a:masterClrMapping/>
-  </p:clrMapOvr>
-</p:sld>
-</file>
-
-<file path=ppt/slides/slide7.xml><?xml version="1.0" encoding="utf-8"?>
-<p:sld xmlns:a="http://schemas.openxmlformats.org/drawingml/2006/main" xmlns:r="http://schemas.openxmlformats.org/officeDocument/2006/relationships" xmlns:p="http://schemas.openxmlformats.org/presentationml/2006/main">
-  <p:cSld>
-    <p:spTree>
-      <p:nvGrpSpPr>
-        <p:cNvPr id="1" name=""/>
-        <p:cNvGrpSpPr/>
-        <p:nvPr/>
-      </p:nvGrpSpPr>
-      <p:grpSpPr>
-        <a:xfrm>
-          <a:off x="0" y="0"/>
-          <a:ext cx="0" cy="0"/>
-          <a:chOff x="0" y="0"/>
-          <a:chExt cx="0" cy="0"/>
-        </a:xfrm>
-      </p:grpSpPr>
-      <p:pic>
-        <p:nvPicPr>
-          <p:cNvPr id="5" name="Picture 4">
-            <a:extLst>
-              <a:ext uri="{FF2B5EF4-FFF2-40B4-BE49-F238E27FC236}">
-                <a16:creationId xmlns:a16="http://schemas.microsoft.com/office/drawing/2014/main" id="{E7ECE8A0-7BE3-9174-3E97-7C7019EB2F8F}"/>
-              </a:ext>
-            </a:extLst>
-          </p:cNvPr>
-          <p:cNvPicPr>
-            <a:picLocks noChangeAspect="1"/>
-          </p:cNvPicPr>
-          <p:nvPr/>
-        </p:nvPicPr>
-        <p:blipFill>
-          <a:blip r:embed="rId2">
-            <a:extLst>
-              <a:ext uri="{28A0092B-C50C-407E-A947-70E740481C1C}">
-                <a14:useLocalDpi xmlns:a14="http://schemas.microsoft.com/office/drawing/2010/main" val="0"/>
-              </a:ext>
-            </a:extLst>
-          </a:blip>
-          <a:stretch>
-            <a:fillRect/>
-          </a:stretch>
-        </p:blipFill>
-        <p:spPr>
-          <a:xfrm>
-            <a:off x="2224929" y="139075"/>
-            <a:ext cx="7178671" cy="927725"/>
-          </a:xfrm>
-          <a:prstGeom prst="rect">
-            <a:avLst/>
-          </a:prstGeom>
-        </p:spPr>
-      </p:pic>
-      <p:sp>
-        <p:nvSpPr>
-          <p:cNvPr id="9" name="TextBox 8">
-            <a:extLst>
-              <a:ext uri="{FF2B5EF4-FFF2-40B4-BE49-F238E27FC236}">
-                <a16:creationId xmlns:a16="http://schemas.microsoft.com/office/drawing/2014/main" id="{0A96FEFA-4DF5-B0D9-3A34-5DCA0CCBFF43}"/>
-              </a:ext>
-            </a:extLst>
-          </p:cNvPr>
-          <p:cNvSpPr txBox="1"/>
-          <p:nvPr/>
-        </p:nvSpPr>
-        <p:spPr>
-          <a:xfrm>
-            <a:off x="1032934" y="1426908"/>
-            <a:ext cx="10278533" cy="4370427"/>
-          </a:xfrm>
-          <a:prstGeom prst="rect">
-            <a:avLst/>
-          </a:prstGeom>
-          <a:noFill/>
-        </p:spPr>
-        <p:txBody>
-          <a:bodyPr wrap="square">
-            <a:spAutoFit/>
-          </a:bodyPr>
-          <a:lstStyle/>
-          <a:p>
-            <a:pPr lvl="1" algn="ctr"/>
-            <a:r>
-              <a:rPr lang="en-IN" sz="2200" b="1" dirty="0"/>
-              <a:t>Dataset </a:t>
-            </a:r>
-          </a:p>
-          <a:p>
-            <a:pPr lvl="1" algn="ctr"/>
-            <a:endParaRPr lang="en-IN" sz="2200" b="1" dirty="0"/>
-          </a:p>
-          <a:p>
-            <a:pPr marL="742950" lvl="1" indent="-285750">
-              <a:buFont typeface="Arial" panose="020B0604020202020204" pitchFamily="34" charset="0"/>
-              <a:buChar char="•"/>
-            </a:pPr>
-            <a:r>
-              <a:rPr lang="en-IN" dirty="0"/>
-              <a:t>Primary: Medical Transcriptions(mtsamples.csv) providing raw, unstructured clinical notes.</a:t>
-            </a:r>
-          </a:p>
-          <a:p>
-            <a:pPr marL="742950" lvl="1" indent="-285750">
-              <a:buFont typeface="Arial" panose="020B0604020202020204" pitchFamily="34" charset="0"/>
-              <a:buChar char="•"/>
-            </a:pPr>
-            <a:r>
-              <a:rPr lang="en-IN" dirty="0"/>
-              <a:t>Secondary: MedQuAD &amp; </a:t>
-            </a:r>
-            <a:r>
-              <a:rPr lang="en-IN" dirty="0" err="1"/>
-              <a:t>PubMedQAserving</a:t>
-            </a:r>
-            <a:r>
-              <a:rPr lang="en-IN" dirty="0"/>
-              <a:t> as the medical knowledge base.</a:t>
-            </a:r>
-          </a:p>
-          <a:p>
-            <a:pPr lvl="1"/>
-            <a:endParaRPr lang="en-IN" dirty="0"/>
-          </a:p>
-          <a:p>
-            <a:pPr marL="742950" lvl="1" indent="-285750">
-              <a:buFont typeface="Arial" panose="020B0604020202020204" pitchFamily="34" charset="0"/>
-              <a:buChar char="•"/>
-            </a:pPr>
-            <a:r>
-              <a:rPr lang="en-IN" dirty="0"/>
-              <a:t>Features We Extracted</a:t>
-            </a:r>
-          </a:p>
-          <a:p>
-            <a:pPr lvl="1"/>
-            <a:r>
-              <a:rPr lang="en-IN" dirty="0"/>
-              <a:t>NLP (</a:t>
-            </a:r>
-            <a:r>
-              <a:rPr lang="en-IN" dirty="0" err="1"/>
-              <a:t>SpaCy</a:t>
-            </a:r>
-            <a:r>
-              <a:rPr lang="en-IN" dirty="0"/>
-              <a:t>): Cleaned, lemmatized tokens and TF-IDF/</a:t>
-            </a:r>
-            <a:r>
-              <a:rPr lang="en-IN" dirty="0" err="1"/>
-              <a:t>BoW</a:t>
-            </a:r>
-            <a:r>
-              <a:rPr lang="en-IN" dirty="0"/>
-              <a:t> matrices.</a:t>
-            </a:r>
-          </a:p>
-          <a:p>
-            <a:pPr lvl="1"/>
-            <a:r>
-              <a:rPr lang="en-IN" dirty="0"/>
-              <a:t>NER (</a:t>
-            </a:r>
-            <a:r>
-              <a:rPr lang="en-IN" dirty="0" err="1"/>
-              <a:t>BioBERT</a:t>
-            </a:r>
-            <a:r>
-              <a:rPr lang="en-IN" dirty="0"/>
-              <a:t>): Extracted 4 core medical entities into strict JSON schema: Symptoms, Suspected Diagnoses, Medications, and Lab Tests.</a:t>
-            </a:r>
-          </a:p>
-          <a:p>
-            <a:pPr lvl="1"/>
-            <a:endParaRPr lang="en-IN" dirty="0"/>
-          </a:p>
-          <a:p>
-            <a:pPr marL="742950" lvl="1" indent="-285750">
-              <a:buFont typeface="Arial" panose="020B0604020202020204" pitchFamily="34" charset="0"/>
-              <a:buChar char="•"/>
-            </a:pPr>
-            <a:r>
-              <a:rPr lang="en-IN" dirty="0"/>
-              <a:t>How We Are Using It</a:t>
-            </a:r>
-          </a:p>
-          <a:p>
-            <a:pPr lvl="1"/>
-            <a:r>
-              <a:rPr lang="en-IN" dirty="0"/>
-              <a:t>Unstructured notes are cleaned and parsed into entities. These entities are used to query our </a:t>
-            </a:r>
-            <a:r>
-              <a:rPr lang="en-IN" dirty="0" err="1"/>
-              <a:t>ChromaDB</a:t>
-            </a:r>
-            <a:r>
-              <a:rPr lang="en-IN" dirty="0"/>
-              <a:t> vector store (RAG), fetching medical evidence to feed the Llama 3 LLM for final clinical decision support.</a:t>
-            </a:r>
-          </a:p>
-          <a:p>
-            <a:pPr lvl="1"/>
-            <a:r>
-              <a:rPr lang="en-IN" dirty="0"/>
-              <a:t>Medical data analysis and electronic health records dashboard, modern blue and teal </a:t>
-            </a:r>
-            <a:r>
-              <a:rPr lang="en-IN" dirty="0" err="1"/>
-              <a:t>color</a:t>
-            </a:r>
-            <a:r>
-              <a:rPr lang="en-IN" dirty="0"/>
-              <a:t> palette</a:t>
-            </a:r>
-          </a:p>
-        </p:txBody>
-      </p:sp>
-    </p:spTree>
-    <p:extLst>
-      <p:ext uri="{BB962C8B-B14F-4D97-AF65-F5344CB8AC3E}">
-        <p14:creationId xmlns:p14="http://schemas.microsoft.com/office/powerpoint/2010/main" val="4118803354"/>
       </p:ext>
     </p:extLst>
   </p:cSld>
